--- a/courses/scu101/assets/es/SCU101_images_es.pptx
+++ b/courses/scu101/assets/es/SCU101_images_es.pptx
@@ -154,7 +154,7 @@
       </p:grpSpPr>
       <p:sp>
         <p:nvSpPr>
-          <p:cNvPr id="997791588" name="Header Placeholder 1"/>
+          <p:cNvPr id="1539461181" name="Header Placeholder 1"/>
           <p:cNvSpPr>
             <a:spLocks noGrp="1"/>
           </p:cNvSpPr>
@@ -188,7 +188,7 @@
       </p:sp>
       <p:sp>
         <p:nvSpPr>
-          <p:cNvPr id="403088873" name="Date Placeholder 2"/>
+          <p:cNvPr id="1523924022" name="Date Placeholder 2"/>
           <p:cNvSpPr>
             <a:spLocks noGrp="1"/>
           </p:cNvSpPr>
@@ -222,7 +222,7 @@
       </p:sp>
       <p:sp>
         <p:nvSpPr>
-          <p:cNvPr id="1397019446" name="Date Placeholder 2"/>
+          <p:cNvPr id="2089799050" name="Date Placeholder 2"/>
           <p:cNvSpPr>
             <a:spLocks noGrp="1"/>
           </p:cNvSpPr>
@@ -256,7 +256,7 @@
       </p:sp>
       <p:sp>
         <p:nvSpPr>
-          <p:cNvPr id="1048723363" name="Notes Placeholder 4"/>
+          <p:cNvPr id="166679424" name="Notes Placeholder 4"/>
           <p:cNvSpPr>
             <a:spLocks noGrp="1"/>
           </p:cNvSpPr>
@@ -286,7 +286,7 @@
       </p:sp>
       <p:sp>
         <p:nvSpPr>
-          <p:cNvPr id="1056903877" name="Footer Placeholder 5"/>
+          <p:cNvPr id="312217275" name="Footer Placeholder 5"/>
           <p:cNvSpPr>
             <a:spLocks noGrp="1"/>
           </p:cNvSpPr>
@@ -320,7 +320,7 @@
       </p:sp>
       <p:sp>
         <p:nvSpPr>
-          <p:cNvPr id="1888840161" name="Slide Number Placeholder 6"/>
+          <p:cNvPr id="1513303751" name="Slide Number Placeholder 6"/>
           <p:cNvSpPr>
             <a:spLocks noGrp="1"/>
           </p:cNvSpPr>
@@ -469,7 +469,7 @@
       </p:grpSpPr>
       <p:sp>
         <p:nvSpPr>
-          <p:cNvPr id="1077016209" name="Slide Image Placeholder 1"/>
+          <p:cNvPr id="538085015" name="Slide Image Placeholder 1"/>
           <p:cNvSpPr>
             <a:spLocks noChangeAspect="1" noGrp="1" noRot="1"/>
           </p:cNvSpPr>
@@ -481,7 +481,7 @@
       </p:sp>
       <p:sp>
         <p:nvSpPr>
-          <p:cNvPr id="414162497" name="Notes Placeholder 2"/>
+          <p:cNvPr id="25199510" name="Notes Placeholder 2"/>
           <p:cNvSpPr>
             <a:spLocks noGrp="1"/>
           </p:cNvSpPr>
@@ -503,7 +503,7 @@
       </p:sp>
       <p:sp>
         <p:nvSpPr>
-          <p:cNvPr id="1200767204" name="Slide Number Placeholder 3"/>
+          <p:cNvPr id="1120038103" name="Slide Number Placeholder 3"/>
           <p:cNvSpPr>
             <a:spLocks noGrp="1"/>
           </p:cNvSpPr>
@@ -554,7 +554,7 @@
       </p:grpSpPr>
       <p:sp>
         <p:nvSpPr>
-          <p:cNvPr id="862690727" name="Slide Image Placeholder 1"/>
+          <p:cNvPr id="1528031968" name="Slide Image Placeholder 1"/>
           <p:cNvSpPr>
             <a:spLocks noChangeAspect="1" noGrp="1" noRot="1"/>
           </p:cNvSpPr>
@@ -566,7 +566,7 @@
       </p:sp>
       <p:sp>
         <p:nvSpPr>
-          <p:cNvPr id="906441583" name="Notes Placeholder 2"/>
+          <p:cNvPr id="55610262" name="Notes Placeholder 2"/>
           <p:cNvSpPr>
             <a:spLocks noGrp="1"/>
           </p:cNvSpPr>
@@ -588,7 +588,7 @@
       </p:sp>
       <p:sp>
         <p:nvSpPr>
-          <p:cNvPr id="320702018" name="Slide Number Placeholder 3"/>
+          <p:cNvPr id="1059219642" name="Slide Number Placeholder 3"/>
           <p:cNvSpPr>
             <a:spLocks noGrp="1"/>
           </p:cNvSpPr>
@@ -639,7 +639,7 @@
       </p:grpSpPr>
       <p:sp>
         <p:nvSpPr>
-          <p:cNvPr id="25691739" name="Slide Image Placeholder 1"/>
+          <p:cNvPr id="108387194" name="Slide Image Placeholder 1"/>
           <p:cNvSpPr>
             <a:spLocks noChangeAspect="1" noGrp="1" noRot="1"/>
           </p:cNvSpPr>
@@ -651,7 +651,7 @@
       </p:sp>
       <p:sp>
         <p:nvSpPr>
-          <p:cNvPr id="1448612070" name="Notes Placeholder 2"/>
+          <p:cNvPr id="656042200" name="Notes Placeholder 2"/>
           <p:cNvSpPr>
             <a:spLocks noGrp="1"/>
           </p:cNvSpPr>
@@ -673,7 +673,7 @@
       </p:sp>
       <p:sp>
         <p:nvSpPr>
-          <p:cNvPr id="1694679159" name="Slide Number Placeholder 3"/>
+          <p:cNvPr id="54566649" name="Slide Number Placeholder 3"/>
           <p:cNvSpPr>
             <a:spLocks noGrp="1"/>
           </p:cNvSpPr>
@@ -724,7 +724,7 @@
       </p:grpSpPr>
       <p:sp>
         <p:nvSpPr>
-          <p:cNvPr id="458266788" name="Slide Image Placeholder 1"/>
+          <p:cNvPr id="185849126" name="Slide Image Placeholder 1"/>
           <p:cNvSpPr>
             <a:spLocks noChangeAspect="1" noGrp="1" noRot="1"/>
           </p:cNvSpPr>
@@ -736,7 +736,7 @@
       </p:sp>
       <p:sp>
         <p:nvSpPr>
-          <p:cNvPr id="2069839964" name="Notes Placeholder 2"/>
+          <p:cNvPr id="809254992" name="Notes Placeholder 2"/>
           <p:cNvSpPr>
             <a:spLocks noGrp="1"/>
           </p:cNvSpPr>
@@ -758,7 +758,7 @@
       </p:sp>
       <p:sp>
         <p:nvSpPr>
-          <p:cNvPr id="1075425928" name="Slide Number Placeholder 3"/>
+          <p:cNvPr id="853270978" name="Slide Number Placeholder 3"/>
           <p:cNvSpPr>
             <a:spLocks noGrp="1"/>
           </p:cNvSpPr>
@@ -809,7 +809,7 @@
       </p:grpSpPr>
       <p:sp>
         <p:nvSpPr>
-          <p:cNvPr id="1776688917" name="Slide Image Placeholder 1"/>
+          <p:cNvPr id="140161550" name="Slide Image Placeholder 1"/>
           <p:cNvSpPr>
             <a:spLocks noChangeAspect="1" noGrp="1" noRot="1"/>
           </p:cNvSpPr>
@@ -821,7 +821,7 @@
       </p:sp>
       <p:sp>
         <p:nvSpPr>
-          <p:cNvPr id="144806560" name="Notes Placeholder 2"/>
+          <p:cNvPr id="1939444834" name="Notes Placeholder 2"/>
           <p:cNvSpPr>
             <a:spLocks noGrp="1"/>
           </p:cNvSpPr>
@@ -843,7 +843,7 @@
       </p:sp>
       <p:sp>
         <p:nvSpPr>
-          <p:cNvPr id="266190883" name="Slide Number Placeholder 3"/>
+          <p:cNvPr id="1388540879" name="Slide Number Placeholder 3"/>
           <p:cNvSpPr>
             <a:spLocks noGrp="1"/>
           </p:cNvSpPr>
@@ -894,7 +894,7 @@
       </p:grpSpPr>
       <p:sp>
         <p:nvSpPr>
-          <p:cNvPr id="1637974722" name="Slide Image Placeholder 1"/>
+          <p:cNvPr id="1916184406" name="Slide Image Placeholder 1"/>
           <p:cNvSpPr>
             <a:spLocks noChangeAspect="1" noGrp="1" noRot="1"/>
           </p:cNvSpPr>
@@ -906,7 +906,7 @@
       </p:sp>
       <p:sp>
         <p:nvSpPr>
-          <p:cNvPr id="510031100" name="Notes Placeholder 2"/>
+          <p:cNvPr id="727100377" name="Notes Placeholder 2"/>
           <p:cNvSpPr>
             <a:spLocks noGrp="1"/>
           </p:cNvSpPr>
@@ -928,7 +928,7 @@
       </p:sp>
       <p:sp>
         <p:nvSpPr>
-          <p:cNvPr id="550922981" name="Slide Number Placeholder 3"/>
+          <p:cNvPr id="1584157336" name="Slide Number Placeholder 3"/>
           <p:cNvSpPr>
             <a:spLocks noGrp="1"/>
           </p:cNvSpPr>
@@ -979,7 +979,7 @@
       </p:grpSpPr>
       <p:sp>
         <p:nvSpPr>
-          <p:cNvPr id="253576482" name="Slide Image Placeholder 1"/>
+          <p:cNvPr id="955087142" name="Slide Image Placeholder 1"/>
           <p:cNvSpPr>
             <a:spLocks noChangeAspect="1" noGrp="1" noRot="1"/>
           </p:cNvSpPr>
@@ -991,7 +991,7 @@
       </p:sp>
       <p:sp>
         <p:nvSpPr>
-          <p:cNvPr id="1815564896" name="Notes Placeholder 2"/>
+          <p:cNvPr id="409884704" name="Notes Placeholder 2"/>
           <p:cNvSpPr>
             <a:spLocks noGrp="1"/>
           </p:cNvSpPr>
@@ -1013,7 +1013,7 @@
       </p:sp>
       <p:sp>
         <p:nvSpPr>
-          <p:cNvPr id="2143411311" name="Slide Number Placeholder 3"/>
+          <p:cNvPr id="1565567287" name="Slide Number Placeholder 3"/>
           <p:cNvSpPr>
             <a:spLocks noGrp="1"/>
           </p:cNvSpPr>
@@ -1064,7 +1064,7 @@
       </p:grpSpPr>
       <p:sp>
         <p:nvSpPr>
-          <p:cNvPr id="1865218599" name="Slide Image Placeholder 1"/>
+          <p:cNvPr id="248553188" name="Slide Image Placeholder 1"/>
           <p:cNvSpPr>
             <a:spLocks noChangeAspect="1" noGrp="1" noRot="1"/>
           </p:cNvSpPr>
@@ -1076,7 +1076,7 @@
       </p:sp>
       <p:sp>
         <p:nvSpPr>
-          <p:cNvPr id="1308248029" name="Notes Placeholder 2"/>
+          <p:cNvPr id="1152128621" name="Notes Placeholder 2"/>
           <p:cNvSpPr>
             <a:spLocks noGrp="1"/>
           </p:cNvSpPr>
@@ -1098,7 +1098,7 @@
       </p:sp>
       <p:sp>
         <p:nvSpPr>
-          <p:cNvPr id="819568472" name="Slide Number Placeholder 3"/>
+          <p:cNvPr id="816612319" name="Slide Number Placeholder 3"/>
           <p:cNvSpPr>
             <a:spLocks noGrp="1"/>
           </p:cNvSpPr>
@@ -1149,7 +1149,7 @@
       </p:grpSpPr>
       <p:sp>
         <p:nvSpPr>
-          <p:cNvPr id="1627568396" name="Slide Image Placeholder 1"/>
+          <p:cNvPr id="213330298" name="Slide Image Placeholder 1"/>
           <p:cNvSpPr>
             <a:spLocks noChangeAspect="1" noGrp="1" noRot="1"/>
           </p:cNvSpPr>
@@ -1161,7 +1161,7 @@
       </p:sp>
       <p:sp>
         <p:nvSpPr>
-          <p:cNvPr id="1148091364" name="Notes Placeholder 2"/>
+          <p:cNvPr id="349554195" name="Notes Placeholder 2"/>
           <p:cNvSpPr>
             <a:spLocks noGrp="1"/>
           </p:cNvSpPr>
@@ -1183,7 +1183,7 @@
       </p:sp>
       <p:sp>
         <p:nvSpPr>
-          <p:cNvPr id="1428699155" name="Slide Number Placeholder 3"/>
+          <p:cNvPr id="755847914" name="Slide Number Placeholder 3"/>
           <p:cNvSpPr>
             <a:spLocks noGrp="1"/>
           </p:cNvSpPr>
@@ -1234,7 +1234,7 @@
       </p:grpSpPr>
       <p:sp>
         <p:nvSpPr>
-          <p:cNvPr id="181325286" name="Slide Image Placeholder 1"/>
+          <p:cNvPr id="1270829292" name="Slide Image Placeholder 1"/>
           <p:cNvSpPr>
             <a:spLocks noChangeAspect="1" noGrp="1" noRot="1"/>
           </p:cNvSpPr>
@@ -1246,7 +1246,7 @@
       </p:sp>
       <p:sp>
         <p:nvSpPr>
-          <p:cNvPr id="1434337635" name="Notes Placeholder 2"/>
+          <p:cNvPr id="1989725589" name="Notes Placeholder 2"/>
           <p:cNvSpPr>
             <a:spLocks noGrp="1"/>
           </p:cNvSpPr>
@@ -1268,7 +1268,7 @@
       </p:sp>
       <p:sp>
         <p:nvSpPr>
-          <p:cNvPr id="653056681" name="Slide Number Placeholder 3"/>
+          <p:cNvPr id="290398671" name="Slide Number Placeholder 3"/>
           <p:cNvSpPr>
             <a:spLocks noGrp="1"/>
           </p:cNvSpPr>
@@ -1319,7 +1319,7 @@
       </p:grpSpPr>
       <p:sp>
         <p:nvSpPr>
-          <p:cNvPr id="1312618780" name="Slide Image Placeholder 1"/>
+          <p:cNvPr id="1152501067" name="Slide Image Placeholder 1"/>
           <p:cNvSpPr>
             <a:spLocks noChangeAspect="1" noGrp="1" noRot="1"/>
           </p:cNvSpPr>
@@ -1331,7 +1331,7 @@
       </p:sp>
       <p:sp>
         <p:nvSpPr>
-          <p:cNvPr id="1081125548" name="Notes Placeholder 2"/>
+          <p:cNvPr id="2045790916" name="Notes Placeholder 2"/>
           <p:cNvSpPr>
             <a:spLocks noGrp="1"/>
           </p:cNvSpPr>
@@ -1353,7 +1353,7 @@
       </p:sp>
       <p:sp>
         <p:nvSpPr>
-          <p:cNvPr id="203481183" name="Slide Number Placeholder 3"/>
+          <p:cNvPr id="323395209" name="Slide Number Placeholder 3"/>
           <p:cNvSpPr>
             <a:spLocks noGrp="1"/>
           </p:cNvSpPr>
@@ -1404,7 +1404,7 @@
       </p:grpSpPr>
       <p:sp>
         <p:nvSpPr>
-          <p:cNvPr id="552257005" name="Slide Image Placeholder 1"/>
+          <p:cNvPr id="238338202" name="Slide Image Placeholder 1"/>
           <p:cNvSpPr>
             <a:spLocks noChangeAspect="1" noGrp="1" noRot="1"/>
           </p:cNvSpPr>
@@ -1416,7 +1416,7 @@
       </p:sp>
       <p:sp>
         <p:nvSpPr>
-          <p:cNvPr id="1427851496" name="Notes Placeholder 2"/>
+          <p:cNvPr id="1093085412" name="Notes Placeholder 2"/>
           <p:cNvSpPr>
             <a:spLocks noGrp="1"/>
           </p:cNvSpPr>
@@ -1438,7 +1438,7 @@
       </p:sp>
       <p:sp>
         <p:nvSpPr>
-          <p:cNvPr id="1923511849" name="Slide Number Placeholder 3"/>
+          <p:cNvPr id="494594025" name="Slide Number Placeholder 3"/>
           <p:cNvSpPr>
             <a:spLocks noGrp="1"/>
           </p:cNvSpPr>
@@ -1489,7 +1489,7 @@
       </p:grpSpPr>
       <p:sp>
         <p:nvSpPr>
-          <p:cNvPr id="932482479" name="Slide Image Placeholder 1"/>
+          <p:cNvPr id="1110175287" name="Slide Image Placeholder 1"/>
           <p:cNvSpPr>
             <a:spLocks noChangeAspect="1" noGrp="1" noRot="1"/>
           </p:cNvSpPr>
@@ -1501,7 +1501,7 @@
       </p:sp>
       <p:sp>
         <p:nvSpPr>
-          <p:cNvPr id="1517174198" name="Notes Placeholder 2"/>
+          <p:cNvPr id="1740190270" name="Notes Placeholder 2"/>
           <p:cNvSpPr>
             <a:spLocks noGrp="1"/>
           </p:cNvSpPr>
@@ -1523,7 +1523,7 @@
       </p:sp>
       <p:sp>
         <p:nvSpPr>
-          <p:cNvPr id="2030169495" name="Slide Number Placeholder 3"/>
+          <p:cNvPr id="2002715856" name="Slide Number Placeholder 3"/>
           <p:cNvSpPr>
             <a:spLocks noGrp="1"/>
           </p:cNvSpPr>
@@ -1574,7 +1574,7 @@
       </p:grpSpPr>
       <p:sp>
         <p:nvSpPr>
-          <p:cNvPr id="1980744397" name="Slide Image Placeholder 1"/>
+          <p:cNvPr id="1158707957" name="Slide Image Placeholder 1"/>
           <p:cNvSpPr>
             <a:spLocks noChangeAspect="1" noGrp="1" noRot="1"/>
           </p:cNvSpPr>
@@ -1586,7 +1586,7 @@
       </p:sp>
       <p:sp>
         <p:nvSpPr>
-          <p:cNvPr id="1097811260" name="Notes Placeholder 2"/>
+          <p:cNvPr id="1842825639" name="Notes Placeholder 2"/>
           <p:cNvSpPr>
             <a:spLocks noGrp="1"/>
           </p:cNvSpPr>
@@ -1608,7 +1608,7 @@
       </p:sp>
       <p:sp>
         <p:nvSpPr>
-          <p:cNvPr id="327641498" name="Slide Number Placeholder 3"/>
+          <p:cNvPr id="1581484073" name="Slide Number Placeholder 3"/>
           <p:cNvSpPr>
             <a:spLocks noGrp="1"/>
           </p:cNvSpPr>
@@ -1659,7 +1659,7 @@
       </p:grpSpPr>
       <p:sp>
         <p:nvSpPr>
-          <p:cNvPr id="846909375" name="Slide Image Placeholder 1"/>
+          <p:cNvPr id="1357084812" name="Slide Image Placeholder 1"/>
           <p:cNvSpPr>
             <a:spLocks noChangeAspect="1" noGrp="1" noRot="1"/>
           </p:cNvSpPr>
@@ -1671,7 +1671,7 @@
       </p:sp>
       <p:sp>
         <p:nvSpPr>
-          <p:cNvPr id="482333065" name="Notes Placeholder 2"/>
+          <p:cNvPr id="443366589" name="Notes Placeholder 2"/>
           <p:cNvSpPr>
             <a:spLocks noGrp="1"/>
           </p:cNvSpPr>
@@ -1693,7 +1693,7 @@
       </p:sp>
       <p:sp>
         <p:nvSpPr>
-          <p:cNvPr id="701714479" name="Slide Number Placeholder 3"/>
+          <p:cNvPr id="843319704" name="Slide Number Placeholder 3"/>
           <p:cNvSpPr>
             <a:spLocks noGrp="1"/>
           </p:cNvSpPr>
@@ -1744,7 +1744,7 @@
       </p:grpSpPr>
       <p:sp>
         <p:nvSpPr>
-          <p:cNvPr id="101561873" name="Slide Image Placeholder 1"/>
+          <p:cNvPr id="986119251" name="Slide Image Placeholder 1"/>
           <p:cNvSpPr>
             <a:spLocks noChangeAspect="1" noGrp="1" noRot="1"/>
           </p:cNvSpPr>
@@ -1756,7 +1756,7 @@
       </p:sp>
       <p:sp>
         <p:nvSpPr>
-          <p:cNvPr id="279279655" name="Notes Placeholder 2"/>
+          <p:cNvPr id="317474637" name="Notes Placeholder 2"/>
           <p:cNvSpPr>
             <a:spLocks noGrp="1"/>
           </p:cNvSpPr>
@@ -1778,7 +1778,7 @@
       </p:sp>
       <p:sp>
         <p:nvSpPr>
-          <p:cNvPr id="510410429" name="Slide Number Placeholder 3"/>
+          <p:cNvPr id="731135387" name="Slide Number Placeholder 3"/>
           <p:cNvSpPr>
             <a:spLocks noGrp="1"/>
           </p:cNvSpPr>
@@ -1829,7 +1829,7 @@
       </p:grpSpPr>
       <p:sp>
         <p:nvSpPr>
-          <p:cNvPr id="1276400638" name="Slide Image Placeholder 1"/>
+          <p:cNvPr id="655159782" name="Slide Image Placeholder 1"/>
           <p:cNvSpPr>
             <a:spLocks noChangeAspect="1" noGrp="1" noRot="1"/>
           </p:cNvSpPr>
@@ -1841,7 +1841,7 @@
       </p:sp>
       <p:sp>
         <p:nvSpPr>
-          <p:cNvPr id="1429424782" name="Notes Placeholder 2"/>
+          <p:cNvPr id="909526886" name="Notes Placeholder 2"/>
           <p:cNvSpPr>
             <a:spLocks noGrp="1"/>
           </p:cNvSpPr>
@@ -1863,7 +1863,7 @@
       </p:sp>
       <p:sp>
         <p:nvSpPr>
-          <p:cNvPr id="441008737" name="Slide Number Placeholder 3"/>
+          <p:cNvPr id="1696878070" name="Slide Number Placeholder 3"/>
           <p:cNvSpPr>
             <a:spLocks noGrp="1"/>
           </p:cNvSpPr>
@@ -1914,7 +1914,7 @@
       </p:grpSpPr>
       <p:sp>
         <p:nvSpPr>
-          <p:cNvPr id="1553888030" name="Slide Image Placeholder 1"/>
+          <p:cNvPr id="1483763850" name="Slide Image Placeholder 1"/>
           <p:cNvSpPr>
             <a:spLocks noChangeAspect="1" noGrp="1" noRot="1"/>
           </p:cNvSpPr>
@@ -1926,7 +1926,7 @@
       </p:sp>
       <p:sp>
         <p:nvSpPr>
-          <p:cNvPr id="1492156504" name="Notes Placeholder 2"/>
+          <p:cNvPr id="1655606975" name="Notes Placeholder 2"/>
           <p:cNvSpPr>
             <a:spLocks noGrp="1"/>
           </p:cNvSpPr>
@@ -1948,7 +1948,7 @@
       </p:sp>
       <p:sp>
         <p:nvSpPr>
-          <p:cNvPr id="337452198" name="Slide Number Placeholder 3"/>
+          <p:cNvPr id="1785711639" name="Slide Number Placeholder 3"/>
           <p:cNvSpPr>
             <a:spLocks noGrp="1"/>
           </p:cNvSpPr>
@@ -1999,7 +1999,7 @@
       </p:grpSpPr>
       <p:sp>
         <p:nvSpPr>
-          <p:cNvPr id="188316732" name="Slide Image Placeholder 1"/>
+          <p:cNvPr id="1654810717" name="Slide Image Placeholder 1"/>
           <p:cNvSpPr>
             <a:spLocks noChangeAspect="1" noGrp="1" noRot="1"/>
           </p:cNvSpPr>
@@ -2011,7 +2011,7 @@
       </p:sp>
       <p:sp>
         <p:nvSpPr>
-          <p:cNvPr id="1897064076" name="Notes Placeholder 2"/>
+          <p:cNvPr id="53673874" name="Notes Placeholder 2"/>
           <p:cNvSpPr>
             <a:spLocks noGrp="1"/>
           </p:cNvSpPr>
@@ -2033,7 +2033,7 @@
       </p:sp>
       <p:sp>
         <p:nvSpPr>
-          <p:cNvPr id="1560236818" name="Slide Number Placeholder 3"/>
+          <p:cNvPr id="2017118419" name="Slide Number Placeholder 3"/>
           <p:cNvSpPr>
             <a:spLocks noGrp="1"/>
           </p:cNvSpPr>
@@ -2084,7 +2084,7 @@
       </p:grpSpPr>
       <p:sp>
         <p:nvSpPr>
-          <p:cNvPr id="441631244" name="Slide Image Placeholder 1"/>
+          <p:cNvPr id="994830414" name="Slide Image Placeholder 1"/>
           <p:cNvSpPr>
             <a:spLocks noChangeAspect="1" noGrp="1" noRot="1"/>
           </p:cNvSpPr>
@@ -2096,7 +2096,7 @@
       </p:sp>
       <p:sp>
         <p:nvSpPr>
-          <p:cNvPr id="334898310" name="Notes Placeholder 2"/>
+          <p:cNvPr id="923135169" name="Notes Placeholder 2"/>
           <p:cNvSpPr>
             <a:spLocks noGrp="1"/>
           </p:cNvSpPr>
@@ -2118,7 +2118,7 @@
       </p:sp>
       <p:sp>
         <p:nvSpPr>
-          <p:cNvPr id="1243455497" name="Slide Number Placeholder 3"/>
+          <p:cNvPr id="1874841179" name="Slide Number Placeholder 3"/>
           <p:cNvSpPr>
             <a:spLocks noGrp="1"/>
           </p:cNvSpPr>
@@ -2169,7 +2169,7 @@
       </p:grpSpPr>
       <p:sp>
         <p:nvSpPr>
-          <p:cNvPr id="114624210" name="Slide Image Placeholder 1"/>
+          <p:cNvPr id="1883327265" name="Slide Image Placeholder 1"/>
           <p:cNvSpPr>
             <a:spLocks noChangeAspect="1" noGrp="1" noRot="1"/>
           </p:cNvSpPr>
@@ -2181,7 +2181,7 @@
       </p:sp>
       <p:sp>
         <p:nvSpPr>
-          <p:cNvPr id="699007878" name="Notes Placeholder 2"/>
+          <p:cNvPr id="1366832226" name="Notes Placeholder 2"/>
           <p:cNvSpPr>
             <a:spLocks noGrp="1"/>
           </p:cNvSpPr>
@@ -2203,7 +2203,7 @@
       </p:sp>
       <p:sp>
         <p:nvSpPr>
-          <p:cNvPr id="1601091638" name="Slide Number Placeholder 3"/>
+          <p:cNvPr id="913935710" name="Slide Number Placeholder 3"/>
           <p:cNvSpPr>
             <a:spLocks noGrp="1"/>
           </p:cNvSpPr>
@@ -2254,7 +2254,7 @@
       </p:grpSpPr>
       <p:sp>
         <p:nvSpPr>
-          <p:cNvPr id="1274129645" name="Title 1"/>
+          <p:cNvPr id="1350247647" name="Title 1"/>
           <p:cNvSpPr>
             <a:spLocks noGrp="1"/>
           </p:cNvSpPr>
@@ -2285,7 +2285,7 @@
       </p:sp>
       <p:sp>
         <p:nvSpPr>
-          <p:cNvPr id="2061259411" name="Subtitle 2"/>
+          <p:cNvPr id="1970992874" name="Subtitle 2"/>
           <p:cNvSpPr>
             <a:spLocks noGrp="1"/>
           </p:cNvSpPr>
@@ -2407,7 +2407,7 @@
       </p:sp>
       <p:sp>
         <p:nvSpPr>
-          <p:cNvPr id="1644503620" name="Date Placeholder 3"/>
+          <p:cNvPr id="1029926349" name="Date Placeholder 3"/>
           <p:cNvSpPr>
             <a:spLocks noGrp="1"/>
           </p:cNvSpPr>
@@ -2433,7 +2433,7 @@
       </p:sp>
       <p:sp>
         <p:nvSpPr>
-          <p:cNvPr id="782851939" name="Footer Placeholder 4"/>
+          <p:cNvPr id="553611866" name="Footer Placeholder 4"/>
           <p:cNvSpPr>
             <a:spLocks noGrp="1"/>
           </p:cNvSpPr>
@@ -2455,7 +2455,7 @@
       </p:sp>
       <p:sp>
         <p:nvSpPr>
-          <p:cNvPr id="937921058" name="Slide Number Placeholder 5"/>
+          <p:cNvPr id="1713378702" name="Slide Number Placeholder 5"/>
           <p:cNvSpPr>
             <a:spLocks noGrp="1"/>
           </p:cNvSpPr>
@@ -2506,7 +2506,7 @@
       </p:grpSpPr>
       <p:sp>
         <p:nvSpPr>
-          <p:cNvPr id="138961832" name="Title 1"/>
+          <p:cNvPr id="76385921" name="Title 1"/>
           <p:cNvSpPr>
             <a:spLocks noGrp="1"/>
           </p:cNvSpPr>
@@ -2532,7 +2532,7 @@
       </p:sp>
       <p:sp>
         <p:nvSpPr>
-          <p:cNvPr id="365994761" name="Vertical Text Placeholder 2"/>
+          <p:cNvPr id="1801663284" name="Vertical Text Placeholder 2"/>
           <p:cNvSpPr>
             <a:spLocks noGrp="1"/>
           </p:cNvSpPr>
@@ -2598,7 +2598,7 @@
       </p:sp>
       <p:sp>
         <p:nvSpPr>
-          <p:cNvPr id="920799241" name="Date Placeholder 3"/>
+          <p:cNvPr id="1328227646" name="Date Placeholder 3"/>
           <p:cNvSpPr>
             <a:spLocks noGrp="1"/>
           </p:cNvSpPr>
@@ -2624,7 +2624,7 @@
       </p:sp>
       <p:sp>
         <p:nvSpPr>
-          <p:cNvPr id="1746891292" name="Footer Placeholder 4"/>
+          <p:cNvPr id="72257458" name="Footer Placeholder 4"/>
           <p:cNvSpPr>
             <a:spLocks noGrp="1"/>
           </p:cNvSpPr>
@@ -2646,7 +2646,7 @@
       </p:sp>
       <p:sp>
         <p:nvSpPr>
-          <p:cNvPr id="2097956991" name="Slide Number Placeholder 5"/>
+          <p:cNvPr id="1897705383" name="Slide Number Placeholder 5"/>
           <p:cNvSpPr>
             <a:spLocks noGrp="1"/>
           </p:cNvSpPr>
@@ -2697,7 +2697,7 @@
       </p:grpSpPr>
       <p:sp>
         <p:nvSpPr>
-          <p:cNvPr id="1442606123" name="Vertical Title 1"/>
+          <p:cNvPr id="1483463819" name="Vertical Title 1"/>
           <p:cNvSpPr>
             <a:spLocks noGrp="1"/>
           </p:cNvSpPr>
@@ -2728,7 +2728,7 @@
       </p:sp>
       <p:sp>
         <p:nvSpPr>
-          <p:cNvPr id="19371784" name="Vertical Text Placeholder 2"/>
+          <p:cNvPr id="209121196" name="Vertical Text Placeholder 2"/>
           <p:cNvSpPr>
             <a:spLocks noGrp="1"/>
           </p:cNvSpPr>
@@ -2799,7 +2799,7 @@
       </p:sp>
       <p:sp>
         <p:nvSpPr>
-          <p:cNvPr id="1390061909" name="Date Placeholder 3"/>
+          <p:cNvPr id="1689928407" name="Date Placeholder 3"/>
           <p:cNvSpPr>
             <a:spLocks noGrp="1"/>
           </p:cNvSpPr>
@@ -2825,7 +2825,7 @@
       </p:sp>
       <p:sp>
         <p:nvSpPr>
-          <p:cNvPr id="1218123309" name="Footer Placeholder 4"/>
+          <p:cNvPr id="899784331" name="Footer Placeholder 4"/>
           <p:cNvSpPr>
             <a:spLocks noGrp="1"/>
           </p:cNvSpPr>
@@ -2847,7 +2847,7 @@
       </p:sp>
       <p:sp>
         <p:nvSpPr>
-          <p:cNvPr id="296583723" name="Slide Number Placeholder 5"/>
+          <p:cNvPr id="1403537056" name="Slide Number Placeholder 5"/>
           <p:cNvSpPr>
             <a:spLocks noGrp="1"/>
           </p:cNvSpPr>
@@ -2898,7 +2898,7 @@
       </p:grpSpPr>
       <p:sp>
         <p:nvSpPr>
-          <p:cNvPr id="1747852057" name="Title 1"/>
+          <p:cNvPr id="432175385" name="Title 1"/>
           <p:cNvSpPr>
             <a:spLocks noGrp="1"/>
           </p:cNvSpPr>
@@ -2924,7 +2924,7 @@
       </p:sp>
       <p:sp>
         <p:nvSpPr>
-          <p:cNvPr id="1571862377" name="Content Placeholder 2"/>
+          <p:cNvPr id="874797030" name="Content Placeholder 2"/>
           <p:cNvSpPr>
             <a:spLocks noGrp="1"/>
           </p:cNvSpPr>
@@ -2990,7 +2990,7 @@
       </p:sp>
       <p:sp>
         <p:nvSpPr>
-          <p:cNvPr id="1768001521" name="Date Placeholder 3"/>
+          <p:cNvPr id="1688621669" name="Date Placeholder 3"/>
           <p:cNvSpPr>
             <a:spLocks noGrp="1"/>
           </p:cNvSpPr>
@@ -3016,7 +3016,7 @@
       </p:sp>
       <p:sp>
         <p:nvSpPr>
-          <p:cNvPr id="1862143721" name="Footer Placeholder 4"/>
+          <p:cNvPr id="1787118035" name="Footer Placeholder 4"/>
           <p:cNvSpPr>
             <a:spLocks noGrp="1"/>
           </p:cNvSpPr>
@@ -3038,7 +3038,7 @@
       </p:sp>
       <p:sp>
         <p:nvSpPr>
-          <p:cNvPr id="792642216" name="Slide Number Placeholder 5"/>
+          <p:cNvPr id="1670455421" name="Slide Number Placeholder 5"/>
           <p:cNvSpPr>
             <a:spLocks noGrp="1"/>
           </p:cNvSpPr>
@@ -3089,7 +3089,7 @@
       </p:grpSpPr>
       <p:sp>
         <p:nvSpPr>
-          <p:cNvPr id="903617724" name="Title 1"/>
+          <p:cNvPr id="687403853" name="Title 1"/>
           <p:cNvSpPr>
             <a:spLocks noGrp="1"/>
           </p:cNvSpPr>
@@ -3124,7 +3124,7 @@
       </p:sp>
       <p:sp>
         <p:nvSpPr>
-          <p:cNvPr id="1789991050" name="Text Placeholder 2"/>
+          <p:cNvPr id="87240213" name="Text Placeholder 2"/>
           <p:cNvSpPr>
             <a:spLocks noGrp="1"/>
           </p:cNvSpPr>
@@ -3246,7 +3246,7 @@
       </p:sp>
       <p:sp>
         <p:nvSpPr>
-          <p:cNvPr id="627725869" name="Date Placeholder 3"/>
+          <p:cNvPr id="413879033" name="Date Placeholder 3"/>
           <p:cNvSpPr>
             <a:spLocks noGrp="1"/>
           </p:cNvSpPr>
@@ -3272,7 +3272,7 @@
       </p:sp>
       <p:sp>
         <p:nvSpPr>
-          <p:cNvPr id="1550291638" name="Footer Placeholder 4"/>
+          <p:cNvPr id="1246312742" name="Footer Placeholder 4"/>
           <p:cNvSpPr>
             <a:spLocks noGrp="1"/>
           </p:cNvSpPr>
@@ -3294,7 +3294,7 @@
       </p:sp>
       <p:sp>
         <p:nvSpPr>
-          <p:cNvPr id="1654432161" name="Slide Number Placeholder 5"/>
+          <p:cNvPr id="956351348" name="Slide Number Placeholder 5"/>
           <p:cNvSpPr>
             <a:spLocks noGrp="1"/>
           </p:cNvSpPr>
@@ -3345,7 +3345,7 @@
       </p:grpSpPr>
       <p:sp>
         <p:nvSpPr>
-          <p:cNvPr id="183035336" name="Title 1"/>
+          <p:cNvPr id="2129363593" name="Title 1"/>
           <p:cNvSpPr>
             <a:spLocks noGrp="1"/>
           </p:cNvSpPr>
@@ -3371,7 +3371,7 @@
       </p:sp>
       <p:sp>
         <p:nvSpPr>
-          <p:cNvPr id="939420385" name="Content Placeholder 2"/>
+          <p:cNvPr id="1099663872" name="Content Placeholder 2"/>
           <p:cNvSpPr>
             <a:spLocks noGrp="1"/>
           </p:cNvSpPr>
@@ -3470,7 +3470,7 @@
       </p:sp>
       <p:sp>
         <p:nvSpPr>
-          <p:cNvPr id="2078881859" name="Content Placeholder 3"/>
+          <p:cNvPr id="107969989" name="Content Placeholder 3"/>
           <p:cNvSpPr>
             <a:spLocks noGrp="1"/>
           </p:cNvSpPr>
@@ -3569,7 +3569,7 @@
       </p:sp>
       <p:sp>
         <p:nvSpPr>
-          <p:cNvPr id="562662272" name="Date Placeholder 4"/>
+          <p:cNvPr id="788552269" name="Date Placeholder 4"/>
           <p:cNvSpPr>
             <a:spLocks noGrp="1"/>
           </p:cNvSpPr>
@@ -3595,7 +3595,7 @@
       </p:sp>
       <p:sp>
         <p:nvSpPr>
-          <p:cNvPr id="1298448730" name="Footer Placeholder 5"/>
+          <p:cNvPr id="272621562" name="Footer Placeholder 5"/>
           <p:cNvSpPr>
             <a:spLocks noGrp="1"/>
           </p:cNvSpPr>
@@ -3617,7 +3617,7 @@
       </p:sp>
       <p:sp>
         <p:nvSpPr>
-          <p:cNvPr id="1414293176" name="Slide Number Placeholder 6"/>
+          <p:cNvPr id="679495277" name="Slide Number Placeholder 6"/>
           <p:cNvSpPr>
             <a:spLocks noGrp="1"/>
           </p:cNvSpPr>
@@ -3668,7 +3668,7 @@
       </p:grpSpPr>
       <p:sp>
         <p:nvSpPr>
-          <p:cNvPr id="2062422265" name="Title 1"/>
+          <p:cNvPr id="567519460" name="Title 1"/>
           <p:cNvSpPr>
             <a:spLocks noGrp="1"/>
           </p:cNvSpPr>
@@ -3698,7 +3698,7 @@
       </p:sp>
       <p:sp>
         <p:nvSpPr>
-          <p:cNvPr id="1252347062" name="Text Placeholder 2"/>
+          <p:cNvPr id="1360995508" name="Text Placeholder 2"/>
           <p:cNvSpPr>
             <a:spLocks noGrp="1"/>
           </p:cNvSpPr>
@@ -3766,7 +3766,7 @@
       </p:sp>
       <p:sp>
         <p:nvSpPr>
-          <p:cNvPr id="1179947677" name="Content Placeholder 3"/>
+          <p:cNvPr id="1198426012" name="Content Placeholder 3"/>
           <p:cNvSpPr>
             <a:spLocks noGrp="1"/>
           </p:cNvSpPr>
@@ -3865,7 +3865,7 @@
       </p:sp>
       <p:sp>
         <p:nvSpPr>
-          <p:cNvPr id="733993788" name="Text Placeholder 4"/>
+          <p:cNvPr id="501442024" name="Text Placeholder 4"/>
           <p:cNvSpPr>
             <a:spLocks noGrp="1"/>
           </p:cNvSpPr>
@@ -3933,7 +3933,7 @@
       </p:sp>
       <p:sp>
         <p:nvSpPr>
-          <p:cNvPr id="1569812493" name="Content Placeholder 5"/>
+          <p:cNvPr id="772514223" name="Content Placeholder 5"/>
           <p:cNvSpPr>
             <a:spLocks noGrp="1"/>
           </p:cNvSpPr>
@@ -4032,7 +4032,7 @@
       </p:sp>
       <p:sp>
         <p:nvSpPr>
-          <p:cNvPr id="437385221" name="Date Placeholder 6"/>
+          <p:cNvPr id="1364026831" name="Date Placeholder 6"/>
           <p:cNvSpPr>
             <a:spLocks noGrp="1"/>
           </p:cNvSpPr>
@@ -4058,7 +4058,7 @@
       </p:sp>
       <p:sp>
         <p:nvSpPr>
-          <p:cNvPr id="2004059139" name="Footer Placeholder 7"/>
+          <p:cNvPr id="2039728596" name="Footer Placeholder 7"/>
           <p:cNvSpPr>
             <a:spLocks noGrp="1"/>
           </p:cNvSpPr>
@@ -4080,7 +4080,7 @@
       </p:sp>
       <p:sp>
         <p:nvSpPr>
-          <p:cNvPr id="1868056297" name="Slide Number Placeholder 8"/>
+          <p:cNvPr id="1628332740" name="Slide Number Placeholder 8"/>
           <p:cNvSpPr>
             <a:spLocks noGrp="1"/>
           </p:cNvSpPr>
@@ -4131,7 +4131,7 @@
       </p:grpSpPr>
       <p:sp>
         <p:nvSpPr>
-          <p:cNvPr id="1982562165" name="Title 1"/>
+          <p:cNvPr id="1392120775" name="Title 1"/>
           <p:cNvSpPr>
             <a:spLocks noGrp="1"/>
           </p:cNvSpPr>
@@ -4157,7 +4157,7 @@
       </p:sp>
       <p:sp>
         <p:nvSpPr>
-          <p:cNvPr id="1506618909" name="Date Placeholder 2"/>
+          <p:cNvPr id="1479417241" name="Date Placeholder 2"/>
           <p:cNvSpPr>
             <a:spLocks noGrp="1"/>
           </p:cNvSpPr>
@@ -4183,7 +4183,7 @@
       </p:sp>
       <p:sp>
         <p:nvSpPr>
-          <p:cNvPr id="1726588077" name="Footer Placeholder 3"/>
+          <p:cNvPr id="1929644680" name="Footer Placeholder 3"/>
           <p:cNvSpPr>
             <a:spLocks noGrp="1"/>
           </p:cNvSpPr>
@@ -4205,7 +4205,7 @@
       </p:sp>
       <p:sp>
         <p:nvSpPr>
-          <p:cNvPr id="695441700" name="Slide Number Placeholder 4"/>
+          <p:cNvPr id="1792811254" name="Slide Number Placeholder 4"/>
           <p:cNvSpPr>
             <a:spLocks noGrp="1"/>
           </p:cNvSpPr>
@@ -4256,7 +4256,7 @@
       </p:grpSpPr>
       <p:sp>
         <p:nvSpPr>
-          <p:cNvPr id="753470525" name="Date Placeholder 1"/>
+          <p:cNvPr id="419769675" name="Date Placeholder 1"/>
           <p:cNvSpPr>
             <a:spLocks noGrp="1"/>
           </p:cNvSpPr>
@@ -4282,7 +4282,7 @@
       </p:sp>
       <p:sp>
         <p:nvSpPr>
-          <p:cNvPr id="1888103419" name="Footer Placeholder 2"/>
+          <p:cNvPr id="1870552406" name="Footer Placeholder 2"/>
           <p:cNvSpPr>
             <a:spLocks noGrp="1"/>
           </p:cNvSpPr>
@@ -4304,7 +4304,7 @@
       </p:sp>
       <p:sp>
         <p:nvSpPr>
-          <p:cNvPr id="1485980443" name="Slide Number Placeholder 3"/>
+          <p:cNvPr id="499012345" name="Slide Number Placeholder 3"/>
           <p:cNvSpPr>
             <a:spLocks noGrp="1"/>
           </p:cNvSpPr>
@@ -4355,7 +4355,7 @@
       </p:grpSpPr>
       <p:sp>
         <p:nvSpPr>
-          <p:cNvPr id="1450053352" name="Title 1"/>
+          <p:cNvPr id="1852653766" name="Title 1"/>
           <p:cNvSpPr>
             <a:spLocks noGrp="1"/>
           </p:cNvSpPr>
@@ -4390,7 +4390,7 @@
       </p:sp>
       <p:sp>
         <p:nvSpPr>
-          <p:cNvPr id="1205937883" name="Content Placeholder 2"/>
+          <p:cNvPr id="1999081490" name="Content Placeholder 2"/>
           <p:cNvSpPr>
             <a:spLocks noGrp="1"/>
           </p:cNvSpPr>
@@ -4489,7 +4489,7 @@
       </p:sp>
       <p:sp>
         <p:nvSpPr>
-          <p:cNvPr id="385708935" name="Text Placeholder 3"/>
+          <p:cNvPr id="813937938" name="Text Placeholder 3"/>
           <p:cNvSpPr>
             <a:spLocks noGrp="1"/>
           </p:cNvSpPr>
@@ -4557,7 +4557,7 @@
       </p:sp>
       <p:sp>
         <p:nvSpPr>
-          <p:cNvPr id="1372906688" name="Date Placeholder 4"/>
+          <p:cNvPr id="1910368031" name="Date Placeholder 4"/>
           <p:cNvSpPr>
             <a:spLocks noGrp="1"/>
           </p:cNvSpPr>
@@ -4583,7 +4583,7 @@
       </p:sp>
       <p:sp>
         <p:nvSpPr>
-          <p:cNvPr id="317897660" name="Footer Placeholder 5"/>
+          <p:cNvPr id="1672106252" name="Footer Placeholder 5"/>
           <p:cNvSpPr>
             <a:spLocks noGrp="1"/>
           </p:cNvSpPr>
@@ -4605,7 +4605,7 @@
       </p:sp>
       <p:sp>
         <p:nvSpPr>
-          <p:cNvPr id="1478291163" name="Slide Number Placeholder 6"/>
+          <p:cNvPr id="1111979614" name="Slide Number Placeholder 6"/>
           <p:cNvSpPr>
             <a:spLocks noGrp="1"/>
           </p:cNvSpPr>
@@ -4656,7 +4656,7 @@
       </p:grpSpPr>
       <p:sp>
         <p:nvSpPr>
-          <p:cNvPr id="500382121" name="Title 1"/>
+          <p:cNvPr id="978329761" name="Title 1"/>
           <p:cNvSpPr>
             <a:spLocks noGrp="1"/>
           </p:cNvSpPr>
@@ -4691,7 +4691,7 @@
       </p:sp>
       <p:sp>
         <p:nvSpPr>
-          <p:cNvPr id="1442387833" name="Picture Placeholder 2"/>
+          <p:cNvPr id="1275624077" name="Picture Placeholder 2"/>
           <p:cNvSpPr>
             <a:spLocks noGrp="1"/>
           </p:cNvSpPr>
@@ -4755,7 +4755,7 @@
       </p:sp>
       <p:sp>
         <p:nvSpPr>
-          <p:cNvPr id="1666149780" name="Text Placeholder 3"/>
+          <p:cNvPr id="13081115" name="Text Placeholder 3"/>
           <p:cNvSpPr>
             <a:spLocks noGrp="1"/>
           </p:cNvSpPr>
@@ -4823,7 +4823,7 @@
       </p:sp>
       <p:sp>
         <p:nvSpPr>
-          <p:cNvPr id="815891493" name="Date Placeholder 4"/>
+          <p:cNvPr id="875805453" name="Date Placeholder 4"/>
           <p:cNvSpPr>
             <a:spLocks noGrp="1"/>
           </p:cNvSpPr>
@@ -4849,7 +4849,7 @@
       </p:sp>
       <p:sp>
         <p:nvSpPr>
-          <p:cNvPr id="1678153741" name="Footer Placeholder 5"/>
+          <p:cNvPr id="1352302504" name="Footer Placeholder 5"/>
           <p:cNvSpPr>
             <a:spLocks noGrp="1"/>
           </p:cNvSpPr>
@@ -4871,7 +4871,7 @@
       </p:sp>
       <p:sp>
         <p:nvSpPr>
-          <p:cNvPr id="1980964417" name="Slide Number Placeholder 6"/>
+          <p:cNvPr id="388320197" name="Slide Number Placeholder 6"/>
           <p:cNvSpPr>
             <a:spLocks noGrp="1"/>
           </p:cNvSpPr>
@@ -4927,7 +4927,7 @@
       </p:grpSpPr>
       <p:sp>
         <p:nvSpPr>
-          <p:cNvPr id="579145258" name="Title Placeholder 1"/>
+          <p:cNvPr id="1786572554" name="Title Placeholder 1"/>
           <p:cNvSpPr>
             <a:spLocks noGrp="1"/>
           </p:cNvSpPr>
@@ -4963,7 +4963,7 @@
       </p:sp>
       <p:sp>
         <p:nvSpPr>
-          <p:cNvPr id="1839615527" name="Text Placeholder 2"/>
+          <p:cNvPr id="733645760" name="Text Placeholder 2"/>
           <p:cNvSpPr>
             <a:spLocks noGrp="1"/>
           </p:cNvSpPr>
@@ -5039,7 +5039,7 @@
       </p:sp>
       <p:sp>
         <p:nvSpPr>
-          <p:cNvPr id="1467195889" name="Date Placeholder 3"/>
+          <p:cNvPr id="1277456204" name="Date Placeholder 3"/>
           <p:cNvSpPr>
             <a:spLocks noGrp="1"/>
           </p:cNvSpPr>
@@ -5083,7 +5083,7 @@
       </p:sp>
       <p:sp>
         <p:nvSpPr>
-          <p:cNvPr id="2037972869" name="Footer Placeholder 4"/>
+          <p:cNvPr id="1129639611" name="Footer Placeholder 4"/>
           <p:cNvSpPr>
             <a:spLocks noGrp="1"/>
           </p:cNvSpPr>
@@ -5123,7 +5123,7 @@
       </p:sp>
       <p:sp>
         <p:nvSpPr>
-          <p:cNvPr id="979996574" name="Slide Number Placeholder 5"/>
+          <p:cNvPr id="135733862" name="Slide Number Placeholder 5"/>
           <p:cNvSpPr>
             <a:spLocks noGrp="1"/>
           </p:cNvSpPr>
@@ -5439,9 +5439,7 @@
   <p:cSld name="">
     <p:bg>
       <p:bgPr shadeToTitle="0">
-        <a:solidFill>
-          <a:srgbClr val="F2F2F2"/>
-        </a:solidFill>
+        <a:noFill/>
       </p:bgPr>
     </p:bg>
     <p:spTree>
@@ -5460,7 +5458,7 @@
       </p:grpSpPr>
       <p:sp>
         <p:nvSpPr>
-          <p:cNvPr id="1756979208" name="Freeform 3"/>
+          <p:cNvPr id="280498079" name="Freeform 3"/>
           <p:cNvSpPr/>
           <p:nvPr/>
         </p:nvSpPr>
@@ -5545,14 +5543,14 @@
       </p:sp>
       <p:sp>
         <p:nvSpPr>
-          <p:cNvPr id="529533089" name="TextBox 4"/>
+          <p:cNvPr id="1066711762" name="TextBox 4"/>
           <p:cNvSpPr txBox="1"/>
           <p:nvPr/>
         </p:nvSpPr>
         <p:spPr bwMode="auto">
           <a:xfrm rot="0" flipH="0" flipV="0">
             <a:off x="6256041" y="2984844"/>
-            <a:ext cx="4967996" cy="955029"/>
+            <a:ext cx="4967995" cy="955029"/>
           </a:xfrm>
           <a:prstGeom prst="rect">
             <a:avLst/>
@@ -5587,7 +5585,7 @@
       </p:sp>
       <p:sp>
         <p:nvSpPr>
-          <p:cNvPr id="573260422" name="Freeform 5"/>
+          <p:cNvPr id="1419147078" name="Freeform 5"/>
           <p:cNvSpPr/>
           <p:nvPr/>
         </p:nvSpPr>
@@ -5636,7 +5634,7 @@
       </p:sp>
       <p:sp>
         <p:nvSpPr>
-          <p:cNvPr id="1091608501" name="AutoShape 6"/>
+          <p:cNvPr id="1571143037" name="AutoShape 6"/>
           <p:cNvSpPr/>
           <p:nvPr/>
         </p:nvSpPr>
@@ -5664,7 +5662,7 @@
       </p:sp>
       <p:sp>
         <p:nvSpPr>
-          <p:cNvPr id="1773528658" name="AutoShape 7"/>
+          <p:cNvPr id="386099944" name="AutoShape 7"/>
           <p:cNvSpPr/>
           <p:nvPr/>
         </p:nvSpPr>
@@ -5692,7 +5690,7 @@
       </p:sp>
       <p:sp>
         <p:nvSpPr>
-          <p:cNvPr id="1647694261" name="Freeform 8"/>
+          <p:cNvPr id="754728133" name="Freeform 8"/>
           <p:cNvSpPr/>
           <p:nvPr/>
         </p:nvSpPr>
@@ -5741,7 +5739,7 @@
       </p:sp>
       <p:sp>
         <p:nvSpPr>
-          <p:cNvPr id="564201547" name="Freeform 9"/>
+          <p:cNvPr id="344004983" name="Freeform 9"/>
           <p:cNvSpPr/>
           <p:nvPr/>
         </p:nvSpPr>
@@ -5790,7 +5788,7 @@
       </p:sp>
       <p:sp>
         <p:nvSpPr>
-          <p:cNvPr id="1220387659" name="AutoShape 10"/>
+          <p:cNvPr id="1346494693" name="AutoShape 10"/>
           <p:cNvSpPr/>
           <p:nvPr/>
         </p:nvSpPr>
@@ -5818,7 +5816,7 @@
       </p:sp>
       <p:sp>
         <p:nvSpPr>
-          <p:cNvPr id="2090231089" name="AutoShape 11"/>
+          <p:cNvPr id="1053094743" name="AutoShape 11"/>
           <p:cNvSpPr/>
           <p:nvPr/>
         </p:nvSpPr>
@@ -5846,7 +5844,7 @@
       </p:sp>
       <p:sp>
         <p:nvSpPr>
-          <p:cNvPr id="912373558" name="AutoShape 12"/>
+          <p:cNvPr id="1023535980" name="AutoShape 12"/>
           <p:cNvSpPr/>
           <p:nvPr/>
         </p:nvSpPr>
@@ -5893,9 +5891,7 @@
   <p:cSld name="">
     <p:bg>
       <p:bgPr shadeToTitle="0">
-        <a:solidFill>
-          <a:srgbClr val="F2F2F2"/>
-        </a:solidFill>
+        <a:noFill/>
       </p:bgPr>
     </p:bg>
     <p:spTree>
@@ -5914,7 +5910,7 @@
       </p:grpSpPr>
       <p:sp>
         <p:nvSpPr>
-          <p:cNvPr id="366349651" name="Freeform 2"/>
+          <p:cNvPr id="1502182262" name="Freeform 2"/>
           <p:cNvSpPr/>
           <p:nvPr/>
         </p:nvSpPr>
@@ -5971,7 +5967,7 @@
       </p:sp>
       <p:sp>
         <p:nvSpPr>
-          <p:cNvPr id="861607340" name="Freeform 3"/>
+          <p:cNvPr id="461883358" name="Freeform 3"/>
           <p:cNvSpPr/>
           <p:nvPr/>
         </p:nvSpPr>
@@ -6028,12 +6024,12 @@
       </p:sp>
       <p:sp>
         <p:nvSpPr>
-          <p:cNvPr id="2061372992" name="Freeform 4"/>
+          <p:cNvPr id="1912294458" name="Freeform 4"/>
           <p:cNvSpPr/>
           <p:nvPr/>
         </p:nvSpPr>
         <p:spPr bwMode="auto">
-          <a:xfrm rot="3898292" flipH="1" flipV="0">
+          <a:xfrm rot="3898291" flipH="1" flipV="0">
             <a:off x="6152054" y="4878347"/>
             <a:ext cx="1470785" cy="415497"/>
           </a:xfrm>
@@ -6085,7 +6081,7 @@
       </p:sp>
       <p:sp>
         <p:nvSpPr>
-          <p:cNvPr id="641071339" name="Freeform 5"/>
+          <p:cNvPr id="1711606438" name="Freeform 5"/>
           <p:cNvSpPr/>
           <p:nvPr/>
         </p:nvSpPr>
@@ -6142,14 +6138,14 @@
       </p:sp>
       <p:sp>
         <p:nvSpPr>
-          <p:cNvPr id="573113007" name="TextBox 8"/>
+          <p:cNvPr id="1757128369" name="TextBox 8"/>
           <p:cNvSpPr txBox="1"/>
           <p:nvPr/>
         </p:nvSpPr>
         <p:spPr bwMode="auto">
           <a:xfrm rot="0" flipH="0" flipV="0">
             <a:off x="878623" y="588870"/>
-            <a:ext cx="5943766" cy="396599"/>
+            <a:ext cx="5943765" cy="396599"/>
           </a:xfrm>
           <a:prstGeom prst="rect">
             <a:avLst/>
@@ -6185,7 +6181,7 @@
       </p:sp>
       <p:sp>
         <p:nvSpPr>
-          <p:cNvPr id="867583553" name="TextBox 9"/>
+          <p:cNvPr id="1062244551" name="TextBox 9"/>
           <p:cNvSpPr txBox="1"/>
           <p:nvPr/>
         </p:nvSpPr>
@@ -6228,14 +6224,14 @@
       </p:sp>
       <p:sp>
         <p:nvSpPr>
-          <p:cNvPr id="432454251" name="TextBox 10"/>
+          <p:cNvPr id="821093683" name="TextBox 10"/>
           <p:cNvSpPr txBox="1"/>
           <p:nvPr/>
         </p:nvSpPr>
         <p:spPr bwMode="auto">
           <a:xfrm rot="0" flipH="0" flipV="0">
             <a:off x="7504666" y="5192156"/>
-            <a:ext cx="2563292" cy="792839"/>
+            <a:ext cx="2563291" cy="792839"/>
           </a:xfrm>
           <a:prstGeom prst="rect">
             <a:avLst/>
@@ -6271,7 +6267,7 @@
       </p:sp>
       <p:sp>
         <p:nvSpPr>
-          <p:cNvPr id="291484965" name="TextBox 11"/>
+          <p:cNvPr id="51878946" name="TextBox 11"/>
           <p:cNvSpPr txBox="1"/>
           <p:nvPr/>
         </p:nvSpPr>
@@ -6314,7 +6310,7 @@
       </p:sp>
       <p:sp>
         <p:nvSpPr>
-          <p:cNvPr id="23297312" name="TextBox 12"/>
+          <p:cNvPr id="678623497" name="TextBox 12"/>
           <p:cNvSpPr txBox="1"/>
           <p:nvPr/>
         </p:nvSpPr>
@@ -6357,7 +6353,7 @@
       </p:sp>
       <p:grpSp>
         <p:nvGrpSpPr>
-          <p:cNvPr id="751903488" name=""/>
+          <p:cNvPr id="196289465" name=""/>
           <p:cNvGrpSpPr/>
           <p:nvPr/>
         </p:nvGrpSpPr>
@@ -6560,9 +6556,7 @@
   <p:cSld name="">
     <p:bg>
       <p:bgPr shadeToTitle="0">
-        <a:solidFill>
-          <a:srgbClr val="F2F2F2"/>
-        </a:solidFill>
+        <a:noFill/>
       </p:bgPr>
     </p:bg>
     <p:spTree>
@@ -6579,246 +6573,262 @@
           <a:chExt cx="0" cy="0"/>
         </a:xfrm>
       </p:grpSpPr>
-      <p:sp>
-        <p:nvSpPr>
-          <p:cNvPr id="589278791" name="Freeform 2"/>
-          <p:cNvSpPr/>
+      <p:grpSp>
+        <p:nvGrpSpPr>
+          <p:cNvPr id="971648338" name=""/>
+          <p:cNvGrpSpPr/>
           <p:nvPr/>
-        </p:nvSpPr>
-        <p:spPr bwMode="auto">
-          <a:xfrm rot="0" flipH="0" flipV="0">
-            <a:off x="8339937" y="2281855"/>
-            <a:ext cx="1801163" cy="1854142"/>
+        </p:nvGrpSpPr>
+        <p:grpSpPr bwMode="auto">
+          <a:xfrm>
+            <a:off x="1588582" y="2231570"/>
+            <a:ext cx="9896134" cy="2750980"/>
+            <a:chOff x="0" y="0"/>
+            <a:chExt cx="9896134" cy="2750980"/>
           </a:xfrm>
-          <a:custGeom>
-            <a:avLst/>
-            <a:gdLst/>
-            <a:ahLst/>
-            <a:cxnLst/>
-            <a:rect l="l" t="t" r="r" b="b"/>
-            <a:pathLst>
-              <a:path w="1801163" h="1854142" fill="norm" stroke="1" extrusionOk="0">
-                <a:moveTo>
-                  <a:pt x="0" y="0"/>
-                </a:moveTo>
-                <a:lnTo>
-                  <a:pt x="1801163" y="0"/>
-                </a:lnTo>
-                <a:lnTo>
-                  <a:pt x="1801163" y="1854142"/>
-                </a:lnTo>
-                <a:lnTo>
-                  <a:pt x="0" y="1854142"/>
-                </a:lnTo>
-                <a:lnTo>
-                  <a:pt x="0" y="0"/>
-                </a:lnTo>
-                <a:close/>
-              </a:path>
-            </a:pathLst>
-          </a:custGeom>
-          <a:blipFill>
-            <a:blip r:embed="rId3"/>
-            <a:srcRect l="22678" t="0" r="22676" b="0"/>
+        </p:grpSpPr>
+        <p:sp>
+          <p:nvSpPr>
+            <p:cNvPr id="82837455" name="Freeform 2"/>
+            <p:cNvSpPr/>
+            <p:nvPr/>
+          </p:nvSpPr>
+          <p:spPr bwMode="auto">
+            <a:xfrm rot="0" flipH="0" flipV="0">
+              <a:off x="6751353" y="50283"/>
+              <a:ext cx="1801163" cy="1854142"/>
+            </a:xfrm>
+            <a:custGeom>
+              <a:avLst/>
+              <a:gdLst/>
+              <a:ahLst/>
+              <a:cxnLst/>
+              <a:rect l="l" t="t" r="r" b="b"/>
+              <a:pathLst>
+                <a:path w="1801163" h="1854142" fill="norm" stroke="1" extrusionOk="0">
+                  <a:moveTo>
+                    <a:pt x="0" y="0"/>
+                  </a:moveTo>
+                  <a:lnTo>
+                    <a:pt x="1801163" y="0"/>
+                  </a:lnTo>
+                  <a:lnTo>
+                    <a:pt x="1801163" y="1854142"/>
+                  </a:lnTo>
+                  <a:lnTo>
+                    <a:pt x="0" y="1854142"/>
+                  </a:lnTo>
+                  <a:lnTo>
+                    <a:pt x="0" y="0"/>
+                  </a:lnTo>
+                  <a:close/>
+                </a:path>
+              </a:pathLst>
+            </a:custGeom>
+            <a:blipFill>
+              <a:blip r:embed="rId3"/>
+              <a:srcRect l="22678" t="0" r="22676" b="0"/>
+              <a:stretch/>
+            </a:blipFill>
+          </p:spPr>
+        </p:sp>
+        <p:sp>
+          <p:nvSpPr>
+            <p:cNvPr id="171116727" name="Freeform 3"/>
+            <p:cNvSpPr/>
+            <p:nvPr/>
+          </p:nvSpPr>
+          <p:spPr bwMode="auto">
+            <a:xfrm rot="0" flipH="0" flipV="0">
+              <a:off x="580559" y="50283"/>
+              <a:ext cx="1564677" cy="1854142"/>
+            </a:xfrm>
+            <a:custGeom>
+              <a:avLst/>
+              <a:gdLst/>
+              <a:ahLst/>
+              <a:cxnLst/>
+              <a:rect l="l" t="t" r="r" b="b"/>
+              <a:pathLst>
+                <a:path w="1564677" h="1854142" fill="norm" stroke="1" extrusionOk="0">
+                  <a:moveTo>
+                    <a:pt x="0" y="0"/>
+                  </a:moveTo>
+                  <a:lnTo>
+                    <a:pt x="1564677" y="0"/>
+                  </a:lnTo>
+                  <a:lnTo>
+                    <a:pt x="1564677" y="1854142"/>
+                  </a:lnTo>
+                  <a:lnTo>
+                    <a:pt x="0" y="1854142"/>
+                  </a:lnTo>
+                  <a:lnTo>
+                    <a:pt x="0" y="0"/>
+                  </a:lnTo>
+                  <a:close/>
+                </a:path>
+              </a:pathLst>
+            </a:custGeom>
+            <a:blipFill>
+              <a:blip r:embed="rId4"/>
+              <a:srcRect l="0" t="0" r="0" b="0"/>
+              <a:stretch/>
+            </a:blipFill>
+          </p:spPr>
+        </p:sp>
+        <p:sp>
+          <p:nvSpPr>
+            <p:cNvPr id="263062472" name="TextBox 5"/>
+            <p:cNvSpPr txBox="1"/>
+            <p:nvPr/>
+          </p:nvSpPr>
+          <p:spPr bwMode="auto">
+            <a:xfrm rot="0" flipH="0" flipV="0">
+              <a:off x="3058582" y="2288341"/>
+              <a:ext cx="2943606" cy="462639"/>
+            </a:xfrm>
+            <a:prstGeom prst="rect">
+              <a:avLst/>
+            </a:prstGeom>
+            <a:grpFill/>
+          </p:spPr>
+          <p:txBody>
+            <a:bodyPr lIns="0" tIns="0" rIns="0" bIns="0" rtlCol="0" anchor="t">
+              <a:spAutoFit/>
+            </a:bodyPr>
+            <a:lstStyle/>
+            <a:p>
+              <a:pPr algn="ctr">
+                <a:lnSpc>
+                  <a:spcPts val="3640"/>
+                </a:lnSpc>
+                <a:defRPr/>
+              </a:pPr>
+              <a:r>
+                <a:rPr lang="en-US" sz="2600" b="1">
+                  <a:solidFill>
+                    <a:srgbClr val="000000"/>
+                  </a:solidFill>
+                  <a:latin typeface="Rubik Bold"/>
+                  <a:ea typeface="Rubik Bold"/>
+                  <a:cs typeface="Rubik Bold"/>
+                </a:rPr>
+                <a:t>macOS</a:t>
+              </a:r>
+              <a:endParaRPr/>
+            </a:p>
+          </p:txBody>
+        </p:sp>
+        <p:sp>
+          <p:nvSpPr>
+            <p:cNvPr id="1408797406" name="TextBox 6"/>
+            <p:cNvSpPr txBox="1"/>
+            <p:nvPr/>
+          </p:nvSpPr>
+          <p:spPr bwMode="auto">
+            <a:xfrm rot="0" flipH="0" flipV="0">
+              <a:off x="0" y="2288341"/>
+              <a:ext cx="2922439" cy="462639"/>
+            </a:xfrm>
+            <a:prstGeom prst="rect">
+              <a:avLst/>
+            </a:prstGeom>
+            <a:grpFill/>
+          </p:spPr>
+          <p:txBody>
+            <a:bodyPr lIns="0" tIns="0" rIns="0" bIns="0" rtlCol="0" anchor="t">
+              <a:spAutoFit/>
+            </a:bodyPr>
+            <a:lstStyle/>
+            <a:p>
+              <a:pPr algn="ctr">
+                <a:lnSpc>
+                  <a:spcPts val="3640"/>
+                </a:lnSpc>
+                <a:defRPr/>
+              </a:pPr>
+              <a:r>
+                <a:rPr lang="en-US" sz="2600" b="1">
+                  <a:solidFill>
+                    <a:srgbClr val="000000"/>
+                  </a:solidFill>
+                  <a:latin typeface="Rubik Bold"/>
+                  <a:ea typeface="Rubik Bold"/>
+                  <a:cs typeface="Rubik Bold"/>
+                </a:rPr>
+                <a:t>Linux</a:t>
+              </a:r>
+              <a:endParaRPr/>
+            </a:p>
+          </p:txBody>
+        </p:sp>
+        <p:sp>
+          <p:nvSpPr>
+            <p:cNvPr id="754876033" name="TextBox 7"/>
+            <p:cNvSpPr txBox="1"/>
+            <p:nvPr/>
+          </p:nvSpPr>
+          <p:spPr bwMode="auto">
+            <a:xfrm rot="0" flipH="0" flipV="0">
+              <a:off x="6751352" y="2288341"/>
+              <a:ext cx="3144782" cy="462639"/>
+            </a:xfrm>
+            <a:prstGeom prst="rect">
+              <a:avLst/>
+            </a:prstGeom>
+            <a:grpFill/>
+          </p:spPr>
+          <p:txBody>
+            <a:bodyPr lIns="0" tIns="0" rIns="0" bIns="0" rtlCol="0" anchor="t">
+              <a:spAutoFit/>
+            </a:bodyPr>
+            <a:lstStyle/>
+            <a:p>
+              <a:pPr algn="l">
+                <a:lnSpc>
+                  <a:spcPts val="3640"/>
+                </a:lnSpc>
+                <a:defRPr/>
+              </a:pPr>
+              <a:r>
+                <a:rPr lang="en-US" sz="2600" b="1">
+                  <a:solidFill>
+                    <a:srgbClr val="000000"/>
+                  </a:solidFill>
+                  <a:latin typeface="Rubik Bold"/>
+                  <a:ea typeface="Rubik Bold"/>
+                  <a:cs typeface="Rubik Bold"/>
+                </a:rPr>
+                <a:t>Windows</a:t>
+              </a:r>
+              <a:endParaRPr/>
+            </a:p>
+          </p:txBody>
+        </p:sp>
+        <p:pic>
+          <p:nvPicPr>
+            <p:cNvPr id="315501358" name=""/>
+            <p:cNvPicPr>
+              <a:picLocks noChangeAspect="1"/>
+            </p:cNvPicPr>
+            <p:nvPr/>
+          </p:nvPicPr>
+          <p:blipFill>
+            <a:blip r:embed="rId5"/>
             <a:stretch/>
-          </a:blipFill>
-        </p:spPr>
-        <p:txBody>
-          <a:bodyPr/>
-          <a:p/>
-        </p:txBody>
-      </p:sp>
-      <p:sp>
-        <p:nvSpPr>
-          <p:cNvPr id="1067555733" name="Freeform 3"/>
-          <p:cNvSpPr/>
-          <p:nvPr/>
-        </p:nvSpPr>
-        <p:spPr bwMode="auto">
-          <a:xfrm rot="0" flipH="0" flipV="0">
-            <a:off x="2169143" y="2281855"/>
-            <a:ext cx="1564677" cy="1854142"/>
-          </a:xfrm>
-          <a:custGeom>
-            <a:avLst/>
-            <a:gdLst/>
-            <a:ahLst/>
-            <a:cxnLst/>
-            <a:rect l="l" t="t" r="r" b="b"/>
-            <a:pathLst>
-              <a:path w="1564677" h="1854142" fill="norm" stroke="1" extrusionOk="0">
-                <a:moveTo>
-                  <a:pt x="0" y="0"/>
-                </a:moveTo>
-                <a:lnTo>
-                  <a:pt x="1564677" y="0"/>
-                </a:lnTo>
-                <a:lnTo>
-                  <a:pt x="1564677" y="1854142"/>
-                </a:lnTo>
-                <a:lnTo>
-                  <a:pt x="0" y="1854142"/>
-                </a:lnTo>
-                <a:lnTo>
-                  <a:pt x="0" y="0"/>
-                </a:lnTo>
-                <a:close/>
-              </a:path>
-            </a:pathLst>
-          </a:custGeom>
-          <a:blipFill>
-            <a:blip r:embed="rId4"/>
-            <a:srcRect l="0" t="0" r="0" b="0"/>
-            <a:stretch/>
-          </a:blipFill>
-        </p:spPr>
-        <p:txBody>
-          <a:bodyPr/>
-          <a:p/>
-        </p:txBody>
-      </p:sp>
-      <p:sp>
-        <p:nvSpPr>
-          <p:cNvPr id="760365243" name="TextBox 5"/>
-          <p:cNvSpPr txBox="1"/>
-          <p:nvPr/>
-        </p:nvSpPr>
-        <p:spPr bwMode="auto">
-          <a:xfrm rot="0" flipH="0" flipV="0">
-            <a:off x="4647166" y="4519913"/>
-            <a:ext cx="2943606" cy="462639"/>
-          </a:xfrm>
-          <a:prstGeom prst="rect">
-            <a:avLst/>
-          </a:prstGeom>
-        </p:spPr>
-        <p:txBody>
-          <a:bodyPr lIns="0" tIns="0" rIns="0" bIns="0" rtlCol="0" anchor="t">
-            <a:spAutoFit/>
-          </a:bodyPr>
-          <a:lstStyle/>
-          <a:p>
-            <a:pPr algn="ctr">
-              <a:lnSpc>
-                <a:spcPts val="3640"/>
-              </a:lnSpc>
-              <a:defRPr/>
-            </a:pPr>
-            <a:r>
-              <a:rPr sz="2600" b="1" lang="en-US">
-                <a:solidFill>
-                  <a:srgbClr val="000000"/>
-                </a:solidFill>
-                <a:latin typeface="Rubik Bold"/>
-              </a:rPr>
-              <a:t>macOS</a:t>
-            </a:r>
-            <a:endParaRPr/>
-          </a:p>
-        </p:txBody>
-      </p:sp>
-      <p:sp>
-        <p:nvSpPr>
-          <p:cNvPr id="133874316" name="TextBox 6"/>
-          <p:cNvSpPr txBox="1"/>
-          <p:nvPr/>
-        </p:nvSpPr>
-        <p:spPr bwMode="auto">
-          <a:xfrm rot="0" flipH="0" flipV="0">
-            <a:off x="1588583" y="4519913"/>
-            <a:ext cx="2922439" cy="462639"/>
-          </a:xfrm>
-          <a:prstGeom prst="rect">
-            <a:avLst/>
-          </a:prstGeom>
-        </p:spPr>
-        <p:txBody>
-          <a:bodyPr lIns="0" tIns="0" rIns="0" bIns="0" rtlCol="0" anchor="t">
-            <a:spAutoFit/>
-          </a:bodyPr>
-          <a:lstStyle/>
-          <a:p>
-            <a:pPr algn="ctr">
-              <a:lnSpc>
-                <a:spcPts val="3640"/>
-              </a:lnSpc>
-              <a:defRPr/>
-            </a:pPr>
-            <a:r>
-              <a:rPr sz="2600" b="1" lang="en-US">
-                <a:solidFill>
-                  <a:srgbClr val="000000"/>
-                </a:solidFill>
-                <a:latin typeface="Rubik Bold"/>
-              </a:rPr>
-              <a:t>Linux</a:t>
-            </a:r>
-            <a:endParaRPr/>
-          </a:p>
-        </p:txBody>
-      </p:sp>
-      <p:sp>
-        <p:nvSpPr>
-          <p:cNvPr id="641848708" name="TextBox 7"/>
-          <p:cNvSpPr txBox="1"/>
-          <p:nvPr/>
-        </p:nvSpPr>
-        <p:spPr bwMode="auto">
-          <a:xfrm rot="0" flipH="0" flipV="0">
-            <a:off x="8339936" y="4519913"/>
-            <a:ext cx="3144782" cy="462639"/>
-          </a:xfrm>
-          <a:prstGeom prst="rect">
-            <a:avLst/>
-          </a:prstGeom>
-        </p:spPr>
-        <p:txBody>
-          <a:bodyPr lIns="0" tIns="0" rIns="0" bIns="0" rtlCol="0" anchor="t">
-            <a:spAutoFit/>
-          </a:bodyPr>
-          <a:lstStyle/>
-          <a:p>
-            <a:pPr algn="l">
-              <a:lnSpc>
-                <a:spcPts val="3640"/>
-              </a:lnSpc>
-              <a:defRPr/>
-            </a:pPr>
-            <a:r>
-              <a:rPr sz="2600" b="1" lang="en-US">
-                <a:solidFill>
-                  <a:srgbClr val="000000"/>
-                </a:solidFill>
-                <a:latin typeface="Rubik Bold"/>
-              </a:rPr>
-              <a:t>Windows</a:t>
-            </a:r>
-            <a:endParaRPr/>
-          </a:p>
-        </p:txBody>
-      </p:sp>
-      <p:pic>
-        <p:nvPicPr>
-          <p:cNvPr id="1225911199" name=""/>
-          <p:cNvPicPr>
-            <a:picLocks noChangeAspect="1"/>
-          </p:cNvPicPr>
-          <p:nvPr/>
-        </p:nvPicPr>
-        <p:blipFill>
-          <a:blip r:embed="rId5"/>
-          <a:stretch/>
-        </p:blipFill>
-        <p:spPr bwMode="auto">
-          <a:xfrm flipH="0" flipV="0">
-            <a:off x="5120545" y="2231571"/>
-            <a:ext cx="1524174" cy="1972461"/>
-          </a:xfrm>
-          <a:prstGeom prst="rect">
-            <a:avLst/>
-          </a:prstGeom>
-        </p:spPr>
-      </p:pic>
+          </p:blipFill>
+          <p:spPr bwMode="auto">
+            <a:xfrm flipH="0" flipV="0">
+              <a:off x="3531961" y="0"/>
+              <a:ext cx="1524174" cy="1972461"/>
+            </a:xfrm>
+            <a:prstGeom prst="rect">
+              <a:avLst/>
+            </a:prstGeom>
+          </p:spPr>
+        </p:pic>
+      </p:grpSp>
     </p:spTree>
   </p:cSld>
   <p:clrMapOvr>
@@ -6840,9 +6850,7 @@
   <p:cSld name="">
     <p:bg>
       <p:bgPr shadeToTitle="0">
-        <a:solidFill>
-          <a:srgbClr val="F2F2F2"/>
-        </a:solidFill>
+        <a:noFill/>
       </p:bgPr>
     </p:bg>
     <p:spTree>
@@ -6861,56 +6869,7 @@
       </p:grpSpPr>
       <p:sp>
         <p:nvSpPr>
-          <p:cNvPr id="454132834" name="Freeform 2"/>
-          <p:cNvSpPr/>
-          <p:nvPr/>
-        </p:nvSpPr>
-        <p:spPr bwMode="auto">
-          <a:xfrm rot="0" flipH="0" flipV="0">
-            <a:off x="885825" y="2128009"/>
-            <a:ext cx="1937986" cy="1937986"/>
-          </a:xfrm>
-          <a:custGeom>
-            <a:avLst/>
-            <a:gdLst/>
-            <a:ahLst/>
-            <a:cxnLst/>
-            <a:rect l="l" t="t" r="r" b="b"/>
-            <a:pathLst>
-              <a:path w="1937986" h="1937986" fill="norm" stroke="1" extrusionOk="0">
-                <a:moveTo>
-                  <a:pt x="0" y="0"/>
-                </a:moveTo>
-                <a:lnTo>
-                  <a:pt x="1937986" y="0"/>
-                </a:lnTo>
-                <a:lnTo>
-                  <a:pt x="1937986" y="1937986"/>
-                </a:lnTo>
-                <a:lnTo>
-                  <a:pt x="0" y="1937986"/>
-                </a:lnTo>
-                <a:lnTo>
-                  <a:pt x="0" y="0"/>
-                </a:lnTo>
-                <a:close/>
-              </a:path>
-            </a:pathLst>
-          </a:custGeom>
-          <a:blipFill>
-            <a:blip r:embed="rId3"/>
-            <a:srcRect l="0" t="0" r="0" b="0"/>
-            <a:stretch/>
-          </a:blipFill>
-        </p:spPr>
-        <p:txBody>
-          <a:bodyPr/>
-          <a:p/>
-        </p:txBody>
-      </p:sp>
-      <p:sp>
-        <p:nvSpPr>
-          <p:cNvPr id="1462520704" name="Freeform 3"/>
+          <p:cNvPr id="857722059" name="Freeform 3"/>
           <p:cNvSpPr/>
           <p:nvPr/>
         </p:nvSpPr>
@@ -6947,7 +6906,7 @@
             </a:pathLst>
           </a:custGeom>
           <a:blipFill>
-            <a:blip r:embed="rId4"/>
+            <a:blip r:embed="rId3"/>
             <a:srcRect l="0" t="0" r="0" b="0"/>
             <a:stretch/>
           </a:blipFill>
@@ -6959,7 +6918,7 @@
       </p:sp>
       <p:grpSp>
         <p:nvGrpSpPr>
-          <p:cNvPr id="332444570" name="Group 4"/>
+          <p:cNvPr id="1939289380" name="Group 4"/>
           <p:cNvGrpSpPr/>
           <p:nvPr/>
         </p:nvGrpSpPr>
@@ -7044,7 +7003,7 @@
       </p:grpSp>
       <p:sp>
         <p:nvSpPr>
-          <p:cNvPr id="1947105925" name="Freeform 7"/>
+          <p:cNvPr id="52047471" name="Freeform 7"/>
           <p:cNvSpPr/>
           <p:nvPr/>
         </p:nvSpPr>
@@ -7081,7 +7040,7 @@
             </a:pathLst>
           </a:custGeom>
           <a:blipFill>
-            <a:blip r:embed="rId5"/>
+            <a:blip r:embed="rId4"/>
             <a:srcRect l="0" t="0" r="0" b="0"/>
             <a:stretch/>
           </a:blipFill>
@@ -7091,46 +7050,109 @@
           <a:p/>
         </p:txBody>
       </p:sp>
-      <p:sp>
-        <p:nvSpPr>
-          <p:cNvPr id="1099197656" name="TextBox 8"/>
-          <p:cNvSpPr txBox="1"/>
+      <p:grpSp>
+        <p:nvGrpSpPr>
+          <p:cNvPr id="1006180223" name=""/>
+          <p:cNvGrpSpPr/>
           <p:nvPr/>
-        </p:nvSpPr>
-        <p:spPr bwMode="auto">
-          <a:xfrm rot="0" flipH="0" flipV="0">
-            <a:off x="339749" y="4281680"/>
-            <a:ext cx="3101636" cy="462639"/>
+        </p:nvGrpSpPr>
+        <p:grpSpPr bwMode="auto">
+          <a:xfrm>
+            <a:off x="339748" y="2128008"/>
+            <a:ext cx="3101635" cy="2616309"/>
+            <a:chOff x="0" y="0"/>
+            <a:chExt cx="3101635" cy="2616309"/>
           </a:xfrm>
-          <a:prstGeom prst="rect">
-            <a:avLst/>
-          </a:prstGeom>
-        </p:spPr>
-        <p:txBody>
-          <a:bodyPr lIns="0" tIns="0" rIns="0" bIns="0" rtlCol="0" anchor="t">
-            <a:spAutoFit/>
-          </a:bodyPr>
-          <a:lstStyle/>
-          <a:p>
-            <a:pPr algn="ctr">
-              <a:lnSpc>
-                <a:spcPts val="3640"/>
-              </a:lnSpc>
-              <a:defRPr/>
-            </a:pPr>
-            <a:r>
-              <a:rPr sz="2600" b="1" lang="en-US">
-                <a:solidFill>
-                  <a:srgbClr val="000000"/>
-                </a:solidFill>
-                <a:latin typeface="Rubik Bold"/>
-              </a:rPr>
-              <a:t>Ubuntu</a:t>
-            </a:r>
-            <a:endParaRPr/>
-          </a:p>
-        </p:txBody>
-      </p:sp>
+        </p:grpSpPr>
+        <p:sp>
+          <p:nvSpPr>
+            <p:cNvPr id="1883203191" name="Freeform 2"/>
+            <p:cNvSpPr/>
+            <p:nvPr/>
+          </p:nvSpPr>
+          <p:spPr bwMode="auto">
+            <a:xfrm rot="0" flipH="0" flipV="0">
+              <a:off x="546075" y="0"/>
+              <a:ext cx="1937986" cy="1937986"/>
+            </a:xfrm>
+            <a:custGeom>
+              <a:avLst/>
+              <a:gdLst/>
+              <a:ahLst/>
+              <a:cxnLst/>
+              <a:rect l="l" t="t" r="r" b="b"/>
+              <a:pathLst>
+                <a:path w="1937986" h="1937986" fill="norm" stroke="1" extrusionOk="0">
+                  <a:moveTo>
+                    <a:pt x="0" y="0"/>
+                  </a:moveTo>
+                  <a:lnTo>
+                    <a:pt x="1937986" y="0"/>
+                  </a:lnTo>
+                  <a:lnTo>
+                    <a:pt x="1937986" y="1937986"/>
+                  </a:lnTo>
+                  <a:lnTo>
+                    <a:pt x="0" y="1937986"/>
+                  </a:lnTo>
+                  <a:lnTo>
+                    <a:pt x="0" y="0"/>
+                  </a:lnTo>
+                  <a:close/>
+                </a:path>
+              </a:pathLst>
+            </a:custGeom>
+            <a:blipFill>
+              <a:blip r:embed="rId5"/>
+              <a:srcRect l="0" t="0" r="0" b="0"/>
+              <a:stretch/>
+            </a:blipFill>
+          </p:spPr>
+        </p:sp>
+        <p:sp>
+          <p:nvSpPr>
+            <p:cNvPr id="1545968787" name="TextBox 8"/>
+            <p:cNvSpPr txBox="1"/>
+            <p:nvPr/>
+          </p:nvSpPr>
+          <p:spPr bwMode="auto">
+            <a:xfrm rot="0" flipH="0" flipV="0">
+              <a:off x="0" y="2153670"/>
+              <a:ext cx="3101636" cy="462639"/>
+            </a:xfrm>
+            <a:prstGeom prst="rect">
+              <a:avLst/>
+            </a:prstGeom>
+            <a:grpFill/>
+          </p:spPr>
+          <p:txBody>
+            <a:bodyPr lIns="0" tIns="0" rIns="0" bIns="0" rtlCol="0" anchor="t">
+              <a:spAutoFit/>
+            </a:bodyPr>
+            <a:lstStyle/>
+            <a:p>
+              <a:pPr algn="ctr">
+                <a:lnSpc>
+                  <a:spcPts val="3640"/>
+                </a:lnSpc>
+                <a:defRPr/>
+              </a:pPr>
+              <a:r>
+                <a:rPr lang="en-US" sz="2600" b="1">
+                  <a:solidFill>
+                    <a:srgbClr val="000000"/>
+                  </a:solidFill>
+                  <a:latin typeface="Rubik Bold"/>
+                  <a:ea typeface="Rubik Bold"/>
+                  <a:cs typeface="Rubik Bold"/>
+                </a:rPr>
+                <a:t>Ubuntu</a:t>
+              </a:r>
+              <a:endParaRPr/>
+            </a:p>
+          </p:txBody>
+        </p:sp>
+      </p:grpSp>
     </p:spTree>
   </p:cSld>
   <p:clrMapOvr>
@@ -7152,9 +7174,7 @@
   <p:cSld name="">
     <p:bg>
       <p:bgPr shadeToTitle="0">
-        <a:solidFill>
-          <a:srgbClr val="F2F2F2"/>
-        </a:solidFill>
+        <a:noFill/>
       </p:bgPr>
     </p:bg>
     <p:spTree>
@@ -7173,28 +7193,96 @@
       </p:grpSpPr>
       <p:grpSp>
         <p:nvGrpSpPr>
-          <p:cNvPr id="1823157633" name="Group 2"/>
+          <p:cNvPr id="1990523369" name=""/>
           <p:cNvGrpSpPr/>
           <p:nvPr/>
         </p:nvGrpSpPr>
         <p:grpSpPr bwMode="auto">
-          <a:xfrm rot="0">
-            <a:off x="2856057" y="1786480"/>
-            <a:ext cx="2349516" cy="2349516"/>
+          <a:xfrm>
+            <a:off x="2096582" y="1786479"/>
+            <a:ext cx="8446939" cy="3196071"/>
             <a:chOff x="0" y="0"/>
-            <a:chExt cx="812800" cy="812800"/>
+            <a:chExt cx="8446939" cy="3196071"/>
           </a:xfrm>
         </p:grpSpPr>
+        <p:grpSp>
+          <p:nvGrpSpPr>
+            <p:cNvPr id="161769879" name="Group 2"/>
+            <p:cNvGrpSpPr/>
+            <p:nvPr/>
+          </p:nvGrpSpPr>
+          <p:grpSpPr bwMode="auto">
+            <a:xfrm rot="0">
+              <a:off x="759474" y="0"/>
+              <a:ext cx="2349516" cy="2349516"/>
+              <a:chOff x="0" y="0"/>
+              <a:chExt cx="812800" cy="812800"/>
+            </a:xfrm>
+          </p:grpSpPr>
+          <p:sp>
+            <p:nvSpPr>
+              <p:cNvPr id="3" name="Freeform 3"/>
+              <p:cNvSpPr/>
+              <p:nvPr/>
+            </p:nvSpPr>
+            <p:spPr bwMode="auto">
+              <a:xfrm rot="0" flipH="0" flipV="0">
+                <a:off x="0" y="0"/>
+                <a:ext cx="812800" cy="812800"/>
+              </a:xfrm>
+              <a:custGeom>
+                <a:avLst/>
+                <a:gdLst/>
+                <a:ahLst/>
+                <a:cxnLst/>
+                <a:rect l="l" t="t" r="r" b="b"/>
+                <a:pathLst>
+                  <a:path w="812800" h="812800" fill="norm" stroke="1" extrusionOk="0">
+                    <a:moveTo>
+                      <a:pt x="406400" y="0"/>
+                    </a:moveTo>
+                    <a:cubicBezTo>
+                      <a:pt x="181951" y="0"/>
+                      <a:pt x="0" y="181951"/>
+                      <a:pt x="0" y="406400"/>
+                    </a:cubicBezTo>
+                    <a:cubicBezTo>
+                      <a:pt x="0" y="630849"/>
+                      <a:pt x="181951" y="812800"/>
+                      <a:pt x="406400" y="812800"/>
+                    </a:cubicBezTo>
+                    <a:cubicBezTo>
+                      <a:pt x="630849" y="812800"/>
+                      <a:pt x="812800" y="630849"/>
+                      <a:pt x="812800" y="406400"/>
+                    </a:cubicBezTo>
+                    <a:cubicBezTo>
+                      <a:pt x="812800" y="181951"/>
+                      <a:pt x="630849" y="0"/>
+                      <a:pt x="406400" y="0"/>
+                    </a:cubicBezTo>
+                    <a:close/>
+                  </a:path>
+                </a:pathLst>
+              </a:custGeom>
+              <a:blipFill>
+                <a:blip r:embed="rId3"/>
+                <a:srcRect l="21874" t="0" r="21873" b="0"/>
+                <a:stretch/>
+              </a:blipFill>
+            </p:spPr>
+          </p:sp>
+        </p:grpSp>
         <p:sp>
           <p:nvSpPr>
-            <p:cNvPr id="3" name="Freeform 3"/>
+            <p:cNvPr id="112123075" name="Freeform 4"/>
             <p:cNvSpPr/>
             <p:nvPr/>
           </p:nvSpPr>
           <p:spPr bwMode="auto">
             <a:xfrm rot="0" flipH="0" flipV="0">
-              <a:off x="0" y="0"/>
-              <a:ext cx="812800" cy="812800"/>
+              <a:off x="5002272" y="0"/>
+              <a:ext cx="2237088" cy="2349516"/>
             </a:xfrm>
             <a:custGeom>
               <a:avLst/>
@@ -7203,171 +7291,120 @@
               <a:cxnLst/>
               <a:rect l="l" t="t" r="r" b="b"/>
               <a:pathLst>
-                <a:path w="812800" h="812800" fill="norm" stroke="1" extrusionOk="0">
+                <a:path w="2237088" h="2349516" fill="norm" stroke="1" extrusionOk="0">
                   <a:moveTo>
-                    <a:pt x="406400" y="0"/>
+                    <a:pt x="0" y="0"/>
                   </a:moveTo>
-                  <a:cubicBezTo>
-                    <a:pt x="181951" y="0"/>
-                    <a:pt x="0" y="181951"/>
-                    <a:pt x="0" y="406400"/>
-                  </a:cubicBezTo>
-                  <a:cubicBezTo>
-                    <a:pt x="0" y="630849"/>
-                    <a:pt x="181951" y="812800"/>
-                    <a:pt x="406400" y="812800"/>
-                  </a:cubicBezTo>
-                  <a:cubicBezTo>
-                    <a:pt x="630849" y="812800"/>
-                    <a:pt x="812800" y="630849"/>
-                    <a:pt x="812800" y="406400"/>
-                  </a:cubicBezTo>
-                  <a:cubicBezTo>
-                    <a:pt x="812800" y="181951"/>
-                    <a:pt x="630849" y="0"/>
-                    <a:pt x="406400" y="0"/>
-                  </a:cubicBezTo>
+                  <a:lnTo>
+                    <a:pt x="2237088" y="0"/>
+                  </a:lnTo>
+                  <a:lnTo>
+                    <a:pt x="2237088" y="2349517"/>
+                  </a:lnTo>
+                  <a:lnTo>
+                    <a:pt x="0" y="2349517"/>
+                  </a:lnTo>
+                  <a:lnTo>
+                    <a:pt x="0" y="0"/>
+                  </a:lnTo>
                   <a:close/>
                 </a:path>
               </a:pathLst>
             </a:custGeom>
             <a:blipFill>
-              <a:blip r:embed="rId3"/>
-              <a:srcRect l="21874" t="0" r="21873" b="0"/>
+              <a:blip r:embed="rId4"/>
+              <a:srcRect l="0" t="0" r="0" b="0"/>
               <a:stretch/>
             </a:blipFill>
           </p:spPr>
         </p:sp>
+        <p:sp>
+          <p:nvSpPr>
+            <p:cNvPr id="235369260" name="TextBox 5"/>
+            <p:cNvSpPr txBox="1"/>
+            <p:nvPr/>
+          </p:nvSpPr>
+          <p:spPr bwMode="auto">
+            <a:xfrm rot="0" flipH="0" flipV="0">
+              <a:off x="0" y="2733432"/>
+              <a:ext cx="3736636" cy="462639"/>
+            </a:xfrm>
+            <a:prstGeom prst="rect">
+              <a:avLst/>
+            </a:prstGeom>
+            <a:grpFill/>
+          </p:spPr>
+          <p:txBody>
+            <a:bodyPr lIns="0" tIns="0" rIns="0" bIns="0" rtlCol="0" anchor="t">
+              <a:spAutoFit/>
+            </a:bodyPr>
+            <a:lstStyle/>
+            <a:p>
+              <a:pPr algn="ctr">
+                <a:lnSpc>
+                  <a:spcPts val="3640"/>
+                </a:lnSpc>
+                <a:defRPr/>
+              </a:pPr>
+              <a:r>
+                <a:rPr lang="en-US" sz="2600" b="1">
+                  <a:solidFill>
+                    <a:srgbClr val="000000"/>
+                  </a:solidFill>
+                  <a:latin typeface="Rubik Bold"/>
+                  <a:ea typeface="Rubik Bold"/>
+                  <a:cs typeface="Rubik Bold"/>
+                </a:rPr>
+                <a:t>Kaspersky</a:t>
+              </a:r>
+              <a:endParaRPr/>
+            </a:p>
+          </p:txBody>
+        </p:sp>
+        <p:sp>
+          <p:nvSpPr>
+            <p:cNvPr id="999051230" name="TextBox 6"/>
+            <p:cNvSpPr txBox="1"/>
+            <p:nvPr/>
+          </p:nvSpPr>
+          <p:spPr bwMode="auto">
+            <a:xfrm rot="0" flipH="0" flipV="0">
+              <a:off x="4159249" y="2733432"/>
+              <a:ext cx="4287690" cy="462639"/>
+            </a:xfrm>
+            <a:prstGeom prst="rect">
+              <a:avLst/>
+            </a:prstGeom>
+            <a:grpFill/>
+          </p:spPr>
+          <p:txBody>
+            <a:bodyPr lIns="0" tIns="0" rIns="0" bIns="0" rtlCol="0" anchor="t">
+              <a:spAutoFit/>
+            </a:bodyPr>
+            <a:lstStyle/>
+            <a:p>
+              <a:pPr algn="ctr">
+                <a:lnSpc>
+                  <a:spcPts val="3640"/>
+                </a:lnSpc>
+                <a:defRPr/>
+              </a:pPr>
+              <a:r>
+                <a:rPr lang="en-US" sz="2600" b="1">
+                  <a:solidFill>
+                    <a:srgbClr val="000000"/>
+                  </a:solidFill>
+                  <a:latin typeface="Rubik Bold"/>
+                  <a:ea typeface="Rubik Bold"/>
+                  <a:cs typeface="Rubik Bold"/>
+                </a:rPr>
+                <a:t>Windows Defender</a:t>
+              </a:r>
+              <a:endParaRPr/>
+            </a:p>
+          </p:txBody>
+        </p:sp>
       </p:grpSp>
-      <p:sp>
-        <p:nvSpPr>
-          <p:cNvPr id="842494845" name="Freeform 4"/>
-          <p:cNvSpPr/>
-          <p:nvPr/>
-        </p:nvSpPr>
-        <p:spPr bwMode="auto">
-          <a:xfrm rot="0" flipH="0" flipV="0">
-            <a:off x="7098855" y="1786480"/>
-            <a:ext cx="2237088" cy="2349516"/>
-          </a:xfrm>
-          <a:custGeom>
-            <a:avLst/>
-            <a:gdLst/>
-            <a:ahLst/>
-            <a:cxnLst/>
-            <a:rect l="l" t="t" r="r" b="b"/>
-            <a:pathLst>
-              <a:path w="2237088" h="2349516" fill="norm" stroke="1" extrusionOk="0">
-                <a:moveTo>
-                  <a:pt x="0" y="0"/>
-                </a:moveTo>
-                <a:lnTo>
-                  <a:pt x="2237088" y="0"/>
-                </a:lnTo>
-                <a:lnTo>
-                  <a:pt x="2237088" y="2349517"/>
-                </a:lnTo>
-                <a:lnTo>
-                  <a:pt x="0" y="2349517"/>
-                </a:lnTo>
-                <a:lnTo>
-                  <a:pt x="0" y="0"/>
-                </a:lnTo>
-                <a:close/>
-              </a:path>
-            </a:pathLst>
-          </a:custGeom>
-          <a:blipFill>
-            <a:blip r:embed="rId4"/>
-            <a:srcRect l="0" t="0" r="0" b="0"/>
-            <a:stretch/>
-          </a:blipFill>
-        </p:spPr>
-        <p:txBody>
-          <a:bodyPr/>
-          <a:p/>
-        </p:txBody>
-      </p:sp>
-      <p:sp>
-        <p:nvSpPr>
-          <p:cNvPr id="1388922128" name="TextBox 5"/>
-          <p:cNvSpPr txBox="1"/>
-          <p:nvPr/>
-        </p:nvSpPr>
-        <p:spPr bwMode="auto">
-          <a:xfrm rot="0" flipH="0" flipV="0">
-            <a:off x="2096583" y="4519913"/>
-            <a:ext cx="3736636" cy="462639"/>
-          </a:xfrm>
-          <a:prstGeom prst="rect">
-            <a:avLst/>
-          </a:prstGeom>
-        </p:spPr>
-        <p:txBody>
-          <a:bodyPr lIns="0" tIns="0" rIns="0" bIns="0" rtlCol="0" anchor="t">
-            <a:spAutoFit/>
-          </a:bodyPr>
-          <a:lstStyle/>
-          <a:p>
-            <a:pPr algn="ctr">
-              <a:lnSpc>
-                <a:spcPts val="3640"/>
-              </a:lnSpc>
-              <a:defRPr/>
-            </a:pPr>
-            <a:r>
-              <a:rPr sz="2600" b="1" lang="en-US">
-                <a:solidFill>
-                  <a:srgbClr val="000000"/>
-                </a:solidFill>
-                <a:latin typeface="Rubik Bold"/>
-              </a:rPr>
-              <a:t>Kaspersky</a:t>
-            </a:r>
-            <a:endParaRPr/>
-          </a:p>
-        </p:txBody>
-      </p:sp>
-      <p:sp>
-        <p:nvSpPr>
-          <p:cNvPr id="1187116898" name="TextBox 6"/>
-          <p:cNvSpPr txBox="1"/>
-          <p:nvPr/>
-        </p:nvSpPr>
-        <p:spPr bwMode="auto">
-          <a:xfrm rot="0" flipH="0" flipV="0">
-            <a:off x="6255833" y="4519913"/>
-            <a:ext cx="4287690" cy="462639"/>
-          </a:xfrm>
-          <a:prstGeom prst="rect">
-            <a:avLst/>
-          </a:prstGeom>
-        </p:spPr>
-        <p:txBody>
-          <a:bodyPr lIns="0" tIns="0" rIns="0" bIns="0" rtlCol="0" anchor="t">
-            <a:spAutoFit/>
-          </a:bodyPr>
-          <a:lstStyle/>
-          <a:p>
-            <a:pPr algn="ctr">
-              <a:lnSpc>
-                <a:spcPts val="3640"/>
-              </a:lnSpc>
-              <a:defRPr/>
-            </a:pPr>
-            <a:r>
-              <a:rPr sz="2600" b="1" lang="en-US">
-                <a:solidFill>
-                  <a:srgbClr val="000000"/>
-                </a:solidFill>
-                <a:latin typeface="Rubik Bold"/>
-              </a:rPr>
-              <a:t>Windows Defender</a:t>
-            </a:r>
-            <a:endParaRPr/>
-          </a:p>
-        </p:txBody>
-      </p:sp>
     </p:spTree>
   </p:cSld>
   <p:clrMapOvr>
@@ -7389,9 +7426,7 @@
   <p:cSld name="">
     <p:bg>
       <p:bgPr shadeToTitle="0">
-        <a:solidFill>
-          <a:srgbClr val="F2F2F2"/>
-        </a:solidFill>
+        <a:noFill/>
       </p:bgPr>
     </p:bg>
     <p:spTree>
@@ -7410,7 +7445,7 @@
       </p:grpSpPr>
       <p:sp>
         <p:nvSpPr>
-          <p:cNvPr id="1626214754" name="Freeform 2"/>
+          <p:cNvPr id="1266732883" name="Freeform 2"/>
           <p:cNvSpPr/>
           <p:nvPr/>
         </p:nvSpPr>
@@ -7459,7 +7494,7 @@
       </p:sp>
       <p:sp>
         <p:nvSpPr>
-          <p:cNvPr id="497117978" name="Freeform 3"/>
+          <p:cNvPr id="2109067387" name="Freeform 3"/>
           <p:cNvSpPr/>
           <p:nvPr/>
         </p:nvSpPr>
@@ -7527,9 +7562,7 @@
   <p:cSld name="">
     <p:bg>
       <p:bgPr shadeToTitle="0">
-        <a:solidFill>
-          <a:srgbClr val="F2F2F2"/>
-        </a:solidFill>
+        <a:noFill/>
       </p:bgPr>
     </p:bg>
     <p:spTree>
@@ -7548,7 +7581,7 @@
       </p:grpSpPr>
       <p:sp>
         <p:nvSpPr>
-          <p:cNvPr id="1302375423" name="Freeform 2"/>
+          <p:cNvPr id="1050466324" name="Freeform 2"/>
           <p:cNvSpPr/>
           <p:nvPr/>
         </p:nvSpPr>
@@ -7597,7 +7630,7 @@
       </p:sp>
       <p:grpSp>
         <p:nvGrpSpPr>
-          <p:cNvPr id="15392943" name="Group 3"/>
+          <p:cNvPr id="1029623813" name="Group 3"/>
           <p:cNvGrpSpPr/>
           <p:nvPr/>
         </p:nvGrpSpPr>
@@ -7682,7 +7715,7 @@
       </p:grpSp>
       <p:sp>
         <p:nvSpPr>
-          <p:cNvPr id="1461871000" name="Freeform 6"/>
+          <p:cNvPr id="1622532664" name="Freeform 6"/>
           <p:cNvSpPr/>
           <p:nvPr/>
         </p:nvSpPr>
@@ -7731,7 +7764,7 @@
       </p:sp>
       <p:sp>
         <p:nvSpPr>
-          <p:cNvPr id="650233215" name="Freeform 7"/>
+          <p:cNvPr id="1212104795" name="Freeform 7"/>
           <p:cNvSpPr/>
           <p:nvPr/>
         </p:nvSpPr>
@@ -7780,7 +7813,7 @@
       </p:sp>
       <p:sp>
         <p:nvSpPr>
-          <p:cNvPr id="306188857" name="TextBox 8"/>
+          <p:cNvPr id="275550696" name="TextBox 8"/>
           <p:cNvSpPr txBox="1"/>
           <p:nvPr/>
         </p:nvSpPr>
@@ -7839,9 +7872,7 @@
   <p:cSld name="">
     <p:bg>
       <p:bgPr shadeToTitle="0">
-        <a:solidFill>
-          <a:srgbClr val="F2F2F2"/>
-        </a:solidFill>
+        <a:noFill/>
       </p:bgPr>
     </p:bg>
     <p:spTree>
@@ -7860,7 +7891,7 @@
       </p:grpSpPr>
       <p:sp>
         <p:nvSpPr>
-          <p:cNvPr id="668595089" name="Freeform 2"/>
+          <p:cNvPr id="1026335815" name="Freeform 2"/>
           <p:cNvSpPr/>
           <p:nvPr/>
         </p:nvSpPr>
@@ -7909,7 +7940,7 @@
       </p:sp>
       <p:grpSp>
         <p:nvGrpSpPr>
-          <p:cNvPr id="1098082757" name="Group 3"/>
+          <p:cNvPr id="1042815035" name="Group 3"/>
           <p:cNvGrpSpPr/>
           <p:nvPr/>
         </p:nvGrpSpPr>
@@ -7994,7 +8025,7 @@
       </p:grpSp>
       <p:sp>
         <p:nvSpPr>
-          <p:cNvPr id="693983757" name="Freeform 6"/>
+          <p:cNvPr id="1150504188" name="Freeform 6"/>
           <p:cNvSpPr/>
           <p:nvPr/>
         </p:nvSpPr>
@@ -8043,7 +8074,7 @@
       </p:sp>
       <p:grpSp>
         <p:nvGrpSpPr>
-          <p:cNvPr id="743850276" name="Group 7"/>
+          <p:cNvPr id="418694071" name="Group 7"/>
           <p:cNvGrpSpPr/>
           <p:nvPr/>
         </p:nvGrpSpPr>
@@ -8147,9 +8178,7 @@
   <p:cSld name="">
     <p:bg>
       <p:bgPr shadeToTitle="0">
-        <a:solidFill>
-          <a:srgbClr val="F2F2F2"/>
-        </a:solidFill>
+        <a:noFill/>
       </p:bgPr>
     </p:bg>
     <p:spTree>
@@ -8168,28 +8197,96 @@
       </p:grpSpPr>
       <p:grpSp>
         <p:nvGrpSpPr>
-          <p:cNvPr id="1720157138" name="Group 2"/>
+          <p:cNvPr id="505544102" name=""/>
           <p:cNvGrpSpPr/>
           <p:nvPr/>
         </p:nvGrpSpPr>
         <p:grpSpPr bwMode="auto">
-          <a:xfrm rot="0">
-            <a:off x="2856057" y="1786480"/>
-            <a:ext cx="2349516" cy="2349516"/>
+          <a:xfrm>
+            <a:off x="2350582" y="1786479"/>
+            <a:ext cx="7449948" cy="3196071"/>
             <a:chOff x="0" y="0"/>
-            <a:chExt cx="812800" cy="812800"/>
+            <a:chExt cx="7449948" cy="3196071"/>
           </a:xfrm>
         </p:grpSpPr>
+        <p:grpSp>
+          <p:nvGrpSpPr>
+            <p:cNvPr id="1817016270" name="Group 2"/>
+            <p:cNvGrpSpPr/>
+            <p:nvPr/>
+          </p:nvGrpSpPr>
+          <p:grpSpPr bwMode="auto">
+            <a:xfrm rot="0">
+              <a:off x="505473" y="0"/>
+              <a:ext cx="2349516" cy="2349516"/>
+              <a:chOff x="0" y="0"/>
+              <a:chExt cx="812800" cy="812800"/>
+            </a:xfrm>
+          </p:grpSpPr>
+          <p:sp>
+            <p:nvSpPr>
+              <p:cNvPr id="3" name="Freeform 3"/>
+              <p:cNvSpPr/>
+              <p:nvPr/>
+            </p:nvSpPr>
+            <p:spPr bwMode="auto">
+              <a:xfrm rot="0" flipH="0" flipV="0">
+                <a:off x="0" y="0"/>
+                <a:ext cx="812800" cy="812800"/>
+              </a:xfrm>
+              <a:custGeom>
+                <a:avLst/>
+                <a:gdLst/>
+                <a:ahLst/>
+                <a:cxnLst/>
+                <a:rect l="l" t="t" r="r" b="b"/>
+                <a:pathLst>
+                  <a:path w="812800" h="812800" fill="norm" stroke="1" extrusionOk="0">
+                    <a:moveTo>
+                      <a:pt x="406400" y="0"/>
+                    </a:moveTo>
+                    <a:cubicBezTo>
+                      <a:pt x="181951" y="0"/>
+                      <a:pt x="0" y="181951"/>
+                      <a:pt x="0" y="406400"/>
+                    </a:cubicBezTo>
+                    <a:cubicBezTo>
+                      <a:pt x="0" y="630849"/>
+                      <a:pt x="181951" y="812800"/>
+                      <a:pt x="406400" y="812800"/>
+                    </a:cubicBezTo>
+                    <a:cubicBezTo>
+                      <a:pt x="630849" y="812800"/>
+                      <a:pt x="812800" y="630849"/>
+                      <a:pt x="812800" y="406400"/>
+                    </a:cubicBezTo>
+                    <a:cubicBezTo>
+                      <a:pt x="812800" y="181951"/>
+                      <a:pt x="630849" y="0"/>
+                      <a:pt x="406400" y="0"/>
+                    </a:cubicBezTo>
+                    <a:close/>
+                  </a:path>
+                </a:pathLst>
+              </a:custGeom>
+              <a:blipFill>
+                <a:blip r:embed="rId3"/>
+                <a:srcRect l="0" t="0" r="0" b="0"/>
+                <a:stretch/>
+              </a:blipFill>
+            </p:spPr>
+          </p:sp>
+        </p:grpSp>
         <p:sp>
           <p:nvSpPr>
-            <p:cNvPr id="3" name="Freeform 3"/>
+            <p:cNvPr id="1548456478" name="Freeform 4"/>
             <p:cNvSpPr/>
             <p:nvPr/>
           </p:nvSpPr>
           <p:spPr bwMode="auto">
             <a:xfrm rot="0" flipH="0" flipV="0">
-              <a:off x="0" y="0"/>
-              <a:ext cx="812800" cy="812800"/>
+              <a:off x="4692057" y="0"/>
+              <a:ext cx="2349516" cy="2349516"/>
             </a:xfrm>
             <a:custGeom>
               <a:avLst/>
@@ -8198,171 +8295,120 @@
               <a:cxnLst/>
               <a:rect l="l" t="t" r="r" b="b"/>
               <a:pathLst>
-                <a:path w="812800" h="812800" fill="norm" stroke="1" extrusionOk="0">
+                <a:path w="2349516" h="2349516" fill="norm" stroke="1" extrusionOk="0">
                   <a:moveTo>
-                    <a:pt x="406400" y="0"/>
+                    <a:pt x="0" y="0"/>
                   </a:moveTo>
-                  <a:cubicBezTo>
-                    <a:pt x="181951" y="0"/>
-                    <a:pt x="0" y="181951"/>
-                    <a:pt x="0" y="406400"/>
-                  </a:cubicBezTo>
-                  <a:cubicBezTo>
-                    <a:pt x="0" y="630849"/>
-                    <a:pt x="181951" y="812800"/>
-                    <a:pt x="406400" y="812800"/>
-                  </a:cubicBezTo>
-                  <a:cubicBezTo>
-                    <a:pt x="630849" y="812800"/>
-                    <a:pt x="812800" y="630849"/>
-                    <a:pt x="812800" y="406400"/>
-                  </a:cubicBezTo>
-                  <a:cubicBezTo>
-                    <a:pt x="812800" y="181951"/>
-                    <a:pt x="630849" y="0"/>
-                    <a:pt x="406400" y="0"/>
-                  </a:cubicBezTo>
+                  <a:lnTo>
+                    <a:pt x="2349516" y="0"/>
+                  </a:lnTo>
+                  <a:lnTo>
+                    <a:pt x="2349516" y="2349517"/>
+                  </a:lnTo>
+                  <a:lnTo>
+                    <a:pt x="0" y="2349517"/>
+                  </a:lnTo>
+                  <a:lnTo>
+                    <a:pt x="0" y="0"/>
+                  </a:lnTo>
                   <a:close/>
                 </a:path>
               </a:pathLst>
             </a:custGeom>
             <a:blipFill>
-              <a:blip r:embed="rId3"/>
+              <a:blip r:embed="rId4"/>
               <a:srcRect l="0" t="0" r="0" b="0"/>
               <a:stretch/>
             </a:blipFill>
           </p:spPr>
         </p:sp>
+        <p:sp>
+          <p:nvSpPr>
+            <p:cNvPr id="2142827796" name="TextBox 5"/>
+            <p:cNvSpPr txBox="1"/>
+            <p:nvPr/>
+          </p:nvSpPr>
+          <p:spPr bwMode="auto">
+            <a:xfrm rot="0" flipH="0" flipV="0">
+              <a:off x="0" y="2733432"/>
+              <a:ext cx="3736636" cy="462639"/>
+            </a:xfrm>
+            <a:prstGeom prst="rect">
+              <a:avLst/>
+            </a:prstGeom>
+            <a:grpFill/>
+          </p:spPr>
+          <p:txBody>
+            <a:bodyPr lIns="0" tIns="0" rIns="0" bIns="0" rtlCol="0" anchor="t">
+              <a:spAutoFit/>
+            </a:bodyPr>
+            <a:lstStyle/>
+            <a:p>
+              <a:pPr algn="ctr">
+                <a:lnSpc>
+                  <a:spcPts val="3640"/>
+                </a:lnSpc>
+                <a:defRPr/>
+              </a:pPr>
+              <a:r>
+                <a:rPr lang="en-US" sz="2600" b="1">
+                  <a:solidFill>
+                    <a:srgbClr val="000000"/>
+                  </a:solidFill>
+                  <a:latin typeface="Rubik Bold"/>
+                  <a:ea typeface="Rubik Bold"/>
+                  <a:cs typeface="Rubik Bold"/>
+                </a:rPr>
+                <a:t>Dashlane</a:t>
+              </a:r>
+              <a:endParaRPr/>
+            </a:p>
+          </p:txBody>
+        </p:sp>
+        <p:sp>
+          <p:nvSpPr>
+            <p:cNvPr id="1001704740" name="TextBox 6"/>
+            <p:cNvSpPr txBox="1"/>
+            <p:nvPr/>
+          </p:nvSpPr>
+          <p:spPr bwMode="auto">
+            <a:xfrm rot="0">
+              <a:off x="4283685" y="2733433"/>
+              <a:ext cx="3166263" cy="448310"/>
+            </a:xfrm>
+            <a:prstGeom prst="rect">
+              <a:avLst/>
+            </a:prstGeom>
+            <a:grpFill/>
+          </p:spPr>
+          <p:txBody>
+            <a:bodyPr lIns="0" tIns="0" rIns="0" bIns="0" rtlCol="0" anchor="t">
+              <a:spAutoFit/>
+            </a:bodyPr>
+            <a:lstStyle/>
+            <a:p>
+              <a:pPr algn="ctr">
+                <a:lnSpc>
+                  <a:spcPts val="3640"/>
+                </a:lnSpc>
+                <a:defRPr/>
+              </a:pPr>
+              <a:r>
+                <a:rPr lang="en-US" sz="2600" b="1">
+                  <a:solidFill>
+                    <a:srgbClr val="000000"/>
+                  </a:solidFill>
+                  <a:latin typeface="Rubik Bold"/>
+                  <a:ea typeface="Rubik Bold"/>
+                  <a:cs typeface="Rubik Bold"/>
+                </a:rPr>
+                <a:t>LastPass</a:t>
+              </a:r>
+              <a:endParaRPr/>
+            </a:p>
+          </p:txBody>
+        </p:sp>
       </p:grpSp>
-      <p:sp>
-        <p:nvSpPr>
-          <p:cNvPr id="1369499524" name="Freeform 4"/>
-          <p:cNvSpPr/>
-          <p:nvPr/>
-        </p:nvSpPr>
-        <p:spPr bwMode="auto">
-          <a:xfrm rot="0" flipH="0" flipV="0">
-            <a:off x="7042641" y="1786480"/>
-            <a:ext cx="2349516" cy="2349516"/>
-          </a:xfrm>
-          <a:custGeom>
-            <a:avLst/>
-            <a:gdLst/>
-            <a:ahLst/>
-            <a:cxnLst/>
-            <a:rect l="l" t="t" r="r" b="b"/>
-            <a:pathLst>
-              <a:path w="2349516" h="2349516" fill="norm" stroke="1" extrusionOk="0">
-                <a:moveTo>
-                  <a:pt x="0" y="0"/>
-                </a:moveTo>
-                <a:lnTo>
-                  <a:pt x="2349516" y="0"/>
-                </a:lnTo>
-                <a:lnTo>
-                  <a:pt x="2349516" y="2349517"/>
-                </a:lnTo>
-                <a:lnTo>
-                  <a:pt x="0" y="2349517"/>
-                </a:lnTo>
-                <a:lnTo>
-                  <a:pt x="0" y="0"/>
-                </a:lnTo>
-                <a:close/>
-              </a:path>
-            </a:pathLst>
-          </a:custGeom>
-          <a:blipFill>
-            <a:blip r:embed="rId4"/>
-            <a:srcRect l="0" t="0" r="0" b="0"/>
-            <a:stretch/>
-          </a:blipFill>
-        </p:spPr>
-        <p:txBody>
-          <a:bodyPr/>
-          <a:p/>
-        </p:txBody>
-      </p:sp>
-      <p:sp>
-        <p:nvSpPr>
-          <p:cNvPr id="84526225" name="TextBox 5"/>
-          <p:cNvSpPr txBox="1"/>
-          <p:nvPr/>
-        </p:nvSpPr>
-        <p:spPr bwMode="auto">
-          <a:xfrm rot="0" flipH="0" flipV="0">
-            <a:off x="2350583" y="4519913"/>
-            <a:ext cx="3736636" cy="462639"/>
-          </a:xfrm>
-          <a:prstGeom prst="rect">
-            <a:avLst/>
-          </a:prstGeom>
-        </p:spPr>
-        <p:txBody>
-          <a:bodyPr lIns="0" tIns="0" rIns="0" bIns="0" rtlCol="0" anchor="t">
-            <a:spAutoFit/>
-          </a:bodyPr>
-          <a:lstStyle/>
-          <a:p>
-            <a:pPr algn="ctr">
-              <a:lnSpc>
-                <a:spcPts val="3640"/>
-              </a:lnSpc>
-              <a:defRPr/>
-            </a:pPr>
-            <a:r>
-              <a:rPr sz="2600" b="1" lang="en-US">
-                <a:solidFill>
-                  <a:srgbClr val="000000"/>
-                </a:solidFill>
-                <a:latin typeface="Rubik Bold"/>
-              </a:rPr>
-              <a:t>Dashlane</a:t>
-            </a:r>
-            <a:endParaRPr/>
-          </a:p>
-        </p:txBody>
-      </p:sp>
-      <p:sp>
-        <p:nvSpPr>
-          <p:cNvPr id="1800511430" name="TextBox 6"/>
-          <p:cNvSpPr txBox="1"/>
-          <p:nvPr/>
-        </p:nvSpPr>
-        <p:spPr bwMode="auto">
-          <a:xfrm rot="0">
-            <a:off x="6634268" y="4519914"/>
-            <a:ext cx="3166263" cy="448310"/>
-          </a:xfrm>
-          <a:prstGeom prst="rect">
-            <a:avLst/>
-          </a:prstGeom>
-        </p:spPr>
-        <p:txBody>
-          <a:bodyPr lIns="0" tIns="0" rIns="0" bIns="0" rtlCol="0" anchor="t">
-            <a:spAutoFit/>
-          </a:bodyPr>
-          <a:lstStyle/>
-          <a:p>
-            <a:pPr algn="ctr">
-              <a:lnSpc>
-                <a:spcPts val="3640"/>
-              </a:lnSpc>
-              <a:defRPr/>
-            </a:pPr>
-            <a:r>
-              <a:rPr sz="2600" b="1" lang="en-US">
-                <a:solidFill>
-                  <a:srgbClr val="000000"/>
-                </a:solidFill>
-                <a:latin typeface="Rubik Bold"/>
-              </a:rPr>
-              <a:t>LastPass</a:t>
-            </a:r>
-            <a:endParaRPr/>
-          </a:p>
-        </p:txBody>
-      </p:sp>
     </p:spTree>
   </p:cSld>
   <p:clrMapOvr>
@@ -8384,9 +8430,7 @@
   <p:cSld name="">
     <p:bg>
       <p:bgPr shadeToTitle="0">
-        <a:solidFill>
-          <a:srgbClr val="F2F2F2"/>
-        </a:solidFill>
+        <a:noFill/>
       </p:bgPr>
     </p:bg>
     <p:spTree>
@@ -8403,184 +8447,197 @@
           <a:chExt cx="0" cy="0"/>
         </a:xfrm>
       </p:grpSpPr>
-      <p:sp>
-        <p:nvSpPr>
-          <p:cNvPr id="1433873808" name="Freeform 2"/>
-          <p:cNvSpPr/>
+      <p:grpSp>
+        <p:nvGrpSpPr>
+          <p:cNvPr id="1462467199" name=""/>
+          <p:cNvGrpSpPr/>
           <p:nvPr/>
-        </p:nvSpPr>
-        <p:spPr bwMode="auto">
-          <a:xfrm rot="0" flipH="0" flipV="0">
-            <a:off x="2856057" y="1786480"/>
-            <a:ext cx="2349516" cy="2349516"/>
+        </p:nvGrpSpPr>
+        <p:grpSpPr bwMode="auto">
+          <a:xfrm>
+            <a:off x="2096582" y="1786479"/>
+            <a:ext cx="7703947" cy="3196071"/>
+            <a:chOff x="0" y="0"/>
+            <a:chExt cx="7703947" cy="3196071"/>
           </a:xfrm>
-          <a:custGeom>
-            <a:avLst/>
-            <a:gdLst/>
-            <a:ahLst/>
-            <a:cxnLst/>
-            <a:rect l="l" t="t" r="r" b="b"/>
-            <a:pathLst>
-              <a:path w="2349516" h="2349516" fill="norm" stroke="1" extrusionOk="0">
-                <a:moveTo>
-                  <a:pt x="0" y="0"/>
-                </a:moveTo>
-                <a:lnTo>
-                  <a:pt x="2349516" y="0"/>
-                </a:lnTo>
-                <a:lnTo>
-                  <a:pt x="2349516" y="2349517"/>
-                </a:lnTo>
-                <a:lnTo>
-                  <a:pt x="0" y="2349517"/>
-                </a:lnTo>
-                <a:lnTo>
-                  <a:pt x="0" y="0"/>
-                </a:lnTo>
-                <a:close/>
-              </a:path>
-            </a:pathLst>
-          </a:custGeom>
-          <a:blipFill>
-            <a:blip r:embed="rId3"/>
-            <a:srcRect l="0" t="0" r="0" b="0"/>
-            <a:stretch/>
-          </a:blipFill>
-        </p:spPr>
-        <p:txBody>
-          <a:bodyPr/>
-          <a:p/>
-        </p:txBody>
-      </p:sp>
-      <p:sp>
-        <p:nvSpPr>
-          <p:cNvPr id="1557447485" name="Freeform 3"/>
-          <p:cNvSpPr/>
-          <p:nvPr/>
-        </p:nvSpPr>
-        <p:spPr bwMode="auto">
-          <a:xfrm rot="0" flipH="0" flipV="0">
-            <a:off x="7042641" y="1786480"/>
-            <a:ext cx="2349516" cy="2349516"/>
-          </a:xfrm>
-          <a:custGeom>
-            <a:avLst/>
-            <a:gdLst/>
-            <a:ahLst/>
-            <a:cxnLst/>
-            <a:rect l="l" t="t" r="r" b="b"/>
-            <a:pathLst>
-              <a:path w="2349516" h="2349516" fill="norm" stroke="1" extrusionOk="0">
-                <a:moveTo>
-                  <a:pt x="0" y="0"/>
-                </a:moveTo>
-                <a:lnTo>
-                  <a:pt x="2349516" y="0"/>
-                </a:lnTo>
-                <a:lnTo>
-                  <a:pt x="2349516" y="2349517"/>
-                </a:lnTo>
-                <a:lnTo>
-                  <a:pt x="0" y="2349517"/>
-                </a:lnTo>
-                <a:lnTo>
-                  <a:pt x="0" y="0"/>
-                </a:lnTo>
-                <a:close/>
-              </a:path>
-            </a:pathLst>
-          </a:custGeom>
-          <a:blipFill>
-            <a:blip r:embed="rId4"/>
-            <a:srcRect l="0" t="0" r="0" b="0"/>
-            <a:stretch/>
-          </a:blipFill>
-        </p:spPr>
-        <p:txBody>
-          <a:bodyPr/>
-          <a:p/>
-        </p:txBody>
-      </p:sp>
-      <p:sp>
-        <p:nvSpPr>
-          <p:cNvPr id="423949812" name="TextBox 4"/>
-          <p:cNvSpPr txBox="1"/>
-          <p:nvPr/>
-        </p:nvSpPr>
-        <p:spPr bwMode="auto">
-          <a:xfrm rot="0" flipH="0" flipV="0">
-            <a:off x="2096583" y="4519913"/>
-            <a:ext cx="4043553" cy="462639"/>
-          </a:xfrm>
-          <a:prstGeom prst="rect">
-            <a:avLst/>
-          </a:prstGeom>
-        </p:spPr>
-        <p:txBody>
-          <a:bodyPr lIns="0" tIns="0" rIns="0" bIns="0" rtlCol="0" anchor="t">
-            <a:spAutoFit/>
-          </a:bodyPr>
-          <a:lstStyle/>
-          <a:p>
-            <a:pPr algn="ctr">
-              <a:lnSpc>
-                <a:spcPts val="3640"/>
-              </a:lnSpc>
-              <a:defRPr/>
-            </a:pPr>
-            <a:r>
-              <a:rPr sz="2600" b="1" lang="en-US">
-                <a:solidFill>
-                  <a:srgbClr val="000000"/>
-                </a:solidFill>
-                <a:latin typeface="Rubik Bold"/>
-              </a:rPr>
-              <a:t>Bitwarden</a:t>
-            </a:r>
-            <a:endParaRPr/>
-          </a:p>
-        </p:txBody>
-      </p:sp>
-      <p:sp>
-        <p:nvSpPr>
-          <p:cNvPr id="1655083270" name="TextBox 5"/>
-          <p:cNvSpPr txBox="1"/>
-          <p:nvPr/>
-        </p:nvSpPr>
-        <p:spPr bwMode="auto">
-          <a:xfrm rot="0">
-            <a:off x="6634268" y="4519914"/>
-            <a:ext cx="3166263" cy="448310"/>
-          </a:xfrm>
-          <a:prstGeom prst="rect">
-            <a:avLst/>
-          </a:prstGeom>
-        </p:spPr>
-        <p:txBody>
-          <a:bodyPr lIns="0" tIns="0" rIns="0" bIns="0" rtlCol="0" anchor="t">
-            <a:spAutoFit/>
-          </a:bodyPr>
-          <a:lstStyle/>
-          <a:p>
-            <a:pPr algn="ctr">
-              <a:lnSpc>
-                <a:spcPts val="3640"/>
-              </a:lnSpc>
-              <a:defRPr/>
-            </a:pPr>
-            <a:r>
-              <a:rPr sz="2600" b="1" lang="en-US">
-                <a:solidFill>
-                  <a:srgbClr val="000000"/>
-                </a:solidFill>
-                <a:latin typeface="Rubik Bold"/>
-              </a:rPr>
-              <a:t>KeePass</a:t>
-            </a:r>
-            <a:endParaRPr/>
-          </a:p>
-        </p:txBody>
-      </p:sp>
+        </p:grpSpPr>
+        <p:sp>
+          <p:nvSpPr>
+            <p:cNvPr id="25490370" name="Freeform 2"/>
+            <p:cNvSpPr/>
+            <p:nvPr/>
+          </p:nvSpPr>
+          <p:spPr bwMode="auto">
+            <a:xfrm rot="0" flipH="0" flipV="0">
+              <a:off x="759474" y="0"/>
+              <a:ext cx="2349516" cy="2349516"/>
+            </a:xfrm>
+            <a:custGeom>
+              <a:avLst/>
+              <a:gdLst/>
+              <a:ahLst/>
+              <a:cxnLst/>
+              <a:rect l="l" t="t" r="r" b="b"/>
+              <a:pathLst>
+                <a:path w="2349516" h="2349516" fill="norm" stroke="1" extrusionOk="0">
+                  <a:moveTo>
+                    <a:pt x="0" y="0"/>
+                  </a:moveTo>
+                  <a:lnTo>
+                    <a:pt x="2349516" y="0"/>
+                  </a:lnTo>
+                  <a:lnTo>
+                    <a:pt x="2349516" y="2349517"/>
+                  </a:lnTo>
+                  <a:lnTo>
+                    <a:pt x="0" y="2349517"/>
+                  </a:lnTo>
+                  <a:lnTo>
+                    <a:pt x="0" y="0"/>
+                  </a:lnTo>
+                  <a:close/>
+                </a:path>
+              </a:pathLst>
+            </a:custGeom>
+            <a:blipFill>
+              <a:blip r:embed="rId3"/>
+              <a:srcRect l="0" t="0" r="0" b="0"/>
+              <a:stretch/>
+            </a:blipFill>
+          </p:spPr>
+        </p:sp>
+        <p:sp>
+          <p:nvSpPr>
+            <p:cNvPr id="1863866327" name="Freeform 3"/>
+            <p:cNvSpPr/>
+            <p:nvPr/>
+          </p:nvSpPr>
+          <p:spPr bwMode="auto">
+            <a:xfrm rot="0" flipH="0" flipV="0">
+              <a:off x="4946058" y="0"/>
+              <a:ext cx="2349516" cy="2349516"/>
+            </a:xfrm>
+            <a:custGeom>
+              <a:avLst/>
+              <a:gdLst/>
+              <a:ahLst/>
+              <a:cxnLst/>
+              <a:rect l="l" t="t" r="r" b="b"/>
+              <a:pathLst>
+                <a:path w="2349516" h="2349516" fill="norm" stroke="1" extrusionOk="0">
+                  <a:moveTo>
+                    <a:pt x="0" y="0"/>
+                  </a:moveTo>
+                  <a:lnTo>
+                    <a:pt x="2349516" y="0"/>
+                  </a:lnTo>
+                  <a:lnTo>
+                    <a:pt x="2349516" y="2349517"/>
+                  </a:lnTo>
+                  <a:lnTo>
+                    <a:pt x="0" y="2349517"/>
+                  </a:lnTo>
+                  <a:lnTo>
+                    <a:pt x="0" y="0"/>
+                  </a:lnTo>
+                  <a:close/>
+                </a:path>
+              </a:pathLst>
+            </a:custGeom>
+            <a:blipFill>
+              <a:blip r:embed="rId4"/>
+              <a:srcRect l="0" t="0" r="0" b="0"/>
+              <a:stretch/>
+            </a:blipFill>
+          </p:spPr>
+        </p:sp>
+        <p:sp>
+          <p:nvSpPr>
+            <p:cNvPr id="1680529616" name="TextBox 4"/>
+            <p:cNvSpPr txBox="1"/>
+            <p:nvPr/>
+          </p:nvSpPr>
+          <p:spPr bwMode="auto">
+            <a:xfrm rot="0" flipH="0" flipV="0">
+              <a:off x="0" y="2733432"/>
+              <a:ext cx="4043553" cy="462639"/>
+            </a:xfrm>
+            <a:prstGeom prst="rect">
+              <a:avLst/>
+            </a:prstGeom>
+            <a:grpFill/>
+          </p:spPr>
+          <p:txBody>
+            <a:bodyPr lIns="0" tIns="0" rIns="0" bIns="0" rtlCol="0" anchor="t">
+              <a:spAutoFit/>
+            </a:bodyPr>
+            <a:lstStyle/>
+            <a:p>
+              <a:pPr algn="ctr">
+                <a:lnSpc>
+                  <a:spcPts val="3640"/>
+                </a:lnSpc>
+                <a:defRPr/>
+              </a:pPr>
+              <a:r>
+                <a:rPr lang="en-US" sz="2600" b="1">
+                  <a:solidFill>
+                    <a:srgbClr val="000000"/>
+                  </a:solidFill>
+                  <a:latin typeface="Rubik Bold"/>
+                  <a:ea typeface="Rubik Bold"/>
+                  <a:cs typeface="Rubik Bold"/>
+                </a:rPr>
+                <a:t>Bitwarden</a:t>
+              </a:r>
+              <a:endParaRPr/>
+            </a:p>
+          </p:txBody>
+        </p:sp>
+        <p:sp>
+          <p:nvSpPr>
+            <p:cNvPr id="1612290767" name="TextBox 5"/>
+            <p:cNvSpPr txBox="1"/>
+            <p:nvPr/>
+          </p:nvSpPr>
+          <p:spPr bwMode="auto">
+            <a:xfrm rot="0">
+              <a:off x="4537684" y="2733433"/>
+              <a:ext cx="3166263" cy="448310"/>
+            </a:xfrm>
+            <a:prstGeom prst="rect">
+              <a:avLst/>
+            </a:prstGeom>
+            <a:grpFill/>
+          </p:spPr>
+          <p:txBody>
+            <a:bodyPr lIns="0" tIns="0" rIns="0" bIns="0" rtlCol="0" anchor="t">
+              <a:spAutoFit/>
+            </a:bodyPr>
+            <a:lstStyle/>
+            <a:p>
+              <a:pPr algn="ctr">
+                <a:lnSpc>
+                  <a:spcPts val="3640"/>
+                </a:lnSpc>
+                <a:defRPr/>
+              </a:pPr>
+              <a:r>
+                <a:rPr lang="en-US" sz="2600" b="1">
+                  <a:solidFill>
+                    <a:srgbClr val="000000"/>
+                  </a:solidFill>
+                  <a:latin typeface="Rubik Bold"/>
+                  <a:ea typeface="Rubik Bold"/>
+                  <a:cs typeface="Rubik Bold"/>
+                </a:rPr>
+                <a:t>KeePass</a:t>
+              </a:r>
+              <a:endParaRPr/>
+            </a:p>
+          </p:txBody>
+        </p:sp>
+      </p:grpSp>
     </p:spTree>
   </p:cSld>
   <p:clrMapOvr>
@@ -8602,9 +8659,7 @@
   <p:cSld name="">
     <p:bg>
       <p:bgPr shadeToTitle="0">
-        <a:solidFill>
-          <a:srgbClr val="F2F2F2"/>
-        </a:solidFill>
+        <a:noFill/>
       </p:bgPr>
     </p:bg>
     <p:spTree>
@@ -8621,362 +8676,373 @@
           <a:chExt cx="0" cy="0"/>
         </a:xfrm>
       </p:grpSpPr>
-      <p:sp>
-        <p:nvSpPr>
-          <p:cNvPr id="746728728" name="Freeform 2"/>
-          <p:cNvSpPr/>
+      <p:grpSp>
+        <p:nvGrpSpPr>
+          <p:cNvPr id="380559807" name=""/>
+          <p:cNvGrpSpPr/>
           <p:nvPr/>
-        </p:nvSpPr>
-        <p:spPr bwMode="auto">
-          <a:xfrm rot="0" flipH="0" flipV="0">
-            <a:off x="370157" y="1786480"/>
-            <a:ext cx="2349516" cy="2349516"/>
+        </p:nvGrpSpPr>
+        <p:grpSpPr bwMode="auto">
+          <a:xfrm>
+            <a:off x="370156" y="1786479"/>
+            <a:ext cx="11507405" cy="3196071"/>
+            <a:chOff x="0" y="0"/>
+            <a:chExt cx="11507405" cy="3196071"/>
           </a:xfrm>
-          <a:custGeom>
-            <a:avLst/>
-            <a:gdLst/>
-            <a:ahLst/>
-            <a:cxnLst/>
-            <a:rect l="l" t="t" r="r" b="b"/>
-            <a:pathLst>
-              <a:path w="2349516" h="2349516" fill="norm" stroke="1" extrusionOk="0">
-                <a:moveTo>
-                  <a:pt x="0" y="0"/>
-                </a:moveTo>
-                <a:lnTo>
-                  <a:pt x="2349517" y="0"/>
-                </a:lnTo>
-                <a:lnTo>
-                  <a:pt x="2349517" y="2349517"/>
-                </a:lnTo>
-                <a:lnTo>
-                  <a:pt x="0" y="2349517"/>
-                </a:lnTo>
-                <a:lnTo>
-                  <a:pt x="0" y="0"/>
-                </a:lnTo>
-                <a:close/>
-              </a:path>
-            </a:pathLst>
-          </a:custGeom>
-          <a:blipFill>
-            <a:blip r:embed="rId3"/>
-            <a:srcRect l="0" t="0" r="0" b="0"/>
-            <a:stretch/>
-          </a:blipFill>
-        </p:spPr>
-        <p:txBody>
-          <a:bodyPr/>
-          <a:p/>
-        </p:txBody>
-      </p:sp>
-      <p:sp>
-        <p:nvSpPr>
-          <p:cNvPr id="973717796" name="Freeform 3"/>
-          <p:cNvSpPr/>
-          <p:nvPr/>
-        </p:nvSpPr>
-        <p:spPr bwMode="auto">
-          <a:xfrm rot="0" flipH="0" flipV="0">
-            <a:off x="9827788" y="1786480"/>
-            <a:ext cx="1994055" cy="2349516"/>
-          </a:xfrm>
-          <a:custGeom>
-            <a:avLst/>
-            <a:gdLst/>
-            <a:ahLst/>
-            <a:cxnLst/>
-            <a:rect l="l" t="t" r="r" b="b"/>
-            <a:pathLst>
-              <a:path w="1994055" h="2349516" fill="norm" stroke="1" extrusionOk="0">
-                <a:moveTo>
-                  <a:pt x="0" y="0"/>
-                </a:moveTo>
-                <a:lnTo>
-                  <a:pt x="1994055" y="0"/>
-                </a:lnTo>
-                <a:lnTo>
-                  <a:pt x="1994055" y="2349517"/>
-                </a:lnTo>
-                <a:lnTo>
-                  <a:pt x="0" y="2349517"/>
-                </a:lnTo>
-                <a:lnTo>
-                  <a:pt x="0" y="0"/>
-                </a:lnTo>
-                <a:close/>
-              </a:path>
-            </a:pathLst>
-          </a:custGeom>
-          <a:blipFill>
-            <a:blip r:embed="rId4"/>
-            <a:srcRect l="0" t="0" r="0" b="0"/>
-            <a:stretch/>
-          </a:blipFill>
-        </p:spPr>
-        <p:txBody>
-          <a:bodyPr/>
-          <a:p/>
-        </p:txBody>
-      </p:sp>
-      <p:sp>
-        <p:nvSpPr>
-          <p:cNvPr id="549708042" name="Freeform 4"/>
-          <p:cNvSpPr/>
-          <p:nvPr/>
-        </p:nvSpPr>
-        <p:spPr bwMode="auto">
-          <a:xfrm rot="0" flipH="0" flipV="0">
-            <a:off x="6628082" y="1786480"/>
-            <a:ext cx="2349516" cy="2349516"/>
-          </a:xfrm>
-          <a:custGeom>
-            <a:avLst/>
-            <a:gdLst/>
-            <a:ahLst/>
-            <a:cxnLst/>
-            <a:rect l="l" t="t" r="r" b="b"/>
-            <a:pathLst>
-              <a:path w="2349516" h="2349516" fill="norm" stroke="1" extrusionOk="0">
-                <a:moveTo>
-                  <a:pt x="0" y="0"/>
-                </a:moveTo>
-                <a:lnTo>
-                  <a:pt x="2349517" y="0"/>
-                </a:lnTo>
-                <a:lnTo>
-                  <a:pt x="2349517" y="2349517"/>
-                </a:lnTo>
-                <a:lnTo>
-                  <a:pt x="0" y="2349517"/>
-                </a:lnTo>
-                <a:lnTo>
-                  <a:pt x="0" y="0"/>
-                </a:lnTo>
-                <a:close/>
-              </a:path>
-            </a:pathLst>
-          </a:custGeom>
-          <a:blipFill>
-            <a:blip r:embed="rId5"/>
-            <a:srcRect l="0" t="0" r="0" b="0"/>
-            <a:stretch/>
-          </a:blipFill>
-        </p:spPr>
-        <p:txBody>
-          <a:bodyPr/>
-          <a:p/>
-        </p:txBody>
-      </p:sp>
-      <p:sp>
-        <p:nvSpPr>
-          <p:cNvPr id="1724942572" name="Freeform 5"/>
-          <p:cNvSpPr/>
-          <p:nvPr/>
-        </p:nvSpPr>
-        <p:spPr bwMode="auto">
-          <a:xfrm rot="0" flipH="0" flipV="0">
-            <a:off x="3499120" y="1918790"/>
-            <a:ext cx="2349516" cy="2084898"/>
-          </a:xfrm>
-          <a:custGeom>
-            <a:avLst/>
-            <a:gdLst/>
-            <a:ahLst/>
-            <a:cxnLst/>
-            <a:rect l="l" t="t" r="r" b="b"/>
-            <a:pathLst>
-              <a:path w="2349516" h="2084898" fill="norm" stroke="1" extrusionOk="0">
-                <a:moveTo>
-                  <a:pt x="0" y="0"/>
-                </a:moveTo>
-                <a:lnTo>
-                  <a:pt x="2349516" y="0"/>
-                </a:lnTo>
-                <a:lnTo>
-                  <a:pt x="2349516" y="2084897"/>
-                </a:lnTo>
-                <a:lnTo>
-                  <a:pt x="0" y="2084897"/>
-                </a:lnTo>
-                <a:lnTo>
-                  <a:pt x="0" y="0"/>
-                </a:lnTo>
-                <a:close/>
-              </a:path>
-            </a:pathLst>
-          </a:custGeom>
-          <a:blipFill>
-            <a:blip r:embed="rId6"/>
-            <a:srcRect l="13934" t="17955" r="13872" b="17982"/>
-            <a:stretch/>
-          </a:blipFill>
-        </p:spPr>
-        <p:txBody>
-          <a:bodyPr/>
-          <a:p/>
-        </p:txBody>
-      </p:sp>
-      <p:sp>
-        <p:nvSpPr>
-          <p:cNvPr id="1383103709" name="TextBox 6"/>
-          <p:cNvSpPr txBox="1"/>
-          <p:nvPr/>
-        </p:nvSpPr>
-        <p:spPr bwMode="auto">
-          <a:xfrm rot="0">
-            <a:off x="485583" y="4519913"/>
-            <a:ext cx="1801163" cy="448310"/>
-          </a:xfrm>
-          <a:prstGeom prst="rect">
-            <a:avLst/>
-          </a:prstGeom>
-        </p:spPr>
-        <p:txBody>
-          <a:bodyPr lIns="0" tIns="0" rIns="0" bIns="0" rtlCol="0" anchor="t">
-            <a:spAutoFit/>
-          </a:bodyPr>
-          <a:lstStyle/>
-          <a:p>
-            <a:pPr algn="ctr">
-              <a:lnSpc>
-                <a:spcPts val="3640"/>
-              </a:lnSpc>
-              <a:defRPr/>
-            </a:pPr>
-            <a:r>
-              <a:rPr sz="2600" b="1" lang="en-US">
-                <a:solidFill>
-                  <a:srgbClr val="000000"/>
-                </a:solidFill>
-                <a:latin typeface="Rubik Bold"/>
-              </a:rPr>
-              <a:t>SMS</a:t>
-            </a:r>
-            <a:endParaRPr/>
-          </a:p>
-        </p:txBody>
-      </p:sp>
-      <p:sp>
-        <p:nvSpPr>
-          <p:cNvPr id="1309673928" name="TextBox 7"/>
-          <p:cNvSpPr txBox="1"/>
-          <p:nvPr/>
-        </p:nvSpPr>
-        <p:spPr bwMode="auto">
-          <a:xfrm rot="0">
-            <a:off x="2697931" y="4519914"/>
-            <a:ext cx="3951894" cy="448310"/>
-          </a:xfrm>
-          <a:prstGeom prst="rect">
-            <a:avLst/>
-          </a:prstGeom>
-        </p:spPr>
-        <p:txBody>
-          <a:bodyPr lIns="0" tIns="0" rIns="0" bIns="0" rtlCol="0" anchor="t">
-            <a:spAutoFit/>
-          </a:bodyPr>
-          <a:lstStyle/>
-          <a:p>
-            <a:pPr algn="ctr">
-              <a:lnSpc>
-                <a:spcPts val="3640"/>
-              </a:lnSpc>
-              <a:defRPr/>
-            </a:pPr>
-            <a:r>
-              <a:rPr sz="2600" b="1" lang="en-US">
-                <a:solidFill>
-                  <a:srgbClr val="000000"/>
-                </a:solidFill>
-                <a:latin typeface="Rubik Bold"/>
-              </a:rPr>
-              <a:t>Autenticador de Google</a:t>
-            </a:r>
-            <a:endParaRPr/>
-          </a:p>
-        </p:txBody>
-      </p:sp>
-      <p:sp>
-        <p:nvSpPr>
-          <p:cNvPr id="1739735838" name="TextBox 8"/>
-          <p:cNvSpPr txBox="1"/>
-          <p:nvPr/>
-        </p:nvSpPr>
-        <p:spPr bwMode="auto">
-          <a:xfrm rot="0" flipH="0" flipV="0">
-            <a:off x="6628081" y="4519913"/>
-            <a:ext cx="2438887" cy="462639"/>
-          </a:xfrm>
-          <a:prstGeom prst="rect">
-            <a:avLst/>
-          </a:prstGeom>
-        </p:spPr>
-        <p:txBody>
-          <a:bodyPr lIns="0" tIns="0" rIns="0" bIns="0" rtlCol="0" anchor="t">
-            <a:spAutoFit/>
-          </a:bodyPr>
-          <a:lstStyle/>
-          <a:p>
-            <a:pPr algn="ctr">
-              <a:lnSpc>
-                <a:spcPts val="3640"/>
-              </a:lnSpc>
-              <a:defRPr/>
-            </a:pPr>
-            <a:r>
-              <a:rPr sz="2600" b="1" lang="en-US">
-                <a:solidFill>
-                  <a:srgbClr val="000000"/>
-                </a:solidFill>
-                <a:latin typeface="Rubik Bold"/>
-              </a:rPr>
-              <a:t>Authy</a:t>
-            </a:r>
-            <a:endParaRPr/>
-          </a:p>
-        </p:txBody>
-      </p:sp>
-      <p:sp>
-        <p:nvSpPr>
-          <p:cNvPr id="1395132848" name="TextBox 9"/>
-          <p:cNvSpPr txBox="1"/>
-          <p:nvPr/>
-        </p:nvSpPr>
-        <p:spPr bwMode="auto">
-          <a:xfrm rot="0" flipH="0" flipV="0">
-            <a:off x="9431374" y="4519913"/>
-            <a:ext cx="2446189" cy="462639"/>
-          </a:xfrm>
-          <a:prstGeom prst="rect">
-            <a:avLst/>
-          </a:prstGeom>
-        </p:spPr>
-        <p:txBody>
-          <a:bodyPr lIns="0" tIns="0" rIns="0" bIns="0" rtlCol="0" anchor="t">
-            <a:spAutoFit/>
-          </a:bodyPr>
-          <a:lstStyle/>
-          <a:p>
-            <a:pPr algn="ctr">
-              <a:lnSpc>
-                <a:spcPts val="3640"/>
-              </a:lnSpc>
-              <a:defRPr/>
-            </a:pPr>
-            <a:r>
-              <a:rPr sz="2600" b="1" lang="en-US">
-                <a:solidFill>
-                  <a:srgbClr val="000000"/>
-                </a:solidFill>
-                <a:latin typeface="Rubik Bold"/>
-              </a:rPr>
-              <a:t>Clave de seguridad</a:t>
-            </a:r>
-            <a:endParaRPr/>
-          </a:p>
-        </p:txBody>
-      </p:sp>
+        </p:grpSpPr>
+        <p:sp>
+          <p:nvSpPr>
+            <p:cNvPr id="603372934" name="Freeform 2"/>
+            <p:cNvSpPr/>
+            <p:nvPr/>
+          </p:nvSpPr>
+          <p:spPr bwMode="auto">
+            <a:xfrm rot="0" flipH="0" flipV="0">
+              <a:off x="0" y="0"/>
+              <a:ext cx="2349516" cy="2349516"/>
+            </a:xfrm>
+            <a:custGeom>
+              <a:avLst/>
+              <a:gdLst/>
+              <a:ahLst/>
+              <a:cxnLst/>
+              <a:rect l="l" t="t" r="r" b="b"/>
+              <a:pathLst>
+                <a:path w="2349516" h="2349516" fill="norm" stroke="1" extrusionOk="0">
+                  <a:moveTo>
+                    <a:pt x="0" y="0"/>
+                  </a:moveTo>
+                  <a:lnTo>
+                    <a:pt x="2349517" y="0"/>
+                  </a:lnTo>
+                  <a:lnTo>
+                    <a:pt x="2349517" y="2349517"/>
+                  </a:lnTo>
+                  <a:lnTo>
+                    <a:pt x="0" y="2349517"/>
+                  </a:lnTo>
+                  <a:lnTo>
+                    <a:pt x="0" y="0"/>
+                  </a:lnTo>
+                  <a:close/>
+                </a:path>
+              </a:pathLst>
+            </a:custGeom>
+            <a:blipFill>
+              <a:blip r:embed="rId3"/>
+              <a:srcRect l="0" t="0" r="0" b="0"/>
+              <a:stretch/>
+            </a:blipFill>
+          </p:spPr>
+        </p:sp>
+        <p:sp>
+          <p:nvSpPr>
+            <p:cNvPr id="2031204029" name="Freeform 3"/>
+            <p:cNvSpPr/>
+            <p:nvPr/>
+          </p:nvSpPr>
+          <p:spPr bwMode="auto">
+            <a:xfrm rot="0" flipH="0" flipV="0">
+              <a:off x="9457630" y="0"/>
+              <a:ext cx="1994055" cy="2349516"/>
+            </a:xfrm>
+            <a:custGeom>
+              <a:avLst/>
+              <a:gdLst/>
+              <a:ahLst/>
+              <a:cxnLst/>
+              <a:rect l="l" t="t" r="r" b="b"/>
+              <a:pathLst>
+                <a:path w="1994055" h="2349516" fill="norm" stroke="1" extrusionOk="0">
+                  <a:moveTo>
+                    <a:pt x="0" y="0"/>
+                  </a:moveTo>
+                  <a:lnTo>
+                    <a:pt x="1994055" y="0"/>
+                  </a:lnTo>
+                  <a:lnTo>
+                    <a:pt x="1994055" y="2349517"/>
+                  </a:lnTo>
+                  <a:lnTo>
+                    <a:pt x="0" y="2349517"/>
+                  </a:lnTo>
+                  <a:lnTo>
+                    <a:pt x="0" y="0"/>
+                  </a:lnTo>
+                  <a:close/>
+                </a:path>
+              </a:pathLst>
+            </a:custGeom>
+            <a:blipFill>
+              <a:blip r:embed="rId4"/>
+              <a:srcRect l="0" t="0" r="0" b="0"/>
+              <a:stretch/>
+            </a:blipFill>
+          </p:spPr>
+        </p:sp>
+        <p:sp>
+          <p:nvSpPr>
+            <p:cNvPr id="1849991255" name="Freeform 4"/>
+            <p:cNvSpPr/>
+            <p:nvPr/>
+          </p:nvSpPr>
+          <p:spPr bwMode="auto">
+            <a:xfrm rot="0" flipH="0" flipV="0">
+              <a:off x="6257925" y="0"/>
+              <a:ext cx="2349516" cy="2349516"/>
+            </a:xfrm>
+            <a:custGeom>
+              <a:avLst/>
+              <a:gdLst/>
+              <a:ahLst/>
+              <a:cxnLst/>
+              <a:rect l="l" t="t" r="r" b="b"/>
+              <a:pathLst>
+                <a:path w="2349516" h="2349516" fill="norm" stroke="1" extrusionOk="0">
+                  <a:moveTo>
+                    <a:pt x="0" y="0"/>
+                  </a:moveTo>
+                  <a:lnTo>
+                    <a:pt x="2349517" y="0"/>
+                  </a:lnTo>
+                  <a:lnTo>
+                    <a:pt x="2349517" y="2349517"/>
+                  </a:lnTo>
+                  <a:lnTo>
+                    <a:pt x="0" y="2349517"/>
+                  </a:lnTo>
+                  <a:lnTo>
+                    <a:pt x="0" y="0"/>
+                  </a:lnTo>
+                  <a:close/>
+                </a:path>
+              </a:pathLst>
+            </a:custGeom>
+            <a:blipFill>
+              <a:blip r:embed="rId5"/>
+              <a:srcRect l="0" t="0" r="0" b="0"/>
+              <a:stretch/>
+            </a:blipFill>
+          </p:spPr>
+        </p:sp>
+        <p:sp>
+          <p:nvSpPr>
+            <p:cNvPr id="1555794602" name="Freeform 5"/>
+            <p:cNvSpPr/>
+            <p:nvPr/>
+          </p:nvSpPr>
+          <p:spPr bwMode="auto">
+            <a:xfrm rot="0" flipH="0" flipV="0">
+              <a:off x="3128962" y="132309"/>
+              <a:ext cx="2349516" cy="2084898"/>
+            </a:xfrm>
+            <a:custGeom>
+              <a:avLst/>
+              <a:gdLst/>
+              <a:ahLst/>
+              <a:cxnLst/>
+              <a:rect l="l" t="t" r="r" b="b"/>
+              <a:pathLst>
+                <a:path w="2349516" h="2084898" fill="norm" stroke="1" extrusionOk="0">
+                  <a:moveTo>
+                    <a:pt x="0" y="0"/>
+                  </a:moveTo>
+                  <a:lnTo>
+                    <a:pt x="2349516" y="0"/>
+                  </a:lnTo>
+                  <a:lnTo>
+                    <a:pt x="2349516" y="2084897"/>
+                  </a:lnTo>
+                  <a:lnTo>
+                    <a:pt x="0" y="2084897"/>
+                  </a:lnTo>
+                  <a:lnTo>
+                    <a:pt x="0" y="0"/>
+                  </a:lnTo>
+                  <a:close/>
+                </a:path>
+              </a:pathLst>
+            </a:custGeom>
+            <a:blipFill>
+              <a:blip r:embed="rId6"/>
+              <a:srcRect l="13934" t="17955" r="13872" b="17982"/>
+              <a:stretch/>
+            </a:blipFill>
+          </p:spPr>
+        </p:sp>
+        <p:sp>
+          <p:nvSpPr>
+            <p:cNvPr id="196337321" name="TextBox 6"/>
+            <p:cNvSpPr txBox="1"/>
+            <p:nvPr/>
+          </p:nvSpPr>
+          <p:spPr bwMode="auto">
+            <a:xfrm rot="0">
+              <a:off x="115424" y="2733432"/>
+              <a:ext cx="1801163" cy="448310"/>
+            </a:xfrm>
+            <a:prstGeom prst="rect">
+              <a:avLst/>
+            </a:prstGeom>
+            <a:grpFill/>
+          </p:spPr>
+          <p:txBody>
+            <a:bodyPr lIns="0" tIns="0" rIns="0" bIns="0" rtlCol="0" anchor="t">
+              <a:spAutoFit/>
+            </a:bodyPr>
+            <a:lstStyle/>
+            <a:p>
+              <a:pPr algn="ctr">
+                <a:lnSpc>
+                  <a:spcPts val="3640"/>
+                </a:lnSpc>
+                <a:defRPr/>
+              </a:pPr>
+              <a:r>
+                <a:rPr lang="en-US" sz="2600" b="1">
+                  <a:solidFill>
+                    <a:srgbClr val="000000"/>
+                  </a:solidFill>
+                  <a:latin typeface="Rubik Bold"/>
+                  <a:ea typeface="Rubik Bold"/>
+                  <a:cs typeface="Rubik Bold"/>
+                </a:rPr>
+                <a:t>SMS</a:t>
+              </a:r>
+              <a:endParaRPr/>
+            </a:p>
+          </p:txBody>
+        </p:sp>
+        <p:sp>
+          <p:nvSpPr>
+            <p:cNvPr id="1082453252" name="TextBox 7"/>
+            <p:cNvSpPr txBox="1"/>
+            <p:nvPr/>
+          </p:nvSpPr>
+          <p:spPr bwMode="auto">
+            <a:xfrm rot="0">
+              <a:off x="2327773" y="2733433"/>
+              <a:ext cx="3951894" cy="448310"/>
+            </a:xfrm>
+            <a:prstGeom prst="rect">
+              <a:avLst/>
+            </a:prstGeom>
+            <a:grpFill/>
+          </p:spPr>
+          <p:txBody>
+            <a:bodyPr lIns="0" tIns="0" rIns="0" bIns="0" rtlCol="0" anchor="t">
+              <a:spAutoFit/>
+            </a:bodyPr>
+            <a:lstStyle/>
+            <a:p>
+              <a:pPr algn="ctr">
+                <a:lnSpc>
+                  <a:spcPts val="3640"/>
+                </a:lnSpc>
+                <a:defRPr/>
+              </a:pPr>
+              <a:r>
+                <a:rPr lang="en-US" sz="2600" b="1">
+                  <a:solidFill>
+                    <a:srgbClr val="000000"/>
+                  </a:solidFill>
+                  <a:latin typeface="Rubik Bold"/>
+                  <a:ea typeface="Rubik Bold"/>
+                  <a:cs typeface="Rubik Bold"/>
+                </a:rPr>
+                <a:t>Google Authenticator</a:t>
+              </a:r>
+              <a:endParaRPr/>
+            </a:p>
+          </p:txBody>
+        </p:sp>
+        <p:sp>
+          <p:nvSpPr>
+            <p:cNvPr id="1697391056" name="TextBox 8"/>
+            <p:cNvSpPr txBox="1"/>
+            <p:nvPr/>
+          </p:nvSpPr>
+          <p:spPr bwMode="auto">
+            <a:xfrm rot="0" flipH="0" flipV="0">
+              <a:off x="6257923" y="2733432"/>
+              <a:ext cx="2438887" cy="462639"/>
+            </a:xfrm>
+            <a:prstGeom prst="rect">
+              <a:avLst/>
+            </a:prstGeom>
+            <a:grpFill/>
+          </p:spPr>
+          <p:txBody>
+            <a:bodyPr lIns="0" tIns="0" rIns="0" bIns="0" rtlCol="0" anchor="t">
+              <a:spAutoFit/>
+            </a:bodyPr>
+            <a:lstStyle/>
+            <a:p>
+              <a:pPr algn="ctr">
+                <a:lnSpc>
+                  <a:spcPts val="3640"/>
+                </a:lnSpc>
+                <a:defRPr/>
+              </a:pPr>
+              <a:r>
+                <a:rPr lang="en-US" sz="2600" b="1">
+                  <a:solidFill>
+                    <a:srgbClr val="000000"/>
+                  </a:solidFill>
+                  <a:latin typeface="Rubik Bold"/>
+                  <a:ea typeface="Rubik Bold"/>
+                  <a:cs typeface="Rubik Bold"/>
+                </a:rPr>
+                <a:t>Authy</a:t>
+              </a:r>
+              <a:endParaRPr/>
+            </a:p>
+          </p:txBody>
+        </p:sp>
+        <p:sp>
+          <p:nvSpPr>
+            <p:cNvPr id="951273862" name="TextBox 9"/>
+            <p:cNvSpPr txBox="1"/>
+            <p:nvPr/>
+          </p:nvSpPr>
+          <p:spPr bwMode="auto">
+            <a:xfrm rot="0" flipH="0" flipV="0">
+              <a:off x="9061216" y="2733432"/>
+              <a:ext cx="2446189" cy="462639"/>
+            </a:xfrm>
+            <a:prstGeom prst="rect">
+              <a:avLst/>
+            </a:prstGeom>
+            <a:grpFill/>
+          </p:spPr>
+          <p:txBody>
+            <a:bodyPr lIns="0" tIns="0" rIns="0" bIns="0" rtlCol="0" anchor="t">
+              <a:spAutoFit/>
+            </a:bodyPr>
+            <a:lstStyle/>
+            <a:p>
+              <a:pPr algn="ctr">
+                <a:lnSpc>
+                  <a:spcPts val="3640"/>
+                </a:lnSpc>
+                <a:defRPr/>
+              </a:pPr>
+              <a:r>
+                <a:rPr lang="en-US" sz="2600" b="1">
+                  <a:solidFill>
+                    <a:srgbClr val="000000"/>
+                  </a:solidFill>
+                  <a:latin typeface="Rubik Bold"/>
+                  <a:ea typeface="Rubik Bold"/>
+                  <a:cs typeface="Rubik Bold"/>
+                </a:rPr>
+                <a:t>Security key</a:t>
+              </a:r>
+              <a:endParaRPr/>
+            </a:p>
+          </p:txBody>
+        </p:sp>
+      </p:grpSp>
     </p:spTree>
   </p:cSld>
   <p:clrMapOvr>
@@ -8998,9 +9064,7 @@
   <p:cSld name="">
     <p:bg>
       <p:bgPr shadeToTitle="0">
-        <a:solidFill>
-          <a:srgbClr val="F2F2F2"/>
-        </a:solidFill>
+        <a:noFill/>
       </p:bgPr>
     </p:bg>
     <p:spTree>
@@ -9019,7 +9083,7 @@
       </p:grpSpPr>
       <p:sp>
         <p:nvSpPr>
-          <p:cNvPr id="1724165300" name="Freeform 3"/>
+          <p:cNvPr id="247261215" name="Freeform 3"/>
           <p:cNvSpPr/>
           <p:nvPr/>
         </p:nvSpPr>
@@ -9094,7 +9158,7 @@
       </p:sp>
       <p:sp>
         <p:nvSpPr>
-          <p:cNvPr id="1486656808" name="TextBox 4"/>
+          <p:cNvPr id="719597882" name="TextBox 4"/>
           <p:cNvSpPr txBox="1"/>
           <p:nvPr/>
         </p:nvSpPr>
@@ -9136,7 +9200,7 @@
       </p:sp>
       <p:sp>
         <p:nvSpPr>
-          <p:cNvPr id="1333633886" name="AutoShape 5"/>
+          <p:cNvPr id="176788216" name="AutoShape 5"/>
           <p:cNvSpPr/>
           <p:nvPr/>
         </p:nvSpPr>
@@ -9164,7 +9228,7 @@
       </p:sp>
       <p:sp>
         <p:nvSpPr>
-          <p:cNvPr id="706308324" name="AutoShape 6"/>
+          <p:cNvPr id="1003610369" name="AutoShape 6"/>
           <p:cNvSpPr/>
           <p:nvPr/>
         </p:nvSpPr>
@@ -9192,7 +9256,7 @@
       </p:sp>
       <p:sp>
         <p:nvSpPr>
-          <p:cNvPr id="2109372573" name="AutoShape 7"/>
+          <p:cNvPr id="1968682045" name="AutoShape 7"/>
           <p:cNvSpPr/>
           <p:nvPr/>
         </p:nvSpPr>
@@ -9220,7 +9284,7 @@
       </p:sp>
       <p:sp>
         <p:nvSpPr>
-          <p:cNvPr id="1235767852" name="AutoShape 8"/>
+          <p:cNvPr id="460894646" name="AutoShape 8"/>
           <p:cNvSpPr/>
           <p:nvPr/>
         </p:nvSpPr>
@@ -9248,7 +9312,7 @@
       </p:sp>
       <p:sp>
         <p:nvSpPr>
-          <p:cNvPr id="1716562788" name="AutoShape 9"/>
+          <p:cNvPr id="1551153601" name="AutoShape 9"/>
           <p:cNvSpPr/>
           <p:nvPr/>
         </p:nvSpPr>
@@ -9276,7 +9340,7 @@
       </p:sp>
       <p:sp>
         <p:nvSpPr>
-          <p:cNvPr id="495825195" name="AutoShape 11"/>
+          <p:cNvPr id="773891794" name="AutoShape 11"/>
           <p:cNvSpPr/>
           <p:nvPr/>
         </p:nvSpPr>
@@ -9304,7 +9368,7 @@
       </p:sp>
       <p:sp>
         <p:nvSpPr>
-          <p:cNvPr id="128409874" name="Freeform 12"/>
+          <p:cNvPr id="1444738161" name="Freeform 12"/>
           <p:cNvSpPr/>
           <p:nvPr/>
         </p:nvSpPr>
@@ -9353,7 +9417,7 @@
       </p:sp>
       <p:sp>
         <p:nvSpPr>
-          <p:cNvPr id="1419158197" name="Freeform 13"/>
+          <p:cNvPr id="186258557" name="Freeform 13"/>
           <p:cNvSpPr/>
           <p:nvPr/>
         </p:nvSpPr>
@@ -9402,7 +9466,7 @@
       </p:sp>
       <p:sp>
         <p:nvSpPr>
-          <p:cNvPr id="2058670167" name="Freeform 14"/>
+          <p:cNvPr id="436054587" name="Freeform 14"/>
           <p:cNvSpPr/>
           <p:nvPr/>
         </p:nvSpPr>
@@ -9451,7 +9515,7 @@
       </p:sp>
       <p:pic>
         <p:nvPicPr>
-          <p:cNvPr id="287702904" name=""/>
+          <p:cNvPr id="37673178" name=""/>
           <p:cNvPicPr>
             <a:picLocks noChangeAspect="1"/>
           </p:cNvPicPr>
@@ -9463,7 +9527,7 @@
         </p:blipFill>
         <p:spPr bwMode="auto">
           <a:xfrm flipH="0" flipV="0">
-            <a:off x="173399" y="103655"/>
+            <a:off x="173399" y="103654"/>
             <a:ext cx="2527421" cy="1895566"/>
           </a:xfrm>
           <a:prstGeom prst="rect">
@@ -9492,9 +9556,7 @@
   <p:cSld name="">
     <p:bg>
       <p:bgPr shadeToTitle="0">
-        <a:solidFill>
-          <a:srgbClr val="F2F2F2"/>
-        </a:solidFill>
+        <a:noFill/>
       </p:bgPr>
     </p:bg>
     <p:spTree>
@@ -9511,362 +9573,373 @@
           <a:chExt cx="0" cy="0"/>
         </a:xfrm>
       </p:grpSpPr>
-      <p:sp>
-        <p:nvSpPr>
-          <p:cNvPr id="480595656" name="Freeform 2"/>
-          <p:cNvSpPr/>
+      <p:grpSp>
+        <p:nvGrpSpPr>
+          <p:cNvPr id="1614898755" name=""/>
+          <p:cNvGrpSpPr/>
           <p:nvPr/>
-        </p:nvSpPr>
-        <p:spPr bwMode="auto">
-          <a:xfrm rot="0" flipH="0" flipV="0">
-            <a:off x="3536161" y="1786480"/>
-            <a:ext cx="1870262" cy="2349516"/>
+        </p:nvGrpSpPr>
+        <p:grpSpPr bwMode="auto">
+          <a:xfrm>
+            <a:off x="353586" y="1758895"/>
+            <a:ext cx="11650975" cy="3223656"/>
+            <a:chOff x="0" y="0"/>
+            <a:chExt cx="11650975" cy="3223656"/>
           </a:xfrm>
-          <a:custGeom>
-            <a:avLst/>
-            <a:gdLst/>
-            <a:ahLst/>
-            <a:cxnLst/>
-            <a:rect l="l" t="t" r="r" b="b"/>
-            <a:pathLst>
-              <a:path w="1870262" h="2349516" fill="norm" stroke="1" extrusionOk="0">
-                <a:moveTo>
-                  <a:pt x="0" y="0"/>
-                </a:moveTo>
-                <a:lnTo>
-                  <a:pt x="1870262" y="0"/>
-                </a:lnTo>
-                <a:lnTo>
-                  <a:pt x="1870262" y="2349517"/>
-                </a:lnTo>
-                <a:lnTo>
-                  <a:pt x="0" y="2349517"/>
-                </a:lnTo>
-                <a:lnTo>
-                  <a:pt x="0" y="0"/>
-                </a:lnTo>
-                <a:close/>
-              </a:path>
-            </a:pathLst>
-          </a:custGeom>
-          <a:blipFill>
-            <a:blip r:embed="rId3"/>
-            <a:srcRect l="16376" t="7883" r="16872" b="8260"/>
-            <a:stretch/>
-          </a:blipFill>
-        </p:spPr>
-        <p:txBody>
-          <a:bodyPr/>
-          <a:p/>
-        </p:txBody>
-      </p:sp>
-      <p:sp>
-        <p:nvSpPr>
-          <p:cNvPr id="1624275612" name="Freeform 3"/>
-          <p:cNvSpPr/>
-          <p:nvPr/>
-        </p:nvSpPr>
-        <p:spPr bwMode="auto">
-          <a:xfrm rot="0" flipH="0" flipV="0">
-            <a:off x="353587" y="1758896"/>
-            <a:ext cx="2404684" cy="2404684"/>
-          </a:xfrm>
-          <a:custGeom>
-            <a:avLst/>
-            <a:gdLst/>
-            <a:ahLst/>
-            <a:cxnLst/>
-            <a:rect l="l" t="t" r="r" b="b"/>
-            <a:pathLst>
-              <a:path w="2404684" h="2404684" fill="norm" stroke="1" extrusionOk="0">
-                <a:moveTo>
-                  <a:pt x="0" y="0"/>
-                </a:moveTo>
-                <a:lnTo>
-                  <a:pt x="2404685" y="0"/>
-                </a:lnTo>
-                <a:lnTo>
-                  <a:pt x="2404685" y="2404684"/>
-                </a:lnTo>
-                <a:lnTo>
-                  <a:pt x="0" y="2404684"/>
-                </a:lnTo>
-                <a:lnTo>
-                  <a:pt x="0" y="0"/>
-                </a:lnTo>
-                <a:close/>
-              </a:path>
-            </a:pathLst>
-          </a:custGeom>
-          <a:blipFill>
-            <a:blip r:embed="rId4"/>
-            <a:srcRect l="0" t="0" r="0" b="0"/>
-            <a:stretch/>
-          </a:blipFill>
-        </p:spPr>
-        <p:txBody>
-          <a:bodyPr/>
-          <a:p/>
-        </p:txBody>
-      </p:sp>
-      <p:sp>
-        <p:nvSpPr>
-          <p:cNvPr id="206463546" name="Freeform 4"/>
-          <p:cNvSpPr/>
-          <p:nvPr/>
-        </p:nvSpPr>
-        <p:spPr bwMode="auto">
-          <a:xfrm rot="0" flipH="0" flipV="0">
-            <a:off x="6184313" y="1786480"/>
-            <a:ext cx="2324265" cy="2349516"/>
-          </a:xfrm>
-          <a:custGeom>
-            <a:avLst/>
-            <a:gdLst/>
-            <a:ahLst/>
-            <a:cxnLst/>
-            <a:rect l="l" t="t" r="r" b="b"/>
-            <a:pathLst>
-              <a:path w="2324265" h="2349516" fill="norm" stroke="1" extrusionOk="0">
-                <a:moveTo>
-                  <a:pt x="0" y="0"/>
-                </a:moveTo>
-                <a:lnTo>
-                  <a:pt x="2324265" y="0"/>
-                </a:lnTo>
-                <a:lnTo>
-                  <a:pt x="2324265" y="2349517"/>
-                </a:lnTo>
-                <a:lnTo>
-                  <a:pt x="0" y="2349517"/>
-                </a:lnTo>
-                <a:lnTo>
-                  <a:pt x="0" y="0"/>
-                </a:lnTo>
-                <a:close/>
-              </a:path>
-            </a:pathLst>
-          </a:custGeom>
-          <a:blipFill>
-            <a:blip r:embed="rId5"/>
-            <a:srcRect l="0" t="0" r="3114" b="10622"/>
-            <a:stretch/>
-          </a:blipFill>
-        </p:spPr>
-        <p:txBody>
-          <a:bodyPr/>
-          <a:p/>
-        </p:txBody>
-      </p:sp>
-      <p:sp>
-        <p:nvSpPr>
-          <p:cNvPr id="1032766442" name="Freeform 5"/>
-          <p:cNvSpPr/>
-          <p:nvPr/>
-        </p:nvSpPr>
-        <p:spPr bwMode="auto">
-          <a:xfrm rot="0" flipH="0" flipV="0">
-            <a:off x="9289628" y="1786480"/>
-            <a:ext cx="2548784" cy="2347082"/>
-          </a:xfrm>
-          <a:custGeom>
-            <a:avLst/>
-            <a:gdLst/>
-            <a:ahLst/>
-            <a:cxnLst/>
-            <a:rect l="l" t="t" r="r" b="b"/>
-            <a:pathLst>
-              <a:path w="2548784" h="2347082" fill="norm" stroke="1" extrusionOk="0">
-                <a:moveTo>
-                  <a:pt x="0" y="0"/>
-                </a:moveTo>
-                <a:lnTo>
-                  <a:pt x="2548785" y="0"/>
-                </a:lnTo>
-                <a:lnTo>
-                  <a:pt x="2548785" y="2347082"/>
-                </a:lnTo>
-                <a:lnTo>
-                  <a:pt x="0" y="2347082"/>
-                </a:lnTo>
-                <a:lnTo>
-                  <a:pt x="0" y="0"/>
-                </a:lnTo>
-                <a:close/>
-              </a:path>
-            </a:pathLst>
-          </a:custGeom>
-          <a:blipFill>
-            <a:blip r:embed="rId6"/>
-            <a:srcRect l="0" t="0" r="0" b="0"/>
-            <a:stretch/>
-          </a:blipFill>
-        </p:spPr>
-        <p:txBody>
-          <a:bodyPr/>
-          <a:p/>
-        </p:txBody>
-      </p:sp>
-      <p:sp>
-        <p:nvSpPr>
-          <p:cNvPr id="1837530637" name="TextBox 6"/>
-          <p:cNvSpPr txBox="1"/>
-          <p:nvPr/>
-        </p:nvSpPr>
-        <p:spPr bwMode="auto">
-          <a:xfrm rot="0">
-            <a:off x="655348" y="4519914"/>
-            <a:ext cx="1801163" cy="448310"/>
-          </a:xfrm>
-          <a:prstGeom prst="rect">
-            <a:avLst/>
-          </a:prstGeom>
-        </p:spPr>
-        <p:txBody>
-          <a:bodyPr lIns="0" tIns="0" rIns="0" bIns="0" rtlCol="0" anchor="t">
-            <a:spAutoFit/>
-          </a:bodyPr>
-          <a:lstStyle/>
-          <a:p>
-            <a:pPr algn="ctr">
-              <a:lnSpc>
-                <a:spcPts val="3640"/>
-              </a:lnSpc>
-              <a:defRPr/>
-            </a:pPr>
-            <a:r>
-              <a:rPr sz="2600" b="1" lang="en-US">
-                <a:solidFill>
-                  <a:srgbClr val="000000"/>
-                </a:solidFill>
-                <a:latin typeface="Rubik Bold"/>
-              </a:rPr>
-              <a:t>Nmap</a:t>
-            </a:r>
-            <a:endParaRPr/>
-          </a:p>
-        </p:txBody>
-      </p:sp>
-      <p:sp>
-        <p:nvSpPr>
-          <p:cNvPr id="1732630817" name="TextBox 7"/>
-          <p:cNvSpPr txBox="1"/>
-          <p:nvPr/>
-        </p:nvSpPr>
-        <p:spPr bwMode="auto">
-          <a:xfrm rot="0" flipH="0" flipV="0">
-            <a:off x="2843249" y="4519913"/>
-            <a:ext cx="3143970" cy="462639"/>
-          </a:xfrm>
-          <a:prstGeom prst="rect">
-            <a:avLst/>
-          </a:prstGeom>
-        </p:spPr>
-        <p:txBody>
-          <a:bodyPr lIns="0" tIns="0" rIns="0" bIns="0" rtlCol="0" anchor="t">
-            <a:spAutoFit/>
-          </a:bodyPr>
-          <a:lstStyle/>
-          <a:p>
-            <a:pPr algn="ctr">
-              <a:lnSpc>
-                <a:spcPts val="3640"/>
-              </a:lnSpc>
-              <a:defRPr/>
-            </a:pPr>
-            <a:r>
-              <a:rPr sz="2600" b="1" lang="en-US">
-                <a:solidFill>
-                  <a:srgbClr val="000000"/>
-                </a:solidFill>
-                <a:latin typeface="Rubik Bold"/>
-              </a:rPr>
-              <a:t>Metasploit</a:t>
-            </a:r>
-            <a:endParaRPr/>
-          </a:p>
-        </p:txBody>
-      </p:sp>
-      <p:sp>
-        <p:nvSpPr>
-          <p:cNvPr id="1948740273" name="TextBox 8"/>
-          <p:cNvSpPr txBox="1"/>
-          <p:nvPr/>
-        </p:nvSpPr>
-        <p:spPr bwMode="auto">
-          <a:xfrm rot="0" flipH="0" flipV="0">
-            <a:off x="5907124" y="4519913"/>
-            <a:ext cx="2763689" cy="462639"/>
-          </a:xfrm>
-          <a:prstGeom prst="rect">
-            <a:avLst/>
-          </a:prstGeom>
-        </p:spPr>
-        <p:txBody>
-          <a:bodyPr lIns="0" tIns="0" rIns="0" bIns="0" rtlCol="0" anchor="t">
-            <a:spAutoFit/>
-          </a:bodyPr>
-          <a:lstStyle/>
-          <a:p>
-            <a:pPr algn="ctr">
-              <a:lnSpc>
-                <a:spcPts val="3640"/>
-              </a:lnSpc>
-              <a:defRPr/>
-            </a:pPr>
-            <a:r>
-              <a:rPr sz="2600" b="1" lang="en-US">
-                <a:solidFill>
-                  <a:srgbClr val="000000"/>
-                </a:solidFill>
-                <a:latin typeface="Rubik Bold"/>
-              </a:rPr>
-              <a:t>Python</a:t>
-            </a:r>
-            <a:endParaRPr/>
-          </a:p>
-        </p:txBody>
-      </p:sp>
-      <p:sp>
-        <p:nvSpPr>
-          <p:cNvPr id="1079441136" name="TextBox 9"/>
-          <p:cNvSpPr txBox="1"/>
-          <p:nvPr/>
-        </p:nvSpPr>
-        <p:spPr bwMode="auto">
-          <a:xfrm rot="0" flipH="0" flipV="0">
-            <a:off x="9050374" y="4519913"/>
-            <a:ext cx="2954189" cy="462639"/>
-          </a:xfrm>
-          <a:prstGeom prst="rect">
-            <a:avLst/>
-          </a:prstGeom>
-        </p:spPr>
-        <p:txBody>
-          <a:bodyPr lIns="0" tIns="0" rIns="0" bIns="0" rtlCol="0" anchor="t">
-            <a:spAutoFit/>
-          </a:bodyPr>
-          <a:lstStyle/>
-          <a:p>
-            <a:pPr algn="ctr">
-              <a:lnSpc>
-                <a:spcPts val="3640"/>
-              </a:lnSpc>
-              <a:defRPr/>
-            </a:pPr>
-            <a:r>
-              <a:rPr sz="2600" b="1" lang="en-US">
-                <a:solidFill>
-                  <a:srgbClr val="000000"/>
-                </a:solidFill>
-                <a:latin typeface="Rubik Bold"/>
-              </a:rPr>
-              <a:t>Normas ISO</a:t>
-            </a:r>
-            <a:endParaRPr/>
-          </a:p>
-        </p:txBody>
-      </p:sp>
+        </p:grpSpPr>
+        <p:sp>
+          <p:nvSpPr>
+            <p:cNvPr id="41933635" name="Freeform 2"/>
+            <p:cNvSpPr/>
+            <p:nvPr/>
+          </p:nvSpPr>
+          <p:spPr bwMode="auto">
+            <a:xfrm rot="0" flipH="0" flipV="0">
+              <a:off x="3182573" y="27583"/>
+              <a:ext cx="1870262" cy="2349516"/>
+            </a:xfrm>
+            <a:custGeom>
+              <a:avLst/>
+              <a:gdLst/>
+              <a:ahLst/>
+              <a:cxnLst/>
+              <a:rect l="l" t="t" r="r" b="b"/>
+              <a:pathLst>
+                <a:path w="1870262" h="2349516" fill="norm" stroke="1" extrusionOk="0">
+                  <a:moveTo>
+                    <a:pt x="0" y="0"/>
+                  </a:moveTo>
+                  <a:lnTo>
+                    <a:pt x="1870262" y="0"/>
+                  </a:lnTo>
+                  <a:lnTo>
+                    <a:pt x="1870262" y="2349517"/>
+                  </a:lnTo>
+                  <a:lnTo>
+                    <a:pt x="0" y="2349517"/>
+                  </a:lnTo>
+                  <a:lnTo>
+                    <a:pt x="0" y="0"/>
+                  </a:lnTo>
+                  <a:close/>
+                </a:path>
+              </a:pathLst>
+            </a:custGeom>
+            <a:blipFill>
+              <a:blip r:embed="rId3"/>
+              <a:srcRect l="16376" t="7883" r="16872" b="8260"/>
+              <a:stretch/>
+            </a:blipFill>
+          </p:spPr>
+        </p:sp>
+        <p:sp>
+          <p:nvSpPr>
+            <p:cNvPr id="2016066821" name="Freeform 3"/>
+            <p:cNvSpPr/>
+            <p:nvPr/>
+          </p:nvSpPr>
+          <p:spPr bwMode="auto">
+            <a:xfrm rot="0" flipH="0" flipV="0">
+              <a:off x="0" y="0"/>
+              <a:ext cx="2404684" cy="2404684"/>
+            </a:xfrm>
+            <a:custGeom>
+              <a:avLst/>
+              <a:gdLst/>
+              <a:ahLst/>
+              <a:cxnLst/>
+              <a:rect l="l" t="t" r="r" b="b"/>
+              <a:pathLst>
+                <a:path w="2404684" h="2404684" fill="norm" stroke="1" extrusionOk="0">
+                  <a:moveTo>
+                    <a:pt x="0" y="0"/>
+                  </a:moveTo>
+                  <a:lnTo>
+                    <a:pt x="2404685" y="0"/>
+                  </a:lnTo>
+                  <a:lnTo>
+                    <a:pt x="2404685" y="2404684"/>
+                  </a:lnTo>
+                  <a:lnTo>
+                    <a:pt x="0" y="2404684"/>
+                  </a:lnTo>
+                  <a:lnTo>
+                    <a:pt x="0" y="0"/>
+                  </a:lnTo>
+                  <a:close/>
+                </a:path>
+              </a:pathLst>
+            </a:custGeom>
+            <a:blipFill>
+              <a:blip r:embed="rId4"/>
+              <a:srcRect l="0" t="0" r="0" b="0"/>
+              <a:stretch/>
+            </a:blipFill>
+          </p:spPr>
+        </p:sp>
+        <p:sp>
+          <p:nvSpPr>
+            <p:cNvPr id="482176345" name="Freeform 4"/>
+            <p:cNvSpPr/>
+            <p:nvPr/>
+          </p:nvSpPr>
+          <p:spPr bwMode="auto">
+            <a:xfrm rot="0" flipH="0" flipV="0">
+              <a:off x="5830725" y="27583"/>
+              <a:ext cx="2324265" cy="2349516"/>
+            </a:xfrm>
+            <a:custGeom>
+              <a:avLst/>
+              <a:gdLst/>
+              <a:ahLst/>
+              <a:cxnLst/>
+              <a:rect l="l" t="t" r="r" b="b"/>
+              <a:pathLst>
+                <a:path w="2324265" h="2349516" fill="norm" stroke="1" extrusionOk="0">
+                  <a:moveTo>
+                    <a:pt x="0" y="0"/>
+                  </a:moveTo>
+                  <a:lnTo>
+                    <a:pt x="2324265" y="0"/>
+                  </a:lnTo>
+                  <a:lnTo>
+                    <a:pt x="2324265" y="2349517"/>
+                  </a:lnTo>
+                  <a:lnTo>
+                    <a:pt x="0" y="2349517"/>
+                  </a:lnTo>
+                  <a:lnTo>
+                    <a:pt x="0" y="0"/>
+                  </a:lnTo>
+                  <a:close/>
+                </a:path>
+              </a:pathLst>
+            </a:custGeom>
+            <a:blipFill>
+              <a:blip r:embed="rId5"/>
+              <a:srcRect l="0" t="0" r="3114" b="10622"/>
+              <a:stretch/>
+            </a:blipFill>
+          </p:spPr>
+        </p:sp>
+        <p:sp>
+          <p:nvSpPr>
+            <p:cNvPr id="1313726961" name="Freeform 5"/>
+            <p:cNvSpPr/>
+            <p:nvPr/>
+          </p:nvSpPr>
+          <p:spPr bwMode="auto">
+            <a:xfrm rot="0" flipH="0" flipV="0">
+              <a:off x="8936040" y="27583"/>
+              <a:ext cx="2548784" cy="2347082"/>
+            </a:xfrm>
+            <a:custGeom>
+              <a:avLst/>
+              <a:gdLst/>
+              <a:ahLst/>
+              <a:cxnLst/>
+              <a:rect l="l" t="t" r="r" b="b"/>
+              <a:pathLst>
+                <a:path w="2548784" h="2347082" fill="norm" stroke="1" extrusionOk="0">
+                  <a:moveTo>
+                    <a:pt x="0" y="0"/>
+                  </a:moveTo>
+                  <a:lnTo>
+                    <a:pt x="2548785" y="0"/>
+                  </a:lnTo>
+                  <a:lnTo>
+                    <a:pt x="2548785" y="2347082"/>
+                  </a:lnTo>
+                  <a:lnTo>
+                    <a:pt x="0" y="2347082"/>
+                  </a:lnTo>
+                  <a:lnTo>
+                    <a:pt x="0" y="0"/>
+                  </a:lnTo>
+                  <a:close/>
+                </a:path>
+              </a:pathLst>
+            </a:custGeom>
+            <a:blipFill>
+              <a:blip r:embed="rId6"/>
+              <a:srcRect l="0" t="0" r="0" b="0"/>
+              <a:stretch/>
+            </a:blipFill>
+          </p:spPr>
+        </p:sp>
+        <p:sp>
+          <p:nvSpPr>
+            <p:cNvPr id="1863543766" name="TextBox 6"/>
+            <p:cNvSpPr txBox="1"/>
+            <p:nvPr/>
+          </p:nvSpPr>
+          <p:spPr bwMode="auto">
+            <a:xfrm rot="0">
+              <a:off x="301760" y="2761017"/>
+              <a:ext cx="1801163" cy="448310"/>
+            </a:xfrm>
+            <a:prstGeom prst="rect">
+              <a:avLst/>
+            </a:prstGeom>
+            <a:grpFill/>
+          </p:spPr>
+          <p:txBody>
+            <a:bodyPr lIns="0" tIns="0" rIns="0" bIns="0" rtlCol="0" anchor="t">
+              <a:spAutoFit/>
+            </a:bodyPr>
+            <a:lstStyle/>
+            <a:p>
+              <a:pPr algn="ctr">
+                <a:lnSpc>
+                  <a:spcPts val="3640"/>
+                </a:lnSpc>
+                <a:defRPr/>
+              </a:pPr>
+              <a:r>
+                <a:rPr lang="en-US" sz="2600" b="1">
+                  <a:solidFill>
+                    <a:srgbClr val="000000"/>
+                  </a:solidFill>
+                  <a:latin typeface="Rubik Bold"/>
+                  <a:ea typeface="Rubik Bold"/>
+                  <a:cs typeface="Rubik Bold"/>
+                </a:rPr>
+                <a:t>Nmap</a:t>
+              </a:r>
+              <a:endParaRPr/>
+            </a:p>
+          </p:txBody>
+        </p:sp>
+        <p:sp>
+          <p:nvSpPr>
+            <p:cNvPr id="1702306372" name="TextBox 7"/>
+            <p:cNvSpPr txBox="1"/>
+            <p:nvPr/>
+          </p:nvSpPr>
+          <p:spPr bwMode="auto">
+            <a:xfrm rot="0" flipH="0" flipV="0">
+              <a:off x="2489661" y="2761016"/>
+              <a:ext cx="3143970" cy="462639"/>
+            </a:xfrm>
+            <a:prstGeom prst="rect">
+              <a:avLst/>
+            </a:prstGeom>
+            <a:grpFill/>
+          </p:spPr>
+          <p:txBody>
+            <a:bodyPr lIns="0" tIns="0" rIns="0" bIns="0" rtlCol="0" anchor="t">
+              <a:spAutoFit/>
+            </a:bodyPr>
+            <a:lstStyle/>
+            <a:p>
+              <a:pPr algn="ctr">
+                <a:lnSpc>
+                  <a:spcPts val="3640"/>
+                </a:lnSpc>
+                <a:defRPr/>
+              </a:pPr>
+              <a:r>
+                <a:rPr lang="en-US" sz="2600" b="1">
+                  <a:solidFill>
+                    <a:srgbClr val="000000"/>
+                  </a:solidFill>
+                  <a:latin typeface="Rubik Bold"/>
+                  <a:ea typeface="Rubik Bold"/>
+                  <a:cs typeface="Rubik Bold"/>
+                </a:rPr>
+                <a:t>Metasploit</a:t>
+              </a:r>
+              <a:endParaRPr/>
+            </a:p>
+          </p:txBody>
+        </p:sp>
+        <p:sp>
+          <p:nvSpPr>
+            <p:cNvPr id="956239643" name="TextBox 8"/>
+            <p:cNvSpPr txBox="1"/>
+            <p:nvPr/>
+          </p:nvSpPr>
+          <p:spPr bwMode="auto">
+            <a:xfrm rot="0" flipH="0" flipV="0">
+              <a:off x="5553536" y="2761016"/>
+              <a:ext cx="2763689" cy="462639"/>
+            </a:xfrm>
+            <a:prstGeom prst="rect">
+              <a:avLst/>
+            </a:prstGeom>
+            <a:grpFill/>
+          </p:spPr>
+          <p:txBody>
+            <a:bodyPr lIns="0" tIns="0" rIns="0" bIns="0" rtlCol="0" anchor="t">
+              <a:spAutoFit/>
+            </a:bodyPr>
+            <a:lstStyle/>
+            <a:p>
+              <a:pPr algn="ctr">
+                <a:lnSpc>
+                  <a:spcPts val="3640"/>
+                </a:lnSpc>
+                <a:defRPr/>
+              </a:pPr>
+              <a:r>
+                <a:rPr lang="en-US" sz="2600" b="1">
+                  <a:solidFill>
+                    <a:srgbClr val="000000"/>
+                  </a:solidFill>
+                  <a:latin typeface="Rubik Bold"/>
+                  <a:ea typeface="Rubik Bold"/>
+                  <a:cs typeface="Rubik Bold"/>
+                </a:rPr>
+                <a:t>Python</a:t>
+              </a:r>
+              <a:endParaRPr/>
+            </a:p>
+          </p:txBody>
+        </p:sp>
+        <p:sp>
+          <p:nvSpPr>
+            <p:cNvPr id="1227605525" name="TextBox 9"/>
+            <p:cNvSpPr txBox="1"/>
+            <p:nvPr/>
+          </p:nvSpPr>
+          <p:spPr bwMode="auto">
+            <a:xfrm rot="0" flipH="0" flipV="0">
+              <a:off x="8696786" y="2761016"/>
+              <a:ext cx="2954189" cy="462639"/>
+            </a:xfrm>
+            <a:prstGeom prst="rect">
+              <a:avLst/>
+            </a:prstGeom>
+            <a:grpFill/>
+          </p:spPr>
+          <p:txBody>
+            <a:bodyPr lIns="0" tIns="0" rIns="0" bIns="0" rtlCol="0" anchor="t">
+              <a:spAutoFit/>
+            </a:bodyPr>
+            <a:lstStyle/>
+            <a:p>
+              <a:pPr algn="ctr">
+                <a:lnSpc>
+                  <a:spcPts val="3640"/>
+                </a:lnSpc>
+                <a:defRPr/>
+              </a:pPr>
+              <a:r>
+                <a:rPr lang="en-US" sz="2600" b="1">
+                  <a:solidFill>
+                    <a:srgbClr val="000000"/>
+                  </a:solidFill>
+                  <a:latin typeface="Rubik Bold"/>
+                  <a:ea typeface="Rubik Bold"/>
+                  <a:cs typeface="Rubik Bold"/>
+                </a:rPr>
+                <a:t>Normes ISO</a:t>
+              </a:r>
+              <a:endParaRPr/>
+            </a:p>
+          </p:txBody>
+        </p:sp>
+      </p:grpSp>
     </p:spTree>
   </p:cSld>
   <p:clrMapOvr>
@@ -9888,9 +9961,7 @@
   <p:cSld name="">
     <p:bg>
       <p:bgPr shadeToTitle="0">
-        <a:solidFill>
-          <a:srgbClr val="F2F2F2"/>
-        </a:solidFill>
+        <a:noFill/>
       </p:bgPr>
     </p:bg>
     <p:spTree>
@@ -9907,184 +9978,197 @@
           <a:chExt cx="0" cy="0"/>
         </a:xfrm>
       </p:grpSpPr>
-      <p:sp>
-        <p:nvSpPr>
-          <p:cNvPr id="45224140" name="Freeform 2"/>
-          <p:cNvSpPr/>
+      <p:grpSp>
+        <p:nvGrpSpPr>
+          <p:cNvPr id="1677288234" name=""/>
+          <p:cNvGrpSpPr/>
           <p:nvPr/>
-        </p:nvSpPr>
-        <p:spPr bwMode="auto">
-          <a:xfrm rot="0" flipH="0" flipV="0">
-            <a:off x="2751589" y="1682012"/>
-            <a:ext cx="2558452" cy="2558452"/>
+        </p:nvGrpSpPr>
+        <p:grpSpPr bwMode="auto">
+          <a:xfrm>
+            <a:off x="2751588" y="1682011"/>
+            <a:ext cx="7048941" cy="3286211"/>
+            <a:chOff x="0" y="0"/>
+            <a:chExt cx="7048941" cy="3286211"/>
           </a:xfrm>
-          <a:custGeom>
-            <a:avLst/>
-            <a:gdLst/>
-            <a:ahLst/>
-            <a:cxnLst/>
-            <a:rect l="l" t="t" r="r" b="b"/>
-            <a:pathLst>
-              <a:path w="2558453" h="2558453" fill="norm" stroke="1" extrusionOk="0">
-                <a:moveTo>
-                  <a:pt x="0" y="0"/>
-                </a:moveTo>
-                <a:lnTo>
-                  <a:pt x="2558452" y="0"/>
-                </a:lnTo>
-                <a:lnTo>
-                  <a:pt x="2558452" y="2558453"/>
-                </a:lnTo>
-                <a:lnTo>
-                  <a:pt x="0" y="2558453"/>
-                </a:lnTo>
-                <a:lnTo>
-                  <a:pt x="0" y="0"/>
-                </a:lnTo>
-                <a:close/>
-              </a:path>
-            </a:pathLst>
-          </a:custGeom>
-          <a:blipFill>
-            <a:blip r:embed="rId3"/>
-            <a:srcRect l="0" t="0" r="0" b="0"/>
-            <a:stretch/>
-          </a:blipFill>
-        </p:spPr>
-        <p:txBody>
-          <a:bodyPr/>
-          <a:p/>
-        </p:txBody>
-      </p:sp>
-      <p:sp>
-        <p:nvSpPr>
-          <p:cNvPr id="2043565106" name="Freeform 3"/>
-          <p:cNvSpPr/>
-          <p:nvPr/>
-        </p:nvSpPr>
-        <p:spPr bwMode="auto">
-          <a:xfrm rot="0" flipH="0" flipV="0">
-            <a:off x="7042641" y="1786480"/>
-            <a:ext cx="2349516" cy="2349516"/>
-          </a:xfrm>
-          <a:custGeom>
-            <a:avLst/>
-            <a:gdLst/>
-            <a:ahLst/>
-            <a:cxnLst/>
-            <a:rect l="l" t="t" r="r" b="b"/>
-            <a:pathLst>
-              <a:path w="2349516" h="2349516" fill="norm" stroke="1" extrusionOk="0">
-                <a:moveTo>
-                  <a:pt x="0" y="0"/>
-                </a:moveTo>
-                <a:lnTo>
-                  <a:pt x="2349516" y="0"/>
-                </a:lnTo>
-                <a:lnTo>
-                  <a:pt x="2349516" y="2349517"/>
-                </a:lnTo>
-                <a:lnTo>
-                  <a:pt x="0" y="2349517"/>
-                </a:lnTo>
-                <a:lnTo>
-                  <a:pt x="0" y="0"/>
-                </a:lnTo>
-                <a:close/>
-              </a:path>
-            </a:pathLst>
-          </a:custGeom>
-          <a:blipFill>
-            <a:blip r:embed="rId4"/>
-            <a:srcRect l="0" t="0" r="0" b="0"/>
-            <a:stretch/>
-          </a:blipFill>
-        </p:spPr>
-        <p:txBody>
-          <a:bodyPr/>
-          <a:p/>
-        </p:txBody>
-      </p:sp>
-      <p:sp>
-        <p:nvSpPr>
-          <p:cNvPr id="895705989" name="TextBox 4"/>
-          <p:cNvSpPr txBox="1"/>
-          <p:nvPr/>
-        </p:nvSpPr>
-        <p:spPr bwMode="auto">
-          <a:xfrm rot="0">
-            <a:off x="3130233" y="4519914"/>
-            <a:ext cx="1801163" cy="448310"/>
-          </a:xfrm>
-          <a:prstGeom prst="rect">
-            <a:avLst/>
-          </a:prstGeom>
-        </p:spPr>
-        <p:txBody>
-          <a:bodyPr lIns="0" tIns="0" rIns="0" bIns="0" rtlCol="0" anchor="t">
-            <a:spAutoFit/>
-          </a:bodyPr>
-          <a:lstStyle/>
-          <a:p>
-            <a:pPr algn="ctr">
-              <a:lnSpc>
-                <a:spcPts val="3640"/>
-              </a:lnSpc>
-              <a:defRPr/>
-            </a:pPr>
-            <a:r>
-              <a:rPr sz="2600" b="1" lang="en-US">
-                <a:solidFill>
-                  <a:srgbClr val="000000"/>
-                </a:solidFill>
-                <a:latin typeface="Rubik Bold"/>
-              </a:rPr>
-              <a:t>yOTP</a:t>
-            </a:r>
-            <a:endParaRPr/>
-          </a:p>
-        </p:txBody>
-      </p:sp>
-      <p:sp>
-        <p:nvSpPr>
-          <p:cNvPr id="1631462426" name="TextBox 5"/>
-          <p:cNvSpPr txBox="1"/>
-          <p:nvPr/>
-        </p:nvSpPr>
-        <p:spPr bwMode="auto">
-          <a:xfrm rot="0">
-            <a:off x="6634268" y="4519914"/>
-            <a:ext cx="3166263" cy="448310"/>
-          </a:xfrm>
-          <a:prstGeom prst="rect">
-            <a:avLst/>
-          </a:prstGeom>
-        </p:spPr>
-        <p:txBody>
-          <a:bodyPr lIns="0" tIns="0" rIns="0" bIns="0" rtlCol="0" anchor="t">
-            <a:spAutoFit/>
-          </a:bodyPr>
-          <a:lstStyle/>
-          <a:p>
-            <a:pPr algn="ctr">
-              <a:lnSpc>
-                <a:spcPts val="3640"/>
-              </a:lnSpc>
-              <a:defRPr/>
-            </a:pPr>
-            <a:r>
-              <a:rPr sz="2600" b="1" lang="en-US">
-                <a:solidFill>
-                  <a:srgbClr val="000000"/>
-                </a:solidFill>
-                <a:latin typeface="Rubik Bold"/>
-              </a:rPr>
-              <a:t>Authy</a:t>
-            </a:r>
-            <a:endParaRPr/>
-          </a:p>
-        </p:txBody>
-      </p:sp>
+        </p:grpSpPr>
+        <p:sp>
+          <p:nvSpPr>
+            <p:cNvPr id="235134932" name="Freeform 2"/>
+            <p:cNvSpPr/>
+            <p:nvPr/>
+          </p:nvSpPr>
+          <p:spPr bwMode="auto">
+            <a:xfrm rot="0" flipH="0" flipV="0">
+              <a:off x="0" y="0"/>
+              <a:ext cx="2558452" cy="2558452"/>
+            </a:xfrm>
+            <a:custGeom>
+              <a:avLst/>
+              <a:gdLst/>
+              <a:ahLst/>
+              <a:cxnLst/>
+              <a:rect l="l" t="t" r="r" b="b"/>
+              <a:pathLst>
+                <a:path w="2558453" h="2558453" fill="norm" stroke="1" extrusionOk="0">
+                  <a:moveTo>
+                    <a:pt x="0" y="0"/>
+                  </a:moveTo>
+                  <a:lnTo>
+                    <a:pt x="2558452" y="0"/>
+                  </a:lnTo>
+                  <a:lnTo>
+                    <a:pt x="2558452" y="2558453"/>
+                  </a:lnTo>
+                  <a:lnTo>
+                    <a:pt x="0" y="2558453"/>
+                  </a:lnTo>
+                  <a:lnTo>
+                    <a:pt x="0" y="0"/>
+                  </a:lnTo>
+                  <a:close/>
+                </a:path>
+              </a:pathLst>
+            </a:custGeom>
+            <a:blipFill>
+              <a:blip r:embed="rId3"/>
+              <a:srcRect l="0" t="0" r="0" b="0"/>
+              <a:stretch/>
+            </a:blipFill>
+          </p:spPr>
+        </p:sp>
+        <p:sp>
+          <p:nvSpPr>
+            <p:cNvPr id="621507205" name="Freeform 3"/>
+            <p:cNvSpPr/>
+            <p:nvPr/>
+          </p:nvSpPr>
+          <p:spPr bwMode="auto">
+            <a:xfrm rot="0" flipH="0" flipV="0">
+              <a:off x="4291051" y="104467"/>
+              <a:ext cx="2349516" cy="2349516"/>
+            </a:xfrm>
+            <a:custGeom>
+              <a:avLst/>
+              <a:gdLst/>
+              <a:ahLst/>
+              <a:cxnLst/>
+              <a:rect l="l" t="t" r="r" b="b"/>
+              <a:pathLst>
+                <a:path w="2349516" h="2349516" fill="norm" stroke="1" extrusionOk="0">
+                  <a:moveTo>
+                    <a:pt x="0" y="0"/>
+                  </a:moveTo>
+                  <a:lnTo>
+                    <a:pt x="2349516" y="0"/>
+                  </a:lnTo>
+                  <a:lnTo>
+                    <a:pt x="2349516" y="2349517"/>
+                  </a:lnTo>
+                  <a:lnTo>
+                    <a:pt x="0" y="2349517"/>
+                  </a:lnTo>
+                  <a:lnTo>
+                    <a:pt x="0" y="0"/>
+                  </a:lnTo>
+                  <a:close/>
+                </a:path>
+              </a:pathLst>
+            </a:custGeom>
+            <a:blipFill>
+              <a:blip r:embed="rId4"/>
+              <a:srcRect l="0" t="0" r="0" b="0"/>
+              <a:stretch/>
+            </a:blipFill>
+          </p:spPr>
+        </p:sp>
+        <p:sp>
+          <p:nvSpPr>
+            <p:cNvPr id="1352422494" name="TextBox 4"/>
+            <p:cNvSpPr txBox="1"/>
+            <p:nvPr/>
+          </p:nvSpPr>
+          <p:spPr bwMode="auto">
+            <a:xfrm rot="0">
+              <a:off x="378643" y="2837901"/>
+              <a:ext cx="1801163" cy="448310"/>
+            </a:xfrm>
+            <a:prstGeom prst="rect">
+              <a:avLst/>
+            </a:prstGeom>
+            <a:grpFill/>
+          </p:spPr>
+          <p:txBody>
+            <a:bodyPr lIns="0" tIns="0" rIns="0" bIns="0" rtlCol="0" anchor="t">
+              <a:spAutoFit/>
+            </a:bodyPr>
+            <a:lstStyle/>
+            <a:p>
+              <a:pPr algn="ctr">
+                <a:lnSpc>
+                  <a:spcPts val="3640"/>
+                </a:lnSpc>
+                <a:defRPr/>
+              </a:pPr>
+              <a:r>
+                <a:rPr lang="en-US" sz="2600" b="1">
+                  <a:solidFill>
+                    <a:srgbClr val="000000"/>
+                  </a:solidFill>
+                  <a:latin typeface="Rubik Bold"/>
+                  <a:ea typeface="Rubik Bold"/>
+                  <a:cs typeface="Rubik Bold"/>
+                </a:rPr>
+                <a:t>andOTP</a:t>
+              </a:r>
+              <a:endParaRPr/>
+            </a:p>
+          </p:txBody>
+        </p:sp>
+        <p:sp>
+          <p:nvSpPr>
+            <p:cNvPr id="454210958" name="TextBox 5"/>
+            <p:cNvSpPr txBox="1"/>
+            <p:nvPr/>
+          </p:nvSpPr>
+          <p:spPr bwMode="auto">
+            <a:xfrm rot="0">
+              <a:off x="3882678" y="2837901"/>
+              <a:ext cx="3166263" cy="448310"/>
+            </a:xfrm>
+            <a:prstGeom prst="rect">
+              <a:avLst/>
+            </a:prstGeom>
+            <a:grpFill/>
+          </p:spPr>
+          <p:txBody>
+            <a:bodyPr lIns="0" tIns="0" rIns="0" bIns="0" rtlCol="0" anchor="t">
+              <a:spAutoFit/>
+            </a:bodyPr>
+            <a:lstStyle/>
+            <a:p>
+              <a:pPr algn="ctr">
+                <a:lnSpc>
+                  <a:spcPts val="3640"/>
+                </a:lnSpc>
+                <a:defRPr/>
+              </a:pPr>
+              <a:r>
+                <a:rPr lang="en-US" sz="2600" b="1">
+                  <a:solidFill>
+                    <a:srgbClr val="000000"/>
+                  </a:solidFill>
+                  <a:latin typeface="Rubik Bold"/>
+                  <a:ea typeface="Rubik Bold"/>
+                  <a:cs typeface="Rubik Bold"/>
+                </a:rPr>
+                <a:t>Authy</a:t>
+              </a:r>
+              <a:endParaRPr/>
+            </a:p>
+          </p:txBody>
+        </p:sp>
+      </p:grpSp>
     </p:spTree>
   </p:cSld>
   <p:clrMapOvr>
@@ -10106,9 +10190,7 @@
   <p:cSld name="">
     <p:bg>
       <p:bgPr shadeToTitle="0">
-        <a:solidFill>
-          <a:srgbClr val="F2F2F2"/>
-        </a:solidFill>
+        <a:noFill/>
       </p:bgPr>
     </p:bg>
     <p:spTree>
@@ -10127,7 +10209,7 @@
       </p:grpSpPr>
       <p:sp>
         <p:nvSpPr>
-          <p:cNvPr id="1843396435" name="Freeform 3"/>
+          <p:cNvPr id="1158382999" name="Freeform 3"/>
           <p:cNvSpPr/>
           <p:nvPr/>
         </p:nvSpPr>
@@ -10222,13 +10304,13 @@
       </p:sp>
       <p:sp>
         <p:nvSpPr>
-          <p:cNvPr id="1021780123" name="TextBox 4"/>
+          <p:cNvPr id="1513866847" name="TextBox 4"/>
           <p:cNvSpPr txBox="1"/>
           <p:nvPr/>
         </p:nvSpPr>
         <p:spPr bwMode="auto">
           <a:xfrm rot="0" flipH="0" flipV="0">
-            <a:off x="5734963" y="2951482"/>
+            <a:off x="5734962" y="2951482"/>
             <a:ext cx="5937588" cy="955030"/>
           </a:xfrm>
           <a:prstGeom prst="rect">
@@ -10264,7 +10346,7 @@
       </p:sp>
       <p:sp>
         <p:nvSpPr>
-          <p:cNvPr id="1933317765" name="AutoShape 5"/>
+          <p:cNvPr id="650431581" name="AutoShape 5"/>
           <p:cNvSpPr/>
           <p:nvPr/>
         </p:nvSpPr>
@@ -10292,7 +10374,7 @@
       </p:sp>
       <p:sp>
         <p:nvSpPr>
-          <p:cNvPr id="190664071" name="AutoShape 6"/>
+          <p:cNvPr id="1113514388" name="AutoShape 6"/>
           <p:cNvSpPr/>
           <p:nvPr/>
         </p:nvSpPr>
@@ -10320,7 +10402,7 @@
       </p:sp>
       <p:sp>
         <p:nvSpPr>
-          <p:cNvPr id="1841452301" name="AutoShape 7"/>
+          <p:cNvPr id="1502927862" name="AutoShape 7"/>
           <p:cNvSpPr/>
           <p:nvPr/>
         </p:nvSpPr>
@@ -10348,7 +10430,7 @@
       </p:sp>
       <p:sp>
         <p:nvSpPr>
-          <p:cNvPr id="1386990768" name="AutoShape 8"/>
+          <p:cNvPr id="219639185" name="AutoShape 8"/>
           <p:cNvSpPr/>
           <p:nvPr/>
         </p:nvSpPr>
@@ -10376,7 +10458,7 @@
       </p:sp>
       <p:sp>
         <p:nvSpPr>
-          <p:cNvPr id="1444960263" name="AutoShape 9"/>
+          <p:cNvPr id="2079244811" name="AutoShape 9"/>
           <p:cNvSpPr/>
           <p:nvPr/>
         </p:nvSpPr>
@@ -10404,7 +10486,7 @@
       </p:sp>
       <p:sp>
         <p:nvSpPr>
-          <p:cNvPr id="1176869678" name="Freeform 10"/>
+          <p:cNvPr id="201754402" name="Freeform 10"/>
           <p:cNvSpPr/>
           <p:nvPr/>
         </p:nvSpPr>
@@ -10453,7 +10535,7 @@
       </p:sp>
       <p:sp>
         <p:nvSpPr>
-          <p:cNvPr id="708251426" name="Freeform 11"/>
+          <p:cNvPr id="1997320546" name="Freeform 11"/>
           <p:cNvSpPr/>
           <p:nvPr/>
         </p:nvSpPr>
@@ -10502,7 +10584,7 @@
       </p:sp>
       <p:sp>
         <p:nvSpPr>
-          <p:cNvPr id="248256091" name="Freeform 12"/>
+          <p:cNvPr id="1141661342" name="Freeform 12"/>
           <p:cNvSpPr/>
           <p:nvPr/>
         </p:nvSpPr>
@@ -10570,9 +10652,7 @@
   <p:cSld name="">
     <p:bg>
       <p:bgPr shadeToTitle="0">
-        <a:solidFill>
-          <a:srgbClr val="F2F2F2"/>
-        </a:solidFill>
+        <a:noFill/>
       </p:bgPr>
     </p:bg>
     <p:spTree>
@@ -10591,7 +10671,7 @@
       </p:grpSpPr>
       <p:sp>
         <p:nvSpPr>
-          <p:cNvPr id="719580110" name="Freeform 2"/>
+          <p:cNvPr id="78835888" name="Freeform 2"/>
           <p:cNvSpPr/>
           <p:nvPr/>
         </p:nvSpPr>
@@ -10640,7 +10720,7 @@
       </p:sp>
       <p:sp>
         <p:nvSpPr>
-          <p:cNvPr id="1996595455" name="Freeform 3"/>
+          <p:cNvPr id="659447415" name="Freeform 3"/>
           <p:cNvSpPr/>
           <p:nvPr/>
         </p:nvSpPr>
@@ -10689,7 +10769,7 @@
       </p:sp>
       <p:sp>
         <p:nvSpPr>
-          <p:cNvPr id="1293843530" name="Freeform 4"/>
+          <p:cNvPr id="1808171029" name="Freeform 4"/>
           <p:cNvSpPr/>
           <p:nvPr/>
         </p:nvSpPr>
@@ -10757,9 +10837,7 @@
   <p:cSld name="">
     <p:bg>
       <p:bgPr shadeToTitle="0">
-        <a:solidFill>
-          <a:srgbClr val="F2F2F2"/>
-        </a:solidFill>
+        <a:noFill/>
       </p:bgPr>
     </p:bg>
     <p:spTree>
@@ -10778,7 +10856,7 @@
       </p:grpSpPr>
       <p:sp>
         <p:nvSpPr>
-          <p:cNvPr id="589097330" name="Freeform 2"/>
+          <p:cNvPr id="1681693362" name="Freeform 2"/>
           <p:cNvSpPr/>
           <p:nvPr/>
         </p:nvSpPr>
@@ -10827,7 +10905,7 @@
       </p:sp>
       <p:sp>
         <p:nvSpPr>
-          <p:cNvPr id="1791634752" name="Freeform 6"/>
+          <p:cNvPr id="989218548" name="Freeform 6"/>
           <p:cNvSpPr/>
           <p:nvPr/>
         </p:nvSpPr>
@@ -10876,7 +10954,7 @@
       </p:sp>
       <p:sp>
         <p:nvSpPr>
-          <p:cNvPr id="1964330877" name="Freeform 7"/>
+          <p:cNvPr id="1956713691" name="Freeform 7"/>
           <p:cNvSpPr/>
           <p:nvPr/>
         </p:nvSpPr>
@@ -10944,9 +11022,7 @@
   <p:cSld name="">
     <p:bg>
       <p:bgPr shadeToTitle="0">
-        <a:solidFill>
-          <a:srgbClr val="F2F2F2"/>
-        </a:solidFill>
+        <a:noFill/>
       </p:bgPr>
     </p:bg>
     <p:spTree>
@@ -10963,362 +11039,373 @@
           <a:chExt cx="0" cy="0"/>
         </a:xfrm>
       </p:grpSpPr>
-      <p:sp>
-        <p:nvSpPr>
-          <p:cNvPr id="761139829" name="Freeform 2"/>
-          <p:cNvSpPr/>
+      <p:grpSp>
+        <p:nvGrpSpPr>
+          <p:cNvPr id="1763140630" name=""/>
+          <p:cNvGrpSpPr/>
           <p:nvPr/>
-        </p:nvSpPr>
-        <p:spPr bwMode="auto">
-          <a:xfrm rot="0" flipH="0" flipV="0">
-            <a:off x="3930715" y="2151162"/>
-            <a:ext cx="1854142" cy="1854142"/>
+        </p:nvGrpSpPr>
+        <p:grpSpPr bwMode="auto">
+          <a:xfrm>
+            <a:off x="1124073" y="2151162"/>
+            <a:ext cx="9943853" cy="2570003"/>
+            <a:chOff x="0" y="0"/>
+            <a:chExt cx="9943853" cy="2570003"/>
           </a:xfrm>
-          <a:custGeom>
-            <a:avLst/>
-            <a:gdLst/>
-            <a:ahLst/>
-            <a:cxnLst/>
-            <a:rect l="l" t="t" r="r" b="b"/>
-            <a:pathLst>
-              <a:path w="1854142" h="1854142" fill="norm" stroke="1" extrusionOk="0">
-                <a:moveTo>
-                  <a:pt x="0" y="0"/>
-                </a:moveTo>
-                <a:lnTo>
-                  <a:pt x="1854142" y="0"/>
-                </a:lnTo>
-                <a:lnTo>
-                  <a:pt x="1854142" y="1854142"/>
-                </a:lnTo>
-                <a:lnTo>
-                  <a:pt x="0" y="1854142"/>
-                </a:lnTo>
-                <a:lnTo>
-                  <a:pt x="0" y="0"/>
-                </a:lnTo>
-                <a:close/>
-              </a:path>
-            </a:pathLst>
-          </a:custGeom>
-          <a:blipFill>
-            <a:blip r:embed="rId3"/>
-            <a:srcRect l="0" t="0" r="0" b="0"/>
-            <a:stretch/>
-          </a:blipFill>
-        </p:spPr>
-        <p:txBody>
-          <a:bodyPr/>
-          <a:p/>
-        </p:txBody>
-      </p:sp>
-      <p:sp>
-        <p:nvSpPr>
-          <p:cNvPr id="1478109113" name="Freeform 3"/>
-          <p:cNvSpPr/>
-          <p:nvPr/>
-        </p:nvSpPr>
-        <p:spPr bwMode="auto">
-          <a:xfrm rot="0" flipH="0" flipV="0">
-            <a:off x="1124073" y="2151162"/>
-            <a:ext cx="1854142" cy="1854142"/>
-          </a:xfrm>
-          <a:custGeom>
-            <a:avLst/>
-            <a:gdLst/>
-            <a:ahLst/>
-            <a:cxnLst/>
-            <a:rect l="l" t="t" r="r" b="b"/>
-            <a:pathLst>
-              <a:path w="1854142" h="1854142" fill="norm" stroke="1" extrusionOk="0">
-                <a:moveTo>
-                  <a:pt x="0" y="0"/>
-                </a:moveTo>
-                <a:lnTo>
-                  <a:pt x="1854142" y="0"/>
-                </a:lnTo>
-                <a:lnTo>
-                  <a:pt x="1854142" y="1854142"/>
-                </a:lnTo>
-                <a:lnTo>
-                  <a:pt x="0" y="1854142"/>
-                </a:lnTo>
-                <a:lnTo>
-                  <a:pt x="0" y="0"/>
-                </a:lnTo>
-                <a:close/>
-              </a:path>
-            </a:pathLst>
-          </a:custGeom>
-          <a:blipFill>
-            <a:blip r:embed="rId4"/>
-            <a:srcRect l="0" t="0" r="0" b="0"/>
-            <a:stretch/>
-          </a:blipFill>
-        </p:spPr>
-        <p:txBody>
-          <a:bodyPr/>
-          <a:p/>
-        </p:txBody>
-      </p:sp>
-      <p:sp>
-        <p:nvSpPr>
-          <p:cNvPr id="591675674" name="Freeform 4"/>
-          <p:cNvSpPr/>
-          <p:nvPr/>
-        </p:nvSpPr>
-        <p:spPr bwMode="auto">
-          <a:xfrm rot="0" flipH="0" flipV="0">
-            <a:off x="9275130" y="2151162"/>
-            <a:ext cx="1784430" cy="1854142"/>
-          </a:xfrm>
-          <a:custGeom>
-            <a:avLst/>
-            <a:gdLst/>
-            <a:ahLst/>
-            <a:cxnLst/>
-            <a:rect l="l" t="t" r="r" b="b"/>
-            <a:pathLst>
-              <a:path w="1784430" h="1854142" fill="norm" stroke="1" extrusionOk="0">
-                <a:moveTo>
-                  <a:pt x="0" y="0"/>
-                </a:moveTo>
-                <a:lnTo>
-                  <a:pt x="1784431" y="0"/>
-                </a:lnTo>
-                <a:lnTo>
-                  <a:pt x="1784431" y="1854142"/>
-                </a:lnTo>
-                <a:lnTo>
-                  <a:pt x="0" y="1854142"/>
-                </a:lnTo>
-                <a:lnTo>
-                  <a:pt x="0" y="0"/>
-                </a:lnTo>
-                <a:close/>
-              </a:path>
-            </a:pathLst>
-          </a:custGeom>
-          <a:blipFill>
-            <a:blip r:embed="rId5"/>
-            <a:srcRect l="0" t="0" r="0" b="0"/>
-            <a:stretch/>
-          </a:blipFill>
-        </p:spPr>
-        <p:txBody>
-          <a:bodyPr/>
-          <a:p/>
-        </p:txBody>
-      </p:sp>
-      <p:sp>
-        <p:nvSpPr>
-          <p:cNvPr id="921709891" name="Freeform 5"/>
-          <p:cNvSpPr/>
-          <p:nvPr/>
-        </p:nvSpPr>
-        <p:spPr bwMode="auto">
-          <a:xfrm rot="0" flipH="0" flipV="0">
-            <a:off x="6733013" y="2151162"/>
-            <a:ext cx="1589938" cy="1854142"/>
-          </a:xfrm>
-          <a:custGeom>
-            <a:avLst/>
-            <a:gdLst/>
-            <a:ahLst/>
-            <a:cxnLst/>
-            <a:rect l="l" t="t" r="r" b="b"/>
-            <a:pathLst>
-              <a:path w="1589938" h="1854142" fill="norm" stroke="1" extrusionOk="0">
-                <a:moveTo>
-                  <a:pt x="0" y="0"/>
-                </a:moveTo>
-                <a:lnTo>
-                  <a:pt x="1589938" y="0"/>
-                </a:lnTo>
-                <a:lnTo>
-                  <a:pt x="1589938" y="1854142"/>
-                </a:lnTo>
-                <a:lnTo>
-                  <a:pt x="0" y="1854142"/>
-                </a:lnTo>
-                <a:lnTo>
-                  <a:pt x="0" y="0"/>
-                </a:lnTo>
-                <a:close/>
-              </a:path>
-            </a:pathLst>
-          </a:custGeom>
-          <a:blipFill>
-            <a:blip r:embed="rId6"/>
-            <a:srcRect l="0" t="0" r="0" b="0"/>
-            <a:stretch/>
-          </a:blipFill>
-        </p:spPr>
-        <p:txBody>
-          <a:bodyPr/>
-          <a:p/>
-        </p:txBody>
-      </p:sp>
-      <p:sp>
-        <p:nvSpPr>
-          <p:cNvPr id="1706665957" name="TextBox 6"/>
-          <p:cNvSpPr txBox="1"/>
-          <p:nvPr/>
-        </p:nvSpPr>
-        <p:spPr bwMode="auto">
-          <a:xfrm rot="0">
-            <a:off x="1150562" y="4258528"/>
-            <a:ext cx="1801163" cy="448310"/>
-          </a:xfrm>
-          <a:prstGeom prst="rect">
-            <a:avLst/>
-          </a:prstGeom>
-        </p:spPr>
-        <p:txBody>
-          <a:bodyPr lIns="0" tIns="0" rIns="0" bIns="0" rtlCol="0" anchor="t">
-            <a:spAutoFit/>
-          </a:bodyPr>
-          <a:lstStyle/>
-          <a:p>
-            <a:pPr algn="ctr">
-              <a:lnSpc>
-                <a:spcPts val="3640"/>
-              </a:lnSpc>
-              <a:defRPr/>
-            </a:pPr>
-            <a:r>
-              <a:rPr sz="2600" b="1" lang="en-US">
-                <a:solidFill>
-                  <a:srgbClr val="000000"/>
-                </a:solidFill>
-                <a:latin typeface="Rubik Bold"/>
-              </a:rPr>
-              <a:t>Cromo</a:t>
-            </a:r>
-            <a:endParaRPr/>
-          </a:p>
-        </p:txBody>
-      </p:sp>
-      <p:sp>
-        <p:nvSpPr>
-          <p:cNvPr id="1932720680" name="TextBox 7"/>
-          <p:cNvSpPr txBox="1"/>
-          <p:nvPr/>
-        </p:nvSpPr>
-        <p:spPr bwMode="auto">
-          <a:xfrm rot="0">
-            <a:off x="3957204" y="4258528"/>
-            <a:ext cx="1801163" cy="448310"/>
-          </a:xfrm>
-          <a:prstGeom prst="rect">
-            <a:avLst/>
-          </a:prstGeom>
-        </p:spPr>
-        <p:txBody>
-          <a:bodyPr lIns="0" tIns="0" rIns="0" bIns="0" rtlCol="0" anchor="t">
-            <a:spAutoFit/>
-          </a:bodyPr>
-          <a:lstStyle/>
-          <a:p>
-            <a:pPr algn="ctr">
-              <a:lnSpc>
-                <a:spcPts val="3640"/>
-              </a:lnSpc>
-              <a:defRPr/>
-            </a:pPr>
-            <a:r>
-              <a:rPr sz="2600" b="1" lang="en-US">
-                <a:solidFill>
-                  <a:srgbClr val="000000"/>
-                </a:solidFill>
-                <a:latin typeface="Rubik Bold"/>
-              </a:rPr>
-              <a:t>Cromo</a:t>
-            </a:r>
-            <a:endParaRPr/>
-          </a:p>
-        </p:txBody>
-      </p:sp>
-      <p:sp>
-        <p:nvSpPr>
-          <p:cNvPr id="461353742" name="TextBox 8"/>
-          <p:cNvSpPr txBox="1"/>
-          <p:nvPr/>
-        </p:nvSpPr>
-        <p:spPr bwMode="auto">
-          <a:xfrm rot="0">
-            <a:off x="6627400" y="4258528"/>
-            <a:ext cx="1801163" cy="448310"/>
-          </a:xfrm>
-          <a:prstGeom prst="rect">
-            <a:avLst/>
-          </a:prstGeom>
-        </p:spPr>
-        <p:txBody>
-          <a:bodyPr lIns="0" tIns="0" rIns="0" bIns="0" rtlCol="0" anchor="t">
-            <a:spAutoFit/>
-          </a:bodyPr>
-          <a:lstStyle/>
-          <a:p>
-            <a:pPr algn="ctr">
-              <a:lnSpc>
-                <a:spcPts val="3640"/>
-              </a:lnSpc>
-              <a:defRPr/>
-            </a:pPr>
-            <a:r>
-              <a:rPr sz="2600" b="1" lang="en-US">
-                <a:solidFill>
-                  <a:srgbClr val="000000"/>
-                </a:solidFill>
-                <a:latin typeface="Rubik Bold"/>
-              </a:rPr>
-              <a:t>Valiente</a:t>
-            </a:r>
-            <a:endParaRPr/>
-          </a:p>
-        </p:txBody>
-      </p:sp>
-      <p:sp>
-        <p:nvSpPr>
-          <p:cNvPr id="1752176915" name="TextBox 9"/>
-          <p:cNvSpPr txBox="1"/>
-          <p:nvPr/>
-        </p:nvSpPr>
-        <p:spPr bwMode="auto">
-          <a:xfrm rot="0">
-            <a:off x="9266764" y="4258528"/>
-            <a:ext cx="1801163" cy="448310"/>
-          </a:xfrm>
-          <a:prstGeom prst="rect">
-            <a:avLst/>
-          </a:prstGeom>
-        </p:spPr>
-        <p:txBody>
-          <a:bodyPr lIns="0" tIns="0" rIns="0" bIns="0" rtlCol="0" anchor="t">
-            <a:spAutoFit/>
-          </a:bodyPr>
-          <a:lstStyle/>
-          <a:p>
-            <a:pPr algn="ctr">
-              <a:lnSpc>
-                <a:spcPts val="3640"/>
-              </a:lnSpc>
-              <a:defRPr/>
-            </a:pPr>
-            <a:r>
-              <a:rPr sz="2600" b="1" lang="en-US">
-                <a:solidFill>
-                  <a:srgbClr val="000000"/>
-                </a:solidFill>
-                <a:latin typeface="Rubik Bold"/>
-              </a:rPr>
-              <a:t>Firefox</a:t>
-            </a:r>
-            <a:endParaRPr/>
-          </a:p>
-        </p:txBody>
-      </p:sp>
+        </p:grpSpPr>
+        <p:sp>
+          <p:nvSpPr>
+            <p:cNvPr id="1843659458" name="Freeform 2"/>
+            <p:cNvSpPr/>
+            <p:nvPr/>
+          </p:nvSpPr>
+          <p:spPr bwMode="auto">
+            <a:xfrm rot="0" flipH="0" flipV="0">
+              <a:off x="2806641" y="0"/>
+              <a:ext cx="1854142" cy="1854142"/>
+            </a:xfrm>
+            <a:custGeom>
+              <a:avLst/>
+              <a:gdLst/>
+              <a:ahLst/>
+              <a:cxnLst/>
+              <a:rect l="l" t="t" r="r" b="b"/>
+              <a:pathLst>
+                <a:path w="1854142" h="1854142" fill="norm" stroke="1" extrusionOk="0">
+                  <a:moveTo>
+                    <a:pt x="0" y="0"/>
+                  </a:moveTo>
+                  <a:lnTo>
+                    <a:pt x="1854142" y="0"/>
+                  </a:lnTo>
+                  <a:lnTo>
+                    <a:pt x="1854142" y="1854142"/>
+                  </a:lnTo>
+                  <a:lnTo>
+                    <a:pt x="0" y="1854142"/>
+                  </a:lnTo>
+                  <a:lnTo>
+                    <a:pt x="0" y="0"/>
+                  </a:lnTo>
+                  <a:close/>
+                </a:path>
+              </a:pathLst>
+            </a:custGeom>
+            <a:blipFill>
+              <a:blip r:embed="rId3"/>
+              <a:srcRect l="0" t="0" r="0" b="0"/>
+              <a:stretch/>
+            </a:blipFill>
+          </p:spPr>
+        </p:sp>
+        <p:sp>
+          <p:nvSpPr>
+            <p:cNvPr id="1264899863" name="Freeform 3"/>
+            <p:cNvSpPr/>
+            <p:nvPr/>
+          </p:nvSpPr>
+          <p:spPr bwMode="auto">
+            <a:xfrm rot="0" flipH="0" flipV="0">
+              <a:off x="0" y="0"/>
+              <a:ext cx="1854142" cy="1854142"/>
+            </a:xfrm>
+            <a:custGeom>
+              <a:avLst/>
+              <a:gdLst/>
+              <a:ahLst/>
+              <a:cxnLst/>
+              <a:rect l="l" t="t" r="r" b="b"/>
+              <a:pathLst>
+                <a:path w="1854142" h="1854142" fill="norm" stroke="1" extrusionOk="0">
+                  <a:moveTo>
+                    <a:pt x="0" y="0"/>
+                  </a:moveTo>
+                  <a:lnTo>
+                    <a:pt x="1854142" y="0"/>
+                  </a:lnTo>
+                  <a:lnTo>
+                    <a:pt x="1854142" y="1854142"/>
+                  </a:lnTo>
+                  <a:lnTo>
+                    <a:pt x="0" y="1854142"/>
+                  </a:lnTo>
+                  <a:lnTo>
+                    <a:pt x="0" y="0"/>
+                  </a:lnTo>
+                  <a:close/>
+                </a:path>
+              </a:pathLst>
+            </a:custGeom>
+            <a:blipFill>
+              <a:blip r:embed="rId4"/>
+              <a:srcRect l="0" t="0" r="0" b="0"/>
+              <a:stretch/>
+            </a:blipFill>
+          </p:spPr>
+        </p:sp>
+        <p:sp>
+          <p:nvSpPr>
+            <p:cNvPr id="1440455589" name="Freeform 4"/>
+            <p:cNvSpPr/>
+            <p:nvPr/>
+          </p:nvSpPr>
+          <p:spPr bwMode="auto">
+            <a:xfrm rot="0" flipH="0" flipV="0">
+              <a:off x="8151056" y="0"/>
+              <a:ext cx="1784430" cy="1854142"/>
+            </a:xfrm>
+            <a:custGeom>
+              <a:avLst/>
+              <a:gdLst/>
+              <a:ahLst/>
+              <a:cxnLst/>
+              <a:rect l="l" t="t" r="r" b="b"/>
+              <a:pathLst>
+                <a:path w="1784430" h="1854142" fill="norm" stroke="1" extrusionOk="0">
+                  <a:moveTo>
+                    <a:pt x="0" y="0"/>
+                  </a:moveTo>
+                  <a:lnTo>
+                    <a:pt x="1784431" y="0"/>
+                  </a:lnTo>
+                  <a:lnTo>
+                    <a:pt x="1784431" y="1854142"/>
+                  </a:lnTo>
+                  <a:lnTo>
+                    <a:pt x="0" y="1854142"/>
+                  </a:lnTo>
+                  <a:lnTo>
+                    <a:pt x="0" y="0"/>
+                  </a:lnTo>
+                  <a:close/>
+                </a:path>
+              </a:pathLst>
+            </a:custGeom>
+            <a:blipFill>
+              <a:blip r:embed="rId5"/>
+              <a:srcRect l="0" t="0" r="0" b="0"/>
+              <a:stretch/>
+            </a:blipFill>
+          </p:spPr>
+        </p:sp>
+        <p:sp>
+          <p:nvSpPr>
+            <p:cNvPr id="1129137717" name="Freeform 5"/>
+            <p:cNvSpPr/>
+            <p:nvPr/>
+          </p:nvSpPr>
+          <p:spPr bwMode="auto">
+            <a:xfrm rot="0" flipH="0" flipV="0">
+              <a:off x="5608939" y="0"/>
+              <a:ext cx="1589938" cy="1854142"/>
+            </a:xfrm>
+            <a:custGeom>
+              <a:avLst/>
+              <a:gdLst/>
+              <a:ahLst/>
+              <a:cxnLst/>
+              <a:rect l="l" t="t" r="r" b="b"/>
+              <a:pathLst>
+                <a:path w="1589938" h="1854142" fill="norm" stroke="1" extrusionOk="0">
+                  <a:moveTo>
+                    <a:pt x="0" y="0"/>
+                  </a:moveTo>
+                  <a:lnTo>
+                    <a:pt x="1589938" y="0"/>
+                  </a:lnTo>
+                  <a:lnTo>
+                    <a:pt x="1589938" y="1854142"/>
+                  </a:lnTo>
+                  <a:lnTo>
+                    <a:pt x="0" y="1854142"/>
+                  </a:lnTo>
+                  <a:lnTo>
+                    <a:pt x="0" y="0"/>
+                  </a:lnTo>
+                  <a:close/>
+                </a:path>
+              </a:pathLst>
+            </a:custGeom>
+            <a:blipFill>
+              <a:blip r:embed="rId6"/>
+              <a:srcRect l="0" t="0" r="0" b="0"/>
+              <a:stretch/>
+            </a:blipFill>
+          </p:spPr>
+        </p:sp>
+        <p:sp>
+          <p:nvSpPr>
+            <p:cNvPr id="580112003" name="TextBox 6"/>
+            <p:cNvSpPr txBox="1"/>
+            <p:nvPr/>
+          </p:nvSpPr>
+          <p:spPr bwMode="auto">
+            <a:xfrm rot="0">
+              <a:off x="26488" y="2107365"/>
+              <a:ext cx="1801163" cy="448310"/>
+            </a:xfrm>
+            <a:prstGeom prst="rect">
+              <a:avLst/>
+            </a:prstGeom>
+            <a:grpFill/>
+          </p:spPr>
+          <p:txBody>
+            <a:bodyPr lIns="0" tIns="0" rIns="0" bIns="0" rtlCol="0" anchor="t">
+              <a:spAutoFit/>
+            </a:bodyPr>
+            <a:lstStyle/>
+            <a:p>
+              <a:pPr algn="ctr">
+                <a:lnSpc>
+                  <a:spcPts val="3640"/>
+                </a:lnSpc>
+                <a:defRPr/>
+              </a:pPr>
+              <a:r>
+                <a:rPr lang="en-US" sz="2600" b="1">
+                  <a:solidFill>
+                    <a:srgbClr val="000000"/>
+                  </a:solidFill>
+                  <a:latin typeface="Rubik Bold"/>
+                  <a:ea typeface="Rubik Bold"/>
+                  <a:cs typeface="Rubik Bold"/>
+                </a:rPr>
+                <a:t>Chrome</a:t>
+              </a:r>
+              <a:endParaRPr/>
+            </a:p>
+          </p:txBody>
+        </p:sp>
+        <p:sp>
+          <p:nvSpPr>
+            <p:cNvPr id="856748786" name="TextBox 7"/>
+            <p:cNvSpPr txBox="1"/>
+            <p:nvPr/>
+          </p:nvSpPr>
+          <p:spPr bwMode="auto">
+            <a:xfrm rot="0">
+              <a:off x="2833130" y="2107365"/>
+              <a:ext cx="1801163" cy="448310"/>
+            </a:xfrm>
+            <a:prstGeom prst="rect">
+              <a:avLst/>
+            </a:prstGeom>
+            <a:grpFill/>
+          </p:spPr>
+          <p:txBody>
+            <a:bodyPr lIns="0" tIns="0" rIns="0" bIns="0" rtlCol="0" anchor="t">
+              <a:spAutoFit/>
+            </a:bodyPr>
+            <a:lstStyle/>
+            <a:p>
+              <a:pPr algn="ctr">
+                <a:lnSpc>
+                  <a:spcPts val="3640"/>
+                </a:lnSpc>
+                <a:defRPr/>
+              </a:pPr>
+              <a:r>
+                <a:rPr lang="en-US" sz="2600" b="1">
+                  <a:solidFill>
+                    <a:srgbClr val="000000"/>
+                  </a:solidFill>
+                  <a:latin typeface="Rubik Bold"/>
+                  <a:ea typeface="Rubik Bold"/>
+                  <a:cs typeface="Rubik Bold"/>
+                </a:rPr>
+                <a:t>Chromium</a:t>
+              </a:r>
+              <a:endParaRPr/>
+            </a:p>
+          </p:txBody>
+        </p:sp>
+        <p:sp>
+          <p:nvSpPr>
+            <p:cNvPr id="1626460172" name="TextBox 8"/>
+            <p:cNvSpPr txBox="1"/>
+            <p:nvPr/>
+          </p:nvSpPr>
+          <p:spPr bwMode="auto">
+            <a:xfrm rot="0" flipH="0" flipV="0">
+              <a:off x="5206607" y="2107364"/>
+              <a:ext cx="2624424" cy="462639"/>
+            </a:xfrm>
+            <a:prstGeom prst="rect">
+              <a:avLst/>
+            </a:prstGeom>
+            <a:grpFill/>
+          </p:spPr>
+          <p:txBody>
+            <a:bodyPr lIns="0" tIns="0" rIns="0" bIns="0" rtlCol="0" anchor="t">
+              <a:spAutoFit/>
+            </a:bodyPr>
+            <a:lstStyle/>
+            <a:p>
+              <a:pPr algn="ctr">
+                <a:lnSpc>
+                  <a:spcPts val="3640"/>
+                </a:lnSpc>
+                <a:defRPr/>
+              </a:pPr>
+              <a:r>
+                <a:rPr lang="en-US" sz="2600" b="1">
+                  <a:solidFill>
+                    <a:srgbClr val="000000"/>
+                  </a:solidFill>
+                  <a:latin typeface="Rubik Bold"/>
+                  <a:ea typeface="Rubik Bold"/>
+                  <a:cs typeface="Rubik Bold"/>
+                </a:rPr>
+                <a:t>Brave</a:t>
+              </a:r>
+              <a:endParaRPr/>
+            </a:p>
+          </p:txBody>
+        </p:sp>
+        <p:sp>
+          <p:nvSpPr>
+            <p:cNvPr id="1311629489" name="TextBox 9"/>
+            <p:cNvSpPr txBox="1"/>
+            <p:nvPr/>
+          </p:nvSpPr>
+          <p:spPr bwMode="auto">
+            <a:xfrm rot="0">
+              <a:off x="8142690" y="2107365"/>
+              <a:ext cx="1801163" cy="448310"/>
+            </a:xfrm>
+            <a:prstGeom prst="rect">
+              <a:avLst/>
+            </a:prstGeom>
+            <a:grpFill/>
+          </p:spPr>
+          <p:txBody>
+            <a:bodyPr lIns="0" tIns="0" rIns="0" bIns="0" rtlCol="0" anchor="t">
+              <a:spAutoFit/>
+            </a:bodyPr>
+            <a:lstStyle/>
+            <a:p>
+              <a:pPr algn="ctr">
+                <a:lnSpc>
+                  <a:spcPts val="3640"/>
+                </a:lnSpc>
+                <a:defRPr/>
+              </a:pPr>
+              <a:r>
+                <a:rPr lang="en-US" sz="2600" b="1">
+                  <a:solidFill>
+                    <a:srgbClr val="000000"/>
+                  </a:solidFill>
+                  <a:latin typeface="Rubik Bold"/>
+                  <a:ea typeface="Rubik Bold"/>
+                  <a:cs typeface="Rubik Bold"/>
+                </a:rPr>
+                <a:t>Firefox</a:t>
+              </a:r>
+              <a:endParaRPr/>
+            </a:p>
+          </p:txBody>
+        </p:sp>
+      </p:grpSp>
     </p:spTree>
   </p:cSld>
   <p:clrMapOvr>
@@ -11340,9 +11427,7 @@
   <p:cSld name="">
     <p:bg>
       <p:bgPr shadeToTitle="0">
-        <a:solidFill>
-          <a:srgbClr val="F2F2F2"/>
-        </a:solidFill>
+        <a:noFill/>
       </p:bgPr>
     </p:bg>
     <p:spTree>
@@ -11361,56 +11446,7 @@
       </p:grpSpPr>
       <p:sp>
         <p:nvSpPr>
-          <p:cNvPr id="240012845" name="Freeform 2"/>
-          <p:cNvSpPr/>
-          <p:nvPr/>
-        </p:nvSpPr>
-        <p:spPr bwMode="auto">
-          <a:xfrm rot="0" flipH="0" flipV="0">
-            <a:off x="1115693" y="2148627"/>
-            <a:ext cx="1854142" cy="1854142"/>
-          </a:xfrm>
-          <a:custGeom>
-            <a:avLst/>
-            <a:gdLst/>
-            <a:ahLst/>
-            <a:cxnLst/>
-            <a:rect l="l" t="t" r="r" b="b"/>
-            <a:pathLst>
-              <a:path w="1854142" h="1854142" fill="norm" stroke="1" extrusionOk="0">
-                <a:moveTo>
-                  <a:pt x="0" y="0"/>
-                </a:moveTo>
-                <a:lnTo>
-                  <a:pt x="1854142" y="0"/>
-                </a:lnTo>
-                <a:lnTo>
-                  <a:pt x="1854142" y="1854142"/>
-                </a:lnTo>
-                <a:lnTo>
-                  <a:pt x="0" y="1854142"/>
-                </a:lnTo>
-                <a:lnTo>
-                  <a:pt x="0" y="0"/>
-                </a:lnTo>
-                <a:close/>
-              </a:path>
-            </a:pathLst>
-          </a:custGeom>
-          <a:blipFill>
-            <a:blip r:embed="rId3"/>
-            <a:srcRect l="0" t="0" r="0" b="0"/>
-            <a:stretch/>
-          </a:blipFill>
-        </p:spPr>
-        <p:txBody>
-          <a:bodyPr/>
-          <a:p/>
-        </p:txBody>
-      </p:sp>
-      <p:sp>
-        <p:nvSpPr>
-          <p:cNvPr id="513928287" name="Freeform 3"/>
+          <p:cNvPr id="2061802541" name="Freeform 3"/>
           <p:cNvSpPr/>
           <p:nvPr/>
         </p:nvSpPr>
@@ -11447,7 +11483,7 @@
             </a:pathLst>
           </a:custGeom>
           <a:blipFill>
-            <a:blip r:embed="rId4"/>
+            <a:blip r:embed="rId3"/>
             <a:srcRect l="0" t="0" r="0" b="0"/>
             <a:stretch/>
           </a:blipFill>
@@ -11459,7 +11495,7 @@
       </p:sp>
       <p:sp>
         <p:nvSpPr>
-          <p:cNvPr id="658024653" name="Freeform 7"/>
+          <p:cNvPr id="1997009551" name="Freeform 7"/>
           <p:cNvSpPr/>
           <p:nvPr/>
         </p:nvSpPr>
@@ -11496,7 +11532,7 @@
             </a:pathLst>
           </a:custGeom>
           <a:blipFill>
-            <a:blip r:embed="rId5"/>
+            <a:blip r:embed="rId4"/>
             <a:srcRect l="0" t="0" r="0" b="0"/>
             <a:stretch/>
           </a:blipFill>
@@ -11506,46 +11542,109 @@
           <a:p/>
         </p:txBody>
       </p:sp>
-      <p:sp>
-        <p:nvSpPr>
-          <p:cNvPr id="989022942" name="TextBox 8"/>
-          <p:cNvSpPr txBox="1"/>
+      <p:grpSp>
+        <p:nvGrpSpPr>
+          <p:cNvPr id="294617229" name=""/>
+          <p:cNvGrpSpPr/>
           <p:nvPr/>
-        </p:nvSpPr>
-        <p:spPr bwMode="auto">
-          <a:xfrm rot="0">
-            <a:off x="685800" y="4261063"/>
-            <a:ext cx="2713929" cy="448310"/>
+        </p:nvGrpSpPr>
+        <p:grpSpPr bwMode="auto">
+          <a:xfrm>
+            <a:off x="685800" y="2148626"/>
+            <a:ext cx="2713928" cy="2560745"/>
+            <a:chOff x="0" y="0"/>
+            <a:chExt cx="2713928" cy="2560745"/>
           </a:xfrm>
-          <a:prstGeom prst="rect">
-            <a:avLst/>
-          </a:prstGeom>
-        </p:spPr>
-        <p:txBody>
-          <a:bodyPr lIns="0" tIns="0" rIns="0" bIns="0" rtlCol="0" anchor="t">
-            <a:spAutoFit/>
-          </a:bodyPr>
-          <a:lstStyle/>
-          <a:p>
-            <a:pPr algn="ctr">
-              <a:lnSpc>
-                <a:spcPts val="3640"/>
-              </a:lnSpc>
-              <a:defRPr/>
-            </a:pPr>
-            <a:r>
-              <a:rPr sz="2600" b="1" lang="en-US">
-                <a:solidFill>
-                  <a:srgbClr val="000000"/>
-                </a:solidFill>
-                <a:latin typeface="Rubik Bold"/>
-              </a:rPr>
-              <a:t>Navegador TOR</a:t>
-            </a:r>
-            <a:endParaRPr/>
-          </a:p>
-        </p:txBody>
-      </p:sp>
+        </p:grpSpPr>
+        <p:sp>
+          <p:nvSpPr>
+            <p:cNvPr id="1262076459" name="Freeform 2"/>
+            <p:cNvSpPr/>
+            <p:nvPr/>
+          </p:nvSpPr>
+          <p:spPr bwMode="auto">
+            <a:xfrm rot="0" flipH="0" flipV="0">
+              <a:off x="429892" y="0"/>
+              <a:ext cx="1854142" cy="1854142"/>
+            </a:xfrm>
+            <a:custGeom>
+              <a:avLst/>
+              <a:gdLst/>
+              <a:ahLst/>
+              <a:cxnLst/>
+              <a:rect l="l" t="t" r="r" b="b"/>
+              <a:pathLst>
+                <a:path w="1854142" h="1854142" fill="norm" stroke="1" extrusionOk="0">
+                  <a:moveTo>
+                    <a:pt x="0" y="0"/>
+                  </a:moveTo>
+                  <a:lnTo>
+                    <a:pt x="1854142" y="0"/>
+                  </a:lnTo>
+                  <a:lnTo>
+                    <a:pt x="1854142" y="1854142"/>
+                  </a:lnTo>
+                  <a:lnTo>
+                    <a:pt x="0" y="1854142"/>
+                  </a:lnTo>
+                  <a:lnTo>
+                    <a:pt x="0" y="0"/>
+                  </a:lnTo>
+                  <a:close/>
+                </a:path>
+              </a:pathLst>
+            </a:custGeom>
+            <a:blipFill>
+              <a:blip r:embed="rId5"/>
+              <a:srcRect l="0" t="0" r="0" b="0"/>
+              <a:stretch/>
+            </a:blipFill>
+          </p:spPr>
+        </p:sp>
+        <p:sp>
+          <p:nvSpPr>
+            <p:cNvPr id="89574071" name="TextBox 8"/>
+            <p:cNvSpPr txBox="1"/>
+            <p:nvPr/>
+          </p:nvSpPr>
+          <p:spPr bwMode="auto">
+            <a:xfrm rot="0">
+              <a:off x="0" y="2112435"/>
+              <a:ext cx="2713929" cy="448310"/>
+            </a:xfrm>
+            <a:prstGeom prst="rect">
+              <a:avLst/>
+            </a:prstGeom>
+            <a:grpFill/>
+          </p:spPr>
+          <p:txBody>
+            <a:bodyPr lIns="0" tIns="0" rIns="0" bIns="0" rtlCol="0" anchor="t">
+              <a:spAutoFit/>
+            </a:bodyPr>
+            <a:lstStyle/>
+            <a:p>
+              <a:pPr algn="ctr">
+                <a:lnSpc>
+                  <a:spcPts val="3640"/>
+                </a:lnSpc>
+                <a:defRPr/>
+              </a:pPr>
+              <a:r>
+                <a:rPr lang="en-US" sz="2600" b="1">
+                  <a:solidFill>
+                    <a:srgbClr val="000000"/>
+                  </a:solidFill>
+                  <a:latin typeface="Rubik Bold"/>
+                  <a:ea typeface="Rubik Bold"/>
+                  <a:cs typeface="Rubik Bold"/>
+                </a:rPr>
+                <a:t>TOR Browser</a:t>
+              </a:r>
+              <a:endParaRPr/>
+            </a:p>
+          </p:txBody>
+        </p:sp>
+      </p:grpSp>
     </p:spTree>
   </p:cSld>
   <p:clrMapOvr>
@@ -11567,9 +11666,7 @@
   <p:cSld name="">
     <p:bg>
       <p:bgPr shadeToTitle="0">
-        <a:solidFill>
-          <a:srgbClr val="F2F2F2"/>
-        </a:solidFill>
+        <a:noFill/>
       </p:bgPr>
     </p:bg>
     <p:spTree>
@@ -11588,7 +11685,7 @@
       </p:grpSpPr>
       <p:sp>
         <p:nvSpPr>
-          <p:cNvPr id="1871185006" name=""/>
+          <p:cNvPr id="1986294153" name=""/>
           <p:cNvSpPr/>
           <p:nvPr/>
         </p:nvSpPr>
@@ -11639,7 +11736,7 @@
       </p:sp>
       <p:sp>
         <p:nvSpPr>
-          <p:cNvPr id="1021308134" name=""/>
+          <p:cNvPr id="2037631547" name=""/>
           <p:cNvSpPr/>
           <p:nvPr/>
         </p:nvSpPr>
@@ -11690,7 +11787,7 @@
       </p:sp>
       <p:sp>
         <p:nvSpPr>
-          <p:cNvPr id="225727416" name="AutoShape 2"/>
+          <p:cNvPr id="911489308" name="AutoShape 2"/>
           <p:cNvSpPr/>
           <p:nvPr/>
         </p:nvSpPr>
@@ -11723,7 +11820,7 @@
       </p:sp>
       <p:sp>
         <p:nvSpPr>
-          <p:cNvPr id="1147287715" name="Freeform 3"/>
+          <p:cNvPr id="841540024" name="Freeform 3"/>
           <p:cNvSpPr/>
           <p:nvPr/>
         </p:nvSpPr>
@@ -11777,7 +11874,7 @@
       </p:sp>
       <p:sp>
         <p:nvSpPr>
-          <p:cNvPr id="1008549099" name="Freeform 4"/>
+          <p:cNvPr id="68254099" name="Freeform 4"/>
           <p:cNvSpPr/>
           <p:nvPr/>
         </p:nvSpPr>
@@ -11831,7 +11928,7 @@
       </p:sp>
       <p:sp>
         <p:nvSpPr>
-          <p:cNvPr id="554854090" name="Freeform 5"/>
+          <p:cNvPr id="1024843138" name="Freeform 5"/>
           <p:cNvSpPr/>
           <p:nvPr/>
         </p:nvSpPr>
@@ -11885,7 +11982,7 @@
       </p:sp>
       <p:sp>
         <p:nvSpPr>
-          <p:cNvPr id="1242821230" name="Freeform 6"/>
+          <p:cNvPr id="2723315" name="Freeform 6"/>
           <p:cNvSpPr/>
           <p:nvPr/>
         </p:nvSpPr>
@@ -11939,7 +12036,7 @@
       </p:sp>
       <p:sp>
         <p:nvSpPr>
-          <p:cNvPr id="1996066520" name="Freeform 7"/>
+          <p:cNvPr id="1434679232" name="Freeform 7"/>
           <p:cNvSpPr/>
           <p:nvPr/>
         </p:nvSpPr>
@@ -11993,7 +12090,7 @@
       </p:sp>
       <p:sp>
         <p:nvSpPr>
-          <p:cNvPr id="1479323852" name="AutoShape 8"/>
+          <p:cNvPr id="1710332836" name="AutoShape 8"/>
           <p:cNvSpPr/>
           <p:nvPr/>
         </p:nvSpPr>
@@ -12026,7 +12123,7 @@
       </p:sp>
       <p:sp>
         <p:nvSpPr>
-          <p:cNvPr id="47888603" name="Freeform 9"/>
+          <p:cNvPr id="873977087" name="Freeform 9"/>
           <p:cNvSpPr/>
           <p:nvPr/>
         </p:nvSpPr>
@@ -12080,7 +12177,7 @@
       </p:sp>
       <p:sp>
         <p:nvSpPr>
-          <p:cNvPr id="1119276397" name="Freeform 10"/>
+          <p:cNvPr id="935249938" name="Freeform 10"/>
           <p:cNvSpPr/>
           <p:nvPr/>
         </p:nvSpPr>
@@ -12134,7 +12231,7 @@
       </p:sp>
       <p:sp>
         <p:nvSpPr>
-          <p:cNvPr id="608336526" name="TextBox 11"/>
+          <p:cNvPr id="1556220260" name="TextBox 11"/>
           <p:cNvSpPr txBox="1"/>
           <p:nvPr/>
         </p:nvSpPr>
@@ -12177,7 +12274,7 @@
       </p:sp>
       <p:sp>
         <p:nvSpPr>
-          <p:cNvPr id="1755098497" name="TextBox 12"/>
+          <p:cNvPr id="1417823998" name="TextBox 12"/>
           <p:cNvSpPr txBox="1"/>
           <p:nvPr/>
         </p:nvSpPr>
@@ -12220,7 +12317,7 @@
       </p:sp>
       <p:sp>
         <p:nvSpPr>
-          <p:cNvPr id="1545976980" name="TextBox 13"/>
+          <p:cNvPr id="431911303" name="TextBox 13"/>
           <p:cNvSpPr txBox="1"/>
           <p:nvPr/>
         </p:nvSpPr>
@@ -12263,7 +12360,7 @@
       </p:sp>
       <p:sp>
         <p:nvSpPr>
-          <p:cNvPr id="1834979393" name="TextBox 14"/>
+          <p:cNvPr id="670905675" name="TextBox 14"/>
           <p:cNvSpPr txBox="1"/>
           <p:nvPr/>
         </p:nvSpPr>
@@ -12306,7 +12403,7 @@
       </p:sp>
       <p:sp>
         <p:nvSpPr>
-          <p:cNvPr id="1259433777" name="TextBox 15"/>
+          <p:cNvPr id="1234300785" name="TextBox 15"/>
           <p:cNvSpPr txBox="1"/>
           <p:nvPr/>
         </p:nvSpPr>
@@ -12349,7 +12446,7 @@
       </p:sp>
       <p:sp>
         <p:nvSpPr>
-          <p:cNvPr id="1618241087" name="TextBox 16"/>
+          <p:cNvPr id="742090752" name="TextBox 16"/>
           <p:cNvSpPr txBox="1"/>
           <p:nvPr/>
         </p:nvSpPr>
@@ -12392,7 +12489,7 @@
       </p:sp>
       <p:sp>
         <p:nvSpPr>
-          <p:cNvPr id="870212320" name="TextBox 17"/>
+          <p:cNvPr id="985523857" name="TextBox 17"/>
           <p:cNvSpPr txBox="1"/>
           <p:nvPr/>
         </p:nvSpPr>
@@ -12435,7 +12532,7 @@
       </p:sp>
       <p:sp>
         <p:nvSpPr>
-          <p:cNvPr id="1395768419" name="AutoShape 18"/>
+          <p:cNvPr id="1484753597" name="AutoShape 18"/>
           <p:cNvSpPr/>
           <p:nvPr/>
         </p:nvSpPr>
@@ -12468,7 +12565,7 @@
       </p:sp>
       <p:sp>
         <p:nvSpPr>
-          <p:cNvPr id="408463899" name="AutoShape 19"/>
+          <p:cNvPr id="790083863" name="AutoShape 19"/>
           <p:cNvSpPr/>
           <p:nvPr/>
         </p:nvSpPr>
@@ -12501,7 +12598,7 @@
       </p:sp>
       <p:sp>
         <p:nvSpPr>
-          <p:cNvPr id="609128850" name="Freeform 20"/>
+          <p:cNvPr id="1093383860" name="Freeform 20"/>
           <p:cNvSpPr/>
           <p:nvPr/>
         </p:nvSpPr>
@@ -12555,7 +12652,7 @@
       </p:sp>
       <p:sp>
         <p:nvSpPr>
-          <p:cNvPr id="1885228967" name="AutoShape 21"/>
+          <p:cNvPr id="1957652287" name="AutoShape 21"/>
           <p:cNvSpPr/>
           <p:nvPr/>
         </p:nvSpPr>
@@ -12588,7 +12685,7 @@
       </p:sp>
       <p:sp>
         <p:nvSpPr>
-          <p:cNvPr id="990278727" name="AutoShape 22"/>
+          <p:cNvPr id="54009605" name="AutoShape 22"/>
           <p:cNvSpPr/>
           <p:nvPr/>
         </p:nvSpPr>
@@ -12621,7 +12718,7 @@
       </p:sp>
       <p:sp>
         <p:nvSpPr>
-          <p:cNvPr id="109601101" name="AutoShape 23"/>
+          <p:cNvPr id="1468644771" name="AutoShape 23"/>
           <p:cNvSpPr/>
           <p:nvPr/>
         </p:nvSpPr>
@@ -12654,7 +12751,7 @@
       </p:sp>
       <p:sp>
         <p:nvSpPr>
-          <p:cNvPr id="1225600126" name="AutoShape 24"/>
+          <p:cNvPr id="1612684212" name="AutoShape 24"/>
           <p:cNvSpPr/>
           <p:nvPr/>
         </p:nvSpPr>
@@ -12687,7 +12784,7 @@
       </p:sp>
       <p:sp>
         <p:nvSpPr>
-          <p:cNvPr id="53429421" name="Freeform 25"/>
+          <p:cNvPr id="2104439930" name="Freeform 25"/>
           <p:cNvSpPr/>
           <p:nvPr/>
         </p:nvSpPr>
@@ -12741,7 +12838,7 @@
       </p:sp>
       <p:sp>
         <p:nvSpPr>
-          <p:cNvPr id="1236444053" name="Freeform 26"/>
+          <p:cNvPr id="185153051" name="Freeform 26"/>
           <p:cNvSpPr/>
           <p:nvPr/>
         </p:nvSpPr>
@@ -12795,7 +12892,7 @@
       </p:sp>
       <p:sp>
         <p:nvSpPr>
-          <p:cNvPr id="1670758488" name="Freeform 27"/>
+          <p:cNvPr id="1191309114" name="Freeform 27"/>
           <p:cNvSpPr/>
           <p:nvPr/>
         </p:nvSpPr>
@@ -12849,7 +12946,7 @@
       </p:sp>
       <p:sp>
         <p:nvSpPr>
-          <p:cNvPr id="329732500" name="Freeform 28"/>
+          <p:cNvPr id="880955622" name="Freeform 28"/>
           <p:cNvSpPr/>
           <p:nvPr/>
         </p:nvSpPr>
@@ -12903,7 +13000,7 @@
       </p:sp>
       <p:sp>
         <p:nvSpPr>
-          <p:cNvPr id="1854856602" name="TextBox 29"/>
+          <p:cNvPr id="2000039932" name="TextBox 29"/>
           <p:cNvSpPr txBox="1"/>
           <p:nvPr/>
         </p:nvSpPr>
@@ -12946,7 +13043,7 @@
       </p:sp>
       <p:sp>
         <p:nvSpPr>
-          <p:cNvPr id="1201836719" name="TextBox 30"/>
+          <p:cNvPr id="655172619" name="TextBox 30"/>
           <p:cNvSpPr txBox="1"/>
           <p:nvPr/>
         </p:nvSpPr>
@@ -12989,7 +13086,7 @@
       </p:sp>
       <p:sp>
         <p:nvSpPr>
-          <p:cNvPr id="599485944" name="TextBox 31"/>
+          <p:cNvPr id="769473994" name="TextBox 31"/>
           <p:cNvSpPr txBox="1"/>
           <p:nvPr/>
         </p:nvSpPr>
@@ -13032,7 +13129,7 @@
       </p:sp>
       <p:sp>
         <p:nvSpPr>
-          <p:cNvPr id="967420298" name="AutoShape 32"/>
+          <p:cNvPr id="2061287153" name="AutoShape 32"/>
           <p:cNvSpPr/>
           <p:nvPr/>
         </p:nvSpPr>
@@ -13065,7 +13162,7 @@
       </p:sp>
       <p:sp>
         <p:nvSpPr>
-          <p:cNvPr id="1230381192" name="AutoShape 33"/>
+          <p:cNvPr id="1308061434" name="AutoShape 33"/>
           <p:cNvSpPr/>
           <p:nvPr/>
         </p:nvSpPr>
@@ -13098,7 +13195,7 @@
       </p:sp>
       <p:sp>
         <p:nvSpPr>
-          <p:cNvPr id="1607774121" name="Freeform 34"/>
+          <p:cNvPr id="201386476" name="Freeform 34"/>
           <p:cNvSpPr/>
           <p:nvPr/>
         </p:nvSpPr>
@@ -13152,7 +13249,7 @@
       </p:sp>
       <p:sp>
         <p:nvSpPr>
-          <p:cNvPr id="862172253" name="AutoShape 35"/>
+          <p:cNvPr id="767684681" name="AutoShape 35"/>
           <p:cNvSpPr/>
           <p:nvPr/>
         </p:nvSpPr>
@@ -13185,7 +13282,7 @@
       </p:sp>
       <p:sp>
         <p:nvSpPr>
-          <p:cNvPr id="1991164706" name="AutoShape 36"/>
+          <p:cNvPr id="2079430038" name="AutoShape 36"/>
           <p:cNvSpPr/>
           <p:nvPr/>
         </p:nvSpPr>
@@ -13218,7 +13315,7 @@
       </p:sp>
       <p:sp>
         <p:nvSpPr>
-          <p:cNvPr id="207682902" name="Freeform 37"/>
+          <p:cNvPr id="893460498" name="Freeform 37"/>
           <p:cNvSpPr/>
           <p:nvPr/>
         </p:nvSpPr>
@@ -13291,9 +13388,7 @@
   <p:cSld name="">
     <p:bg>
       <p:bgPr shadeToTitle="0">
-        <a:solidFill>
-          <a:srgbClr val="F2F2F2"/>
-        </a:solidFill>
+        <a:noFill/>
       </p:bgPr>
     </p:bg>
     <p:spTree>
@@ -13312,28 +13407,96 @@
       </p:grpSpPr>
       <p:grpSp>
         <p:nvGrpSpPr>
-          <p:cNvPr id="326161830" name="Group 2"/>
+          <p:cNvPr id="1034770690" name=""/>
           <p:cNvGrpSpPr/>
           <p:nvPr/>
         </p:nvGrpSpPr>
         <p:grpSpPr bwMode="auto">
-          <a:xfrm rot="0">
-            <a:off x="5137431" y="2151162"/>
-            <a:ext cx="1854142" cy="1854142"/>
+          <a:xfrm>
+            <a:off x="1550498" y="2151162"/>
+            <a:ext cx="10262662" cy="2570003"/>
             <a:chOff x="0" y="0"/>
-            <a:chExt cx="812800" cy="812800"/>
+            <a:chExt cx="10262662" cy="2570003"/>
           </a:xfrm>
         </p:grpSpPr>
+        <p:grpSp>
+          <p:nvGrpSpPr>
+            <p:cNvPr id="1802503057" name="Group 2"/>
+            <p:cNvGrpSpPr/>
+            <p:nvPr/>
+          </p:nvGrpSpPr>
+          <p:grpSpPr bwMode="auto">
+            <a:xfrm rot="0">
+              <a:off x="3586931" y="0"/>
+              <a:ext cx="1854142" cy="1854142"/>
+              <a:chOff x="0" y="0"/>
+              <a:chExt cx="812800" cy="812800"/>
+            </a:xfrm>
+          </p:grpSpPr>
+          <p:sp>
+            <p:nvSpPr>
+              <p:cNvPr id="3" name="Freeform 3"/>
+              <p:cNvSpPr/>
+              <p:nvPr/>
+            </p:nvSpPr>
+            <p:spPr bwMode="auto">
+              <a:xfrm rot="0" flipH="0" flipV="0">
+                <a:off x="0" y="0"/>
+                <a:ext cx="812800" cy="812800"/>
+              </a:xfrm>
+              <a:custGeom>
+                <a:avLst/>
+                <a:gdLst/>
+                <a:ahLst/>
+                <a:cxnLst/>
+                <a:rect l="l" t="t" r="r" b="b"/>
+                <a:pathLst>
+                  <a:path w="812800" h="812800" fill="norm" stroke="1" extrusionOk="0">
+                    <a:moveTo>
+                      <a:pt x="406400" y="0"/>
+                    </a:moveTo>
+                    <a:cubicBezTo>
+                      <a:pt x="181951" y="0"/>
+                      <a:pt x="0" y="181951"/>
+                      <a:pt x="0" y="406400"/>
+                    </a:cubicBezTo>
+                    <a:cubicBezTo>
+                      <a:pt x="0" y="630849"/>
+                      <a:pt x="181951" y="812800"/>
+                      <a:pt x="406400" y="812800"/>
+                    </a:cubicBezTo>
+                    <a:cubicBezTo>
+                      <a:pt x="630849" y="812800"/>
+                      <a:pt x="812800" y="630849"/>
+                      <a:pt x="812800" y="406400"/>
+                    </a:cubicBezTo>
+                    <a:cubicBezTo>
+                      <a:pt x="812800" y="181951"/>
+                      <a:pt x="630849" y="0"/>
+                      <a:pt x="406400" y="0"/>
+                    </a:cubicBezTo>
+                    <a:close/>
+                  </a:path>
+                </a:pathLst>
+              </a:custGeom>
+              <a:blipFill>
+                <a:blip r:embed="rId3"/>
+                <a:srcRect l="0" t="0" r="0" b="0"/>
+                <a:stretch/>
+              </a:blipFill>
+            </p:spPr>
+          </p:sp>
+        </p:grpSp>
         <p:sp>
           <p:nvSpPr>
-            <p:cNvPr id="3" name="Freeform 3"/>
+            <p:cNvPr id="602007178" name="Freeform 4"/>
             <p:cNvSpPr/>
             <p:nvPr/>
           </p:nvSpPr>
           <p:spPr bwMode="auto">
             <a:xfrm rot="0" flipH="0" flipV="0">
-              <a:off x="0" y="0"/>
-              <a:ext cx="812800" cy="812800"/>
+              <a:off x="0" y="554742"/>
+              <a:ext cx="2158430" cy="744658"/>
             </a:xfrm>
             <a:custGeom>
               <a:avLst/>
@@ -13342,260 +13505,208 @@
               <a:cxnLst/>
               <a:rect l="l" t="t" r="r" b="b"/>
               <a:pathLst>
-                <a:path w="812800" h="812800" fill="norm" stroke="1" extrusionOk="0">
+                <a:path w="2158430" h="744658" fill="norm" stroke="1" extrusionOk="0">
                   <a:moveTo>
-                    <a:pt x="406400" y="0"/>
+                    <a:pt x="0" y="0"/>
                   </a:moveTo>
-                  <a:cubicBezTo>
-                    <a:pt x="181951" y="0"/>
-                    <a:pt x="0" y="181951"/>
-                    <a:pt x="0" y="406400"/>
-                  </a:cubicBezTo>
-                  <a:cubicBezTo>
-                    <a:pt x="0" y="630849"/>
-                    <a:pt x="181951" y="812800"/>
-                    <a:pt x="406400" y="812800"/>
-                  </a:cubicBezTo>
-                  <a:cubicBezTo>
-                    <a:pt x="630849" y="812800"/>
-                    <a:pt x="812800" y="630849"/>
-                    <a:pt x="812800" y="406400"/>
-                  </a:cubicBezTo>
-                  <a:cubicBezTo>
-                    <a:pt x="812800" y="181951"/>
-                    <a:pt x="630849" y="0"/>
-                    <a:pt x="406400" y="0"/>
-                  </a:cubicBezTo>
+                  <a:lnTo>
+                    <a:pt x="2158430" y="0"/>
+                  </a:lnTo>
+                  <a:lnTo>
+                    <a:pt x="2158430" y="744658"/>
+                  </a:lnTo>
+                  <a:lnTo>
+                    <a:pt x="0" y="744658"/>
+                  </a:lnTo>
+                  <a:lnTo>
+                    <a:pt x="0" y="0"/>
+                  </a:lnTo>
                   <a:close/>
                 </a:path>
               </a:pathLst>
             </a:custGeom>
             <a:blipFill>
-              <a:blip r:embed="rId3"/>
+              <a:blip r:embed="rId4"/>
               <a:srcRect l="0" t="0" r="0" b="0"/>
               <a:stretch/>
             </a:blipFill>
           </p:spPr>
         </p:sp>
+        <p:sp>
+          <p:nvSpPr>
+            <p:cNvPr id="528961903" name="Freeform 5"/>
+            <p:cNvSpPr/>
+            <p:nvPr/>
+          </p:nvSpPr>
+          <p:spPr bwMode="auto">
+            <a:xfrm rot="0" flipH="0" flipV="0">
+              <a:off x="7019472" y="0"/>
+              <a:ext cx="2030081" cy="1854142"/>
+            </a:xfrm>
+            <a:custGeom>
+              <a:avLst/>
+              <a:gdLst/>
+              <a:ahLst/>
+              <a:cxnLst/>
+              <a:rect l="l" t="t" r="r" b="b"/>
+              <a:pathLst>
+                <a:path w="2030082" h="1854142" fill="norm" stroke="1" extrusionOk="0">
+                  <a:moveTo>
+                    <a:pt x="0" y="0"/>
+                  </a:moveTo>
+                  <a:lnTo>
+                    <a:pt x="2030083" y="0"/>
+                  </a:lnTo>
+                  <a:lnTo>
+                    <a:pt x="2030083" y="1854142"/>
+                  </a:lnTo>
+                  <a:lnTo>
+                    <a:pt x="0" y="1854142"/>
+                  </a:lnTo>
+                  <a:lnTo>
+                    <a:pt x="0" y="0"/>
+                  </a:lnTo>
+                  <a:close/>
+                </a:path>
+              </a:pathLst>
+            </a:custGeom>
+            <a:blipFill>
+              <a:blip r:embed="rId5"/>
+              <a:srcRect l="0" t="0" r="0" b="0"/>
+              <a:stretch/>
+            </a:blipFill>
+          </p:spPr>
+        </p:sp>
+        <p:sp>
+          <p:nvSpPr>
+            <p:cNvPr id="1659766082" name="TextBox 6"/>
+            <p:cNvSpPr txBox="1"/>
+            <p:nvPr/>
+          </p:nvSpPr>
+          <p:spPr bwMode="auto">
+            <a:xfrm rot="0" flipH="0" flipV="0">
+              <a:off x="0" y="2107364"/>
+              <a:ext cx="2398886" cy="462639"/>
+            </a:xfrm>
+            <a:prstGeom prst="rect">
+              <a:avLst/>
+            </a:prstGeom>
+            <a:grpFill/>
+          </p:spPr>
+          <p:txBody>
+            <a:bodyPr lIns="0" tIns="0" rIns="0" bIns="0" rtlCol="0" anchor="t">
+              <a:spAutoFit/>
+            </a:bodyPr>
+            <a:lstStyle/>
+            <a:p>
+              <a:pPr algn="ctr">
+                <a:lnSpc>
+                  <a:spcPts val="3640"/>
+                </a:lnSpc>
+                <a:defRPr/>
+              </a:pPr>
+              <a:r>
+                <a:rPr lang="en-US" sz="2600" b="1">
+                  <a:solidFill>
+                    <a:srgbClr val="000000"/>
+                  </a:solidFill>
+                  <a:latin typeface="Rubik Bold"/>
+                  <a:ea typeface="Rubik Bold"/>
+                  <a:cs typeface="Rubik Bold"/>
+                </a:rPr>
+                <a:t>IVPN</a:t>
+              </a:r>
+              <a:endParaRPr/>
+            </a:p>
+          </p:txBody>
+        </p:sp>
+        <p:sp>
+          <p:nvSpPr>
+            <p:cNvPr id="1685135885" name="TextBox 7"/>
+            <p:cNvSpPr txBox="1"/>
+            <p:nvPr/>
+          </p:nvSpPr>
+          <p:spPr bwMode="auto">
+            <a:xfrm rot="0" flipH="0" flipV="0">
+              <a:off x="2906166" y="2107364"/>
+              <a:ext cx="3482636" cy="462639"/>
+            </a:xfrm>
+            <a:prstGeom prst="rect">
+              <a:avLst/>
+            </a:prstGeom>
+            <a:grpFill/>
+          </p:spPr>
+          <p:txBody>
+            <a:bodyPr lIns="0" tIns="0" rIns="0" bIns="0" rtlCol="0" anchor="t">
+              <a:spAutoFit/>
+            </a:bodyPr>
+            <a:lstStyle/>
+            <a:p>
+              <a:pPr algn="ctr">
+                <a:lnSpc>
+                  <a:spcPts val="3640"/>
+                </a:lnSpc>
+                <a:defRPr/>
+              </a:pPr>
+              <a:r>
+                <a:rPr lang="en-US" sz="2600" b="1">
+                  <a:solidFill>
+                    <a:srgbClr val="000000"/>
+                  </a:solidFill>
+                  <a:latin typeface="Rubik Bold"/>
+                  <a:ea typeface="Rubik Bold"/>
+                  <a:cs typeface="Rubik Bold"/>
+                </a:rPr>
+                <a:t>Mullvad VPN</a:t>
+              </a:r>
+              <a:endParaRPr/>
+            </a:p>
+          </p:txBody>
+        </p:sp>
+        <p:sp>
+          <p:nvSpPr>
+            <p:cNvPr id="967811422" name="TextBox 8"/>
+            <p:cNvSpPr txBox="1"/>
+            <p:nvPr/>
+          </p:nvSpPr>
+          <p:spPr bwMode="auto">
+            <a:xfrm rot="0" flipH="0" flipV="0">
+              <a:off x="6978026" y="2107364"/>
+              <a:ext cx="3284636" cy="462639"/>
+            </a:xfrm>
+            <a:prstGeom prst="rect">
+              <a:avLst/>
+            </a:prstGeom>
+            <a:grpFill/>
+          </p:spPr>
+          <p:txBody>
+            <a:bodyPr lIns="0" tIns="0" rIns="0" bIns="0" rtlCol="0" anchor="t">
+              <a:spAutoFit/>
+            </a:bodyPr>
+            <a:lstStyle/>
+            <a:p>
+              <a:pPr algn="l">
+                <a:lnSpc>
+                  <a:spcPts val="3640"/>
+                </a:lnSpc>
+                <a:defRPr/>
+              </a:pPr>
+              <a:r>
+                <a:rPr lang="en-US" sz="2600" b="1">
+                  <a:solidFill>
+                    <a:srgbClr val="000000"/>
+                  </a:solidFill>
+                  <a:latin typeface="Rubik Bold"/>
+                  <a:ea typeface="Rubik Bold"/>
+                  <a:cs typeface="Rubik Bold"/>
+                </a:rPr>
+                <a:t>Proton VPN</a:t>
+              </a:r>
+              <a:endParaRPr/>
+            </a:p>
+          </p:txBody>
+        </p:sp>
       </p:grpSp>
-      <p:sp>
-        <p:nvSpPr>
-          <p:cNvPr id="1051169692" name="Freeform 4"/>
-          <p:cNvSpPr/>
-          <p:nvPr/>
-        </p:nvSpPr>
-        <p:spPr bwMode="auto">
-          <a:xfrm rot="0" flipH="0" flipV="0">
-            <a:off x="1550500" y="2705904"/>
-            <a:ext cx="2158430" cy="744658"/>
-          </a:xfrm>
-          <a:custGeom>
-            <a:avLst/>
-            <a:gdLst/>
-            <a:ahLst/>
-            <a:cxnLst/>
-            <a:rect l="l" t="t" r="r" b="b"/>
-            <a:pathLst>
-              <a:path w="2158430" h="744658" fill="norm" stroke="1" extrusionOk="0">
-                <a:moveTo>
-                  <a:pt x="0" y="0"/>
-                </a:moveTo>
-                <a:lnTo>
-                  <a:pt x="2158430" y="0"/>
-                </a:lnTo>
-                <a:lnTo>
-                  <a:pt x="2158430" y="744658"/>
-                </a:lnTo>
-                <a:lnTo>
-                  <a:pt x="0" y="744658"/>
-                </a:lnTo>
-                <a:lnTo>
-                  <a:pt x="0" y="0"/>
-                </a:lnTo>
-                <a:close/>
-              </a:path>
-            </a:pathLst>
-          </a:custGeom>
-          <a:blipFill>
-            <a:blip r:embed="rId4"/>
-            <a:srcRect l="0" t="0" r="0" b="0"/>
-            <a:stretch/>
-          </a:blipFill>
-        </p:spPr>
-        <p:txBody>
-          <a:bodyPr/>
-          <a:p/>
-        </p:txBody>
-      </p:sp>
-      <p:sp>
-        <p:nvSpPr>
-          <p:cNvPr id="1043119927" name="Freeform 5"/>
-          <p:cNvSpPr/>
-          <p:nvPr/>
-        </p:nvSpPr>
-        <p:spPr bwMode="auto">
-          <a:xfrm rot="0" flipH="0" flipV="0">
-            <a:off x="8569972" y="2151162"/>
-            <a:ext cx="2030081" cy="1854142"/>
-          </a:xfrm>
-          <a:custGeom>
-            <a:avLst/>
-            <a:gdLst/>
-            <a:ahLst/>
-            <a:cxnLst/>
-            <a:rect l="l" t="t" r="r" b="b"/>
-            <a:pathLst>
-              <a:path w="2030082" h="1854142" fill="norm" stroke="1" extrusionOk="0">
-                <a:moveTo>
-                  <a:pt x="0" y="0"/>
-                </a:moveTo>
-                <a:lnTo>
-                  <a:pt x="2030083" y="0"/>
-                </a:lnTo>
-                <a:lnTo>
-                  <a:pt x="2030083" y="1854142"/>
-                </a:lnTo>
-                <a:lnTo>
-                  <a:pt x="0" y="1854142"/>
-                </a:lnTo>
-                <a:lnTo>
-                  <a:pt x="0" y="0"/>
-                </a:lnTo>
-                <a:close/>
-              </a:path>
-            </a:pathLst>
-          </a:custGeom>
-          <a:blipFill>
-            <a:blip r:embed="rId5"/>
-            <a:srcRect l="0" t="0" r="0" b="0"/>
-            <a:stretch/>
-          </a:blipFill>
-        </p:spPr>
-        <p:txBody>
-          <a:bodyPr/>
-          <a:p/>
-        </p:txBody>
-      </p:sp>
-      <p:sp>
-        <p:nvSpPr>
-          <p:cNvPr id="138736158" name="TextBox 6"/>
-          <p:cNvSpPr txBox="1"/>
-          <p:nvPr/>
-        </p:nvSpPr>
-        <p:spPr bwMode="auto">
-          <a:xfrm rot="0" flipH="0" flipV="0">
-            <a:off x="1550499" y="4258527"/>
-            <a:ext cx="2398886" cy="462639"/>
-          </a:xfrm>
-          <a:prstGeom prst="rect">
-            <a:avLst/>
-          </a:prstGeom>
-        </p:spPr>
-        <p:txBody>
-          <a:bodyPr lIns="0" tIns="0" rIns="0" bIns="0" rtlCol="0" anchor="t">
-            <a:spAutoFit/>
-          </a:bodyPr>
-          <a:lstStyle/>
-          <a:p>
-            <a:pPr algn="ctr">
-              <a:lnSpc>
-                <a:spcPts val="3640"/>
-              </a:lnSpc>
-              <a:defRPr/>
-            </a:pPr>
-            <a:r>
-              <a:rPr sz="2600" b="1" lang="en-US">
-                <a:solidFill>
-                  <a:srgbClr val="000000"/>
-                </a:solidFill>
-                <a:latin typeface="Rubik Bold"/>
-              </a:rPr>
-              <a:t>IVPN</a:t>
-            </a:r>
-            <a:endParaRPr/>
-          </a:p>
-        </p:txBody>
-      </p:sp>
-      <p:sp>
-        <p:nvSpPr>
-          <p:cNvPr id="410645639" name="TextBox 7"/>
-          <p:cNvSpPr txBox="1"/>
-          <p:nvPr/>
-        </p:nvSpPr>
-        <p:spPr bwMode="auto">
-          <a:xfrm rot="0" flipH="0" flipV="0">
-            <a:off x="4456666" y="4258527"/>
-            <a:ext cx="3482636" cy="462639"/>
-          </a:xfrm>
-          <a:prstGeom prst="rect">
-            <a:avLst/>
-          </a:prstGeom>
-        </p:spPr>
-        <p:txBody>
-          <a:bodyPr lIns="0" tIns="0" rIns="0" bIns="0" rtlCol="0" anchor="t">
-            <a:spAutoFit/>
-          </a:bodyPr>
-          <a:lstStyle/>
-          <a:p>
-            <a:pPr algn="ctr">
-              <a:lnSpc>
-                <a:spcPts val="3640"/>
-              </a:lnSpc>
-              <a:defRPr/>
-            </a:pPr>
-            <a:r>
-              <a:rPr sz="2600" b="1" lang="en-US">
-                <a:solidFill>
-                  <a:srgbClr val="000000"/>
-                </a:solidFill>
-                <a:latin typeface="Rubik Bold"/>
-              </a:rPr>
-              <a:t>Mullvad VPN</a:t>
-            </a:r>
-            <a:endParaRPr/>
-          </a:p>
-        </p:txBody>
-      </p:sp>
-      <p:sp>
-        <p:nvSpPr>
-          <p:cNvPr id="1489463141" name="TextBox 8"/>
-          <p:cNvSpPr txBox="1"/>
-          <p:nvPr/>
-        </p:nvSpPr>
-        <p:spPr bwMode="auto">
-          <a:xfrm rot="0" flipH="0" flipV="0">
-            <a:off x="8528526" y="4258527"/>
-            <a:ext cx="3284636" cy="462639"/>
-          </a:xfrm>
-          <a:prstGeom prst="rect">
-            <a:avLst/>
-          </a:prstGeom>
-        </p:spPr>
-        <p:txBody>
-          <a:bodyPr lIns="0" tIns="0" rIns="0" bIns="0" rtlCol="0" anchor="t">
-            <a:spAutoFit/>
-          </a:bodyPr>
-          <a:lstStyle/>
-          <a:p>
-            <a:pPr algn="l">
-              <a:lnSpc>
-                <a:spcPts val="3640"/>
-              </a:lnSpc>
-              <a:defRPr/>
-            </a:pPr>
-            <a:r>
-              <a:rPr sz="2600" b="1" lang="en-US">
-                <a:solidFill>
-                  <a:srgbClr val="000000"/>
-                </a:solidFill>
-                <a:latin typeface="Rubik Bold"/>
-              </a:rPr>
-              <a:t>Proton VPN</a:t>
-            </a:r>
-            <a:endParaRPr/>
-          </a:p>
-        </p:txBody>
-      </p:sp>
     </p:spTree>
   </p:cSld>
   <p:clrMapOvr>
